--- a/Blueprint/UseCases_PersistenID.pptx
+++ b/Blueprint/UseCases_PersistenID.pptx
@@ -6,17 +6,18 @@
   </p:sldMasterIdLst>
   <p:sldIdLst>
     <p:sldId id="256" r:id="rId2"/>
-    <p:sldId id="261" r:id="rId3"/>
-    <p:sldId id="258" r:id="rId4"/>
-    <p:sldId id="270" r:id="rId5"/>
-    <p:sldId id="271" r:id="rId6"/>
-    <p:sldId id="272" r:id="rId7"/>
-    <p:sldId id="273" r:id="rId8"/>
-    <p:sldId id="274" r:id="rId9"/>
-    <p:sldId id="275" r:id="rId10"/>
-    <p:sldId id="276" r:id="rId11"/>
-    <p:sldId id="277" r:id="rId12"/>
-    <p:sldId id="278" r:id="rId13"/>
+    <p:sldId id="279" r:id="rId3"/>
+    <p:sldId id="261" r:id="rId4"/>
+    <p:sldId id="258" r:id="rId5"/>
+    <p:sldId id="270" r:id="rId6"/>
+    <p:sldId id="271" r:id="rId7"/>
+    <p:sldId id="272" r:id="rId8"/>
+    <p:sldId id="273" r:id="rId9"/>
+    <p:sldId id="274" r:id="rId10"/>
+    <p:sldId id="275" r:id="rId11"/>
+    <p:sldId id="276" r:id="rId12"/>
+    <p:sldId id="277" r:id="rId13"/>
+    <p:sldId id="278" r:id="rId14"/>
   </p:sldIdLst>
   <p:sldSz cx="12192000" cy="6858000"/>
   <p:notesSz cx="6858000" cy="9144000"/>
@@ -991,7 +992,7 @@
           <a:p>
             <a:fld id="{29BFE5FB-EE99-4E69-B2F7-C156D52DE4BD}" type="datetimeFigureOut">
               <a:rPr lang="en-GB" smtClean="0"/>
-              <a:t>05/07/2023</a:t>
+              <a:t>25/09/2025</a:t>
             </a:fld>
             <a:endParaRPr lang="en-GB"/>
           </a:p>
@@ -1191,7 +1192,7 @@
           <a:p>
             <a:fld id="{29BFE5FB-EE99-4E69-B2F7-C156D52DE4BD}" type="datetimeFigureOut">
               <a:rPr lang="en-GB" smtClean="0"/>
-              <a:t>05/07/2023</a:t>
+              <a:t>25/09/2025</a:t>
             </a:fld>
             <a:endParaRPr lang="en-GB"/>
           </a:p>
@@ -1401,7 +1402,7 @@
           <a:p>
             <a:fld id="{29BFE5FB-EE99-4E69-B2F7-C156D52DE4BD}" type="datetimeFigureOut">
               <a:rPr lang="en-GB" smtClean="0"/>
-              <a:t>05/07/2023</a:t>
+              <a:t>25/09/2025</a:t>
             </a:fld>
             <a:endParaRPr lang="en-GB"/>
           </a:p>
@@ -1601,7 +1602,7 @@
           <a:p>
             <a:fld id="{29BFE5FB-EE99-4E69-B2F7-C156D52DE4BD}" type="datetimeFigureOut">
               <a:rPr lang="en-GB" smtClean="0"/>
-              <a:t>05/07/2023</a:t>
+              <a:t>25/09/2025</a:t>
             </a:fld>
             <a:endParaRPr lang="en-GB"/>
           </a:p>
@@ -1877,7 +1878,7 @@
           <a:p>
             <a:fld id="{29BFE5FB-EE99-4E69-B2F7-C156D52DE4BD}" type="datetimeFigureOut">
               <a:rPr lang="en-GB" smtClean="0"/>
-              <a:t>05/07/2023</a:t>
+              <a:t>25/09/2025</a:t>
             </a:fld>
             <a:endParaRPr lang="en-GB"/>
           </a:p>
@@ -2145,7 +2146,7 @@
           <a:p>
             <a:fld id="{29BFE5FB-EE99-4E69-B2F7-C156D52DE4BD}" type="datetimeFigureOut">
               <a:rPr lang="en-GB" smtClean="0"/>
-              <a:t>05/07/2023</a:t>
+              <a:t>25/09/2025</a:t>
             </a:fld>
             <a:endParaRPr lang="en-GB"/>
           </a:p>
@@ -2560,7 +2561,7 @@
           <a:p>
             <a:fld id="{29BFE5FB-EE99-4E69-B2F7-C156D52DE4BD}" type="datetimeFigureOut">
               <a:rPr lang="en-GB" smtClean="0"/>
-              <a:t>05/07/2023</a:t>
+              <a:t>25/09/2025</a:t>
             </a:fld>
             <a:endParaRPr lang="en-GB"/>
           </a:p>
@@ -2702,7 +2703,7 @@
           <a:p>
             <a:fld id="{29BFE5FB-EE99-4E69-B2F7-C156D52DE4BD}" type="datetimeFigureOut">
               <a:rPr lang="en-GB" smtClean="0"/>
-              <a:t>05/07/2023</a:t>
+              <a:t>25/09/2025</a:t>
             </a:fld>
             <a:endParaRPr lang="en-GB"/>
           </a:p>
@@ -2815,7 +2816,7 @@
           <a:p>
             <a:fld id="{29BFE5FB-EE99-4E69-B2F7-C156D52DE4BD}" type="datetimeFigureOut">
               <a:rPr lang="en-GB" smtClean="0"/>
-              <a:t>05/07/2023</a:t>
+              <a:t>25/09/2025</a:t>
             </a:fld>
             <a:endParaRPr lang="en-GB"/>
           </a:p>
@@ -3128,7 +3129,7 @@
           <a:p>
             <a:fld id="{29BFE5FB-EE99-4E69-B2F7-C156D52DE4BD}" type="datetimeFigureOut">
               <a:rPr lang="en-GB" smtClean="0"/>
-              <a:t>05/07/2023</a:t>
+              <a:t>25/09/2025</a:t>
             </a:fld>
             <a:endParaRPr lang="en-GB"/>
           </a:p>
@@ -3417,7 +3418,7 @@
           <a:p>
             <a:fld id="{29BFE5FB-EE99-4E69-B2F7-C156D52DE4BD}" type="datetimeFigureOut">
               <a:rPr lang="en-GB" smtClean="0"/>
-              <a:t>05/07/2023</a:t>
+              <a:t>25/09/2025</a:t>
             </a:fld>
             <a:endParaRPr lang="en-GB"/>
           </a:p>
@@ -3660,7 +3661,7 @@
           <a:p>
             <a:fld id="{29BFE5FB-EE99-4E69-B2F7-C156D52DE4BD}" type="datetimeFigureOut">
               <a:rPr lang="en-GB" smtClean="0"/>
-              <a:t>05/07/2023</a:t>
+              <a:t>25/09/2025</a:t>
             </a:fld>
             <a:endParaRPr lang="en-GB"/>
           </a:p>
@@ -4092,7 +4093,7 @@
         <p:spPr>
           <a:xfrm>
             <a:off x="419100" y="740122"/>
-            <a:ext cx="11216639" cy="5632311"/>
+            <a:ext cx="11216639" cy="5909310"/>
           </a:xfrm>
           <a:prstGeom prst="rect">
             <a:avLst/>
@@ -4121,6 +4122,21 @@
               <a:rPr lang="en-GB" dirty="0"/>
               <a:t> File</a:t>
             </a:r>
+          </a:p>
+          <a:p>
+            <a:pPr marL="800100" lvl="1" indent="-342900">
+              <a:buFont typeface="Arial" panose="020B0604020202020204" pitchFamily="34" charset="0"/>
+              <a:buChar char="•"/>
+            </a:pPr>
+            <a:r>
+              <a:rPr lang="en-GB" dirty="0"/>
+              <a:t>Safety elements ESV, PSD, ESD, LST mapped as </a:t>
+            </a:r>
+            <a:r>
+              <a:rPr lang="en-GB"/>
+              <a:t>ProcessSafetyFunction</a:t>
+            </a:r>
+            <a:endParaRPr lang="en-GB" dirty="0"/>
           </a:p>
           <a:p>
             <a:pPr marL="342900" indent="-342900">
@@ -4386,7 +4402,7 @@
           <a:p>
             <a:r>
               <a:rPr lang="en-GB" sz="2000" b="1" dirty="0"/>
-              <a:t>Use Cases</a:t>
+              <a:t>Use Cases – DEXPI 2.0</a:t>
             </a:r>
           </a:p>
         </p:txBody>
@@ -4405,6 +4421,212 @@
 </file>
 
 <file path=ppt/slides/slide10.xml><?xml version="1.0" encoding="utf-8"?>
+<p:sld xmlns:a="http://schemas.openxmlformats.org/drawingml/2006/main" xmlns:r="http://schemas.openxmlformats.org/officeDocument/2006/relationships" xmlns:p="http://schemas.openxmlformats.org/presentationml/2006/main">
+  <p:cSld>
+    <p:spTree>
+      <p:nvGrpSpPr>
+        <p:cNvPr id="1" name=""/>
+        <p:cNvGrpSpPr/>
+        <p:nvPr/>
+      </p:nvGrpSpPr>
+      <p:grpSpPr>
+        <a:xfrm>
+          <a:off x="0" y="0"/>
+          <a:ext cx="0" cy="0"/>
+          <a:chOff x="0" y="0"/>
+          <a:chExt cx="0" cy="0"/>
+        </a:xfrm>
+      </p:grpSpPr>
+      <p:sp>
+        <p:nvSpPr>
+          <p:cNvPr id="3" name="TextBox 2">
+            <a:extLst>
+              <a:ext uri="{FF2B5EF4-FFF2-40B4-BE49-F238E27FC236}">
+                <a16:creationId xmlns:a16="http://schemas.microsoft.com/office/drawing/2014/main" id="{7F5AFCD7-CF64-A7F6-B02F-987454D53E76}"/>
+              </a:ext>
+            </a:extLst>
+          </p:cNvPr>
+          <p:cNvSpPr txBox="1"/>
+          <p:nvPr/>
+        </p:nvSpPr>
+        <p:spPr>
+          <a:xfrm>
+            <a:off x="124051" y="102889"/>
+            <a:ext cx="11607874" cy="646331"/>
+          </a:xfrm>
+          <a:prstGeom prst="rect">
+            <a:avLst/>
+          </a:prstGeom>
+          <a:noFill/>
+        </p:spPr>
+        <p:txBody>
+          <a:bodyPr wrap="square">
+            <a:spAutoFit/>
+          </a:bodyPr>
+          <a:lstStyle/>
+          <a:p>
+            <a:pPr marL="342900" indent="-342900">
+              <a:buFont typeface="+mj-lt"/>
+              <a:buAutoNum type="arabicPeriod" startAt="7"/>
+            </a:pPr>
+            <a:r>
+              <a:rPr lang="en-GB" dirty="0"/>
+              <a:t>Modify TI0007 combination -&gt; TW/TT combination with Special Item on </a:t>
+            </a:r>
+            <a:r>
+              <a:rPr lang="en-GB" dirty="0" err="1"/>
+              <a:t>PipingNetworkSegment</a:t>
+            </a:r>
+            <a:endParaRPr lang="en-GB" dirty="0"/>
+          </a:p>
+          <a:p>
+            <a:pPr marL="800100" lvl="1" indent="-342900">
+              <a:buFont typeface="Arial" panose="020B0604020202020204" pitchFamily="34" charset="0"/>
+              <a:buChar char="•"/>
+            </a:pPr>
+            <a:r>
+              <a:rPr lang="en-GB" dirty="0"/>
+              <a:t>** Use ND0037 ‘hidden’ in-line piping component to give location of special item.</a:t>
+            </a:r>
+          </a:p>
+        </p:txBody>
+      </p:sp>
+      <p:graphicFrame>
+        <p:nvGraphicFramePr>
+          <p:cNvPr id="7" name="Table 7">
+            <a:extLst>
+              <a:ext uri="{FF2B5EF4-FFF2-40B4-BE49-F238E27FC236}">
+                <a16:creationId xmlns:a16="http://schemas.microsoft.com/office/drawing/2014/main" id="{122A675D-8A6B-1BF2-70BB-B5522B02FF65}"/>
+              </a:ext>
+            </a:extLst>
+          </p:cNvPr>
+          <p:cNvGraphicFramePr>
+            <a:graphicFrameLocks noGrp="1"/>
+          </p:cNvGraphicFramePr>
+          <p:nvPr/>
+        </p:nvGraphicFramePr>
+        <p:xfrm>
+          <a:off x="307975" y="1191319"/>
+          <a:ext cx="7807325" cy="5257106"/>
+        </p:xfrm>
+        <a:graphic>
+          <a:graphicData uri="http://schemas.openxmlformats.org/drawingml/2006/table">
+            <a:tbl>
+              <a:tblPr firstRow="1" bandRow="1">
+                <a:tableStyleId>{5C22544A-7EE6-4342-B048-85BDC9FD1C3A}</a:tableStyleId>
+              </a:tblPr>
+              <a:tblGrid>
+                <a:gridCol w="7807325">
+                  <a:extLst>
+                    <a:ext uri="{9D8B030D-6E8A-4147-A177-3AD203B41FA5}">
+                      <a16:colId xmlns:a16="http://schemas.microsoft.com/office/drawing/2014/main" val="3422904110"/>
+                    </a:ext>
+                  </a:extLst>
+                </a:gridCol>
+              </a:tblGrid>
+              <a:tr h="5257106">
+                <a:tc>
+                  <a:txBody>
+                    <a:bodyPr/>
+                    <a:lstStyle/>
+                    <a:p>
+                      <a:endParaRPr lang="en-GB" dirty="0"/>
+                    </a:p>
+                  </a:txBody>
+                  <a:tcPr>
+                    <a:lnL w="12700" cap="flat" cmpd="sng" algn="ctr">
+                      <a:solidFill>
+                        <a:schemeClr val="tx1"/>
+                      </a:solidFill>
+                      <a:prstDash val="solid"/>
+                      <a:round/>
+                      <a:headEnd type="none" w="med" len="med"/>
+                      <a:tailEnd type="none" w="med" len="med"/>
+                    </a:lnL>
+                    <a:lnR w="12700" cap="flat" cmpd="sng" algn="ctr">
+                      <a:solidFill>
+                        <a:schemeClr val="tx1"/>
+                      </a:solidFill>
+                      <a:prstDash val="solid"/>
+                      <a:round/>
+                      <a:headEnd type="none" w="med" len="med"/>
+                      <a:tailEnd type="none" w="med" len="med"/>
+                    </a:lnR>
+                    <a:lnT w="12700" cap="flat" cmpd="sng" algn="ctr">
+                      <a:solidFill>
+                        <a:schemeClr val="tx1"/>
+                      </a:solidFill>
+                      <a:prstDash val="solid"/>
+                      <a:round/>
+                      <a:headEnd type="none" w="med" len="med"/>
+                      <a:tailEnd type="none" w="med" len="med"/>
+                    </a:lnT>
+                    <a:lnB w="12700" cap="flat" cmpd="sng" algn="ctr">
+                      <a:solidFill>
+                        <a:schemeClr val="tx1"/>
+                      </a:solidFill>
+                      <a:prstDash val="solid"/>
+                      <a:round/>
+                      <a:headEnd type="none" w="med" len="med"/>
+                      <a:tailEnd type="none" w="med" len="med"/>
+                    </a:lnB>
+                    <a:noFill/>
+                  </a:tcPr>
+                </a:tc>
+                <a:extLst>
+                  <a:ext uri="{0D108BD9-81ED-4DB2-BD59-A6C34878D82A}">
+                    <a16:rowId xmlns:a16="http://schemas.microsoft.com/office/drawing/2014/main" val="1045134656"/>
+                  </a:ext>
+                </a:extLst>
+              </a:tr>
+            </a:tbl>
+          </a:graphicData>
+        </a:graphic>
+      </p:graphicFrame>
+      <p:pic>
+        <p:nvPicPr>
+          <p:cNvPr id="10" name="Picture 9">
+            <a:extLst>
+              <a:ext uri="{FF2B5EF4-FFF2-40B4-BE49-F238E27FC236}">
+                <a16:creationId xmlns:a16="http://schemas.microsoft.com/office/drawing/2014/main" id="{2FE4FC03-15C9-14A5-E453-CCDA76F24BDF}"/>
+              </a:ext>
+            </a:extLst>
+          </p:cNvPr>
+          <p:cNvPicPr>
+            <a:picLocks noChangeAspect="1"/>
+          </p:cNvPicPr>
+          <p:nvPr/>
+        </p:nvPicPr>
+        <p:blipFill>
+          <a:blip r:embed="rId2"/>
+          <a:stretch>
+            <a:fillRect/>
+          </a:stretch>
+        </p:blipFill>
+        <p:spPr>
+          <a:xfrm>
+            <a:off x="348263" y="1322795"/>
+            <a:ext cx="7726747" cy="4691042"/>
+          </a:xfrm>
+          <a:prstGeom prst="rect">
+            <a:avLst/>
+          </a:prstGeom>
+        </p:spPr>
+      </p:pic>
+    </p:spTree>
+    <p:extLst>
+      <p:ext uri="{BB962C8B-B14F-4D97-AF65-F5344CB8AC3E}">
+        <p14:creationId xmlns:p14="http://schemas.microsoft.com/office/powerpoint/2010/main" val="2639372836"/>
+      </p:ext>
+    </p:extLst>
+  </p:cSld>
+  <p:clrMapOvr>
+    <a:masterClrMapping/>
+  </p:clrMapOvr>
+</p:sld>
+</file>
+
+<file path=ppt/slides/slide11.xml><?xml version="1.0" encoding="utf-8"?>
 <p:sld xmlns:a="http://schemas.openxmlformats.org/drawingml/2006/main" xmlns:r="http://schemas.openxmlformats.org/officeDocument/2006/relationships" xmlns:p="http://schemas.openxmlformats.org/presentationml/2006/main">
   <p:cSld>
     <p:spTree>
@@ -4883,7 +5105,7 @@
 </p:sld>
 </file>
 
-<file path=ppt/slides/slide11.xml><?xml version="1.0" encoding="utf-8"?>
+<file path=ppt/slides/slide12.xml><?xml version="1.0" encoding="utf-8"?>
 <p:sld xmlns:a="http://schemas.openxmlformats.org/drawingml/2006/main" xmlns:r="http://schemas.openxmlformats.org/officeDocument/2006/relationships" xmlns:p="http://schemas.openxmlformats.org/presentationml/2006/main">
   <p:cSld>
     <p:spTree>
@@ -4987,7 +5209,7 @@
 </p:sld>
 </file>
 
-<file path=ppt/slides/slide12.xml><?xml version="1.0" encoding="utf-8"?>
+<file path=ppt/slides/slide13.xml><?xml version="1.0" encoding="utf-8"?>
 <p:sld xmlns:a="http://schemas.openxmlformats.org/drawingml/2006/main" xmlns:r="http://schemas.openxmlformats.org/officeDocument/2006/relationships" xmlns:p="http://schemas.openxmlformats.org/presentationml/2006/main">
   <p:cSld>
     <p:spTree>
@@ -5203,6 +5425,356 @@
   <p:cSld>
     <p:spTree>
       <p:nvGrpSpPr>
+        <p:cNvPr id="1" name="">
+          <a:extLst>
+            <a:ext uri="{FF2B5EF4-FFF2-40B4-BE49-F238E27FC236}">
+              <a16:creationId xmlns:a16="http://schemas.microsoft.com/office/drawing/2014/main" id="{999C25D3-68B5-C35E-0F36-F1B3DCC5F231}"/>
+            </a:ext>
+          </a:extLst>
+        </p:cNvPr>
+        <p:cNvGrpSpPr/>
+        <p:nvPr/>
+      </p:nvGrpSpPr>
+      <p:grpSpPr>
+        <a:xfrm>
+          <a:off x="0" y="0"/>
+          <a:ext cx="0" cy="0"/>
+          <a:chOff x="0" y="0"/>
+          <a:chExt cx="0" cy="0"/>
+        </a:xfrm>
+      </p:grpSpPr>
+      <p:sp>
+        <p:nvSpPr>
+          <p:cNvPr id="2" name="TextBox 1">
+            <a:extLst>
+              <a:ext uri="{FF2B5EF4-FFF2-40B4-BE49-F238E27FC236}">
+                <a16:creationId xmlns:a16="http://schemas.microsoft.com/office/drawing/2014/main" id="{FD75E844-5478-D1BD-3F1D-1C8C3953A366}"/>
+              </a:ext>
+            </a:extLst>
+          </p:cNvPr>
+          <p:cNvSpPr txBox="1"/>
+          <p:nvPr/>
+        </p:nvSpPr>
+        <p:spPr>
+          <a:xfrm>
+            <a:off x="419100" y="740122"/>
+            <a:ext cx="11216639" cy="5632311"/>
+          </a:xfrm>
+          <a:prstGeom prst="rect">
+            <a:avLst/>
+          </a:prstGeom>
+          <a:noFill/>
+        </p:spPr>
+        <p:txBody>
+          <a:bodyPr wrap="square" rtlCol="0">
+            <a:spAutoFit/>
+          </a:bodyPr>
+          <a:lstStyle/>
+          <a:p>
+            <a:pPr marL="342900" indent="-342900">
+              <a:buFont typeface="+mj-lt"/>
+              <a:buAutoNum type="arabicPeriod"/>
+            </a:pPr>
+            <a:r>
+              <a:rPr lang="en-GB" dirty="0"/>
+              <a:t>Base </a:t>
+            </a:r>
+            <a:r>
+              <a:rPr lang="en-GB" dirty="0" err="1"/>
+              <a:t>BluePrint</a:t>
+            </a:r>
+            <a:r>
+              <a:rPr lang="en-GB" dirty="0"/>
+              <a:t> File</a:t>
+            </a:r>
+          </a:p>
+          <a:p>
+            <a:pPr marL="342900" indent="-342900">
+              <a:buFont typeface="+mj-lt"/>
+              <a:buAutoNum type="arabicPeriod" startAt="2"/>
+            </a:pPr>
+            <a:r>
+              <a:rPr lang="en-GB" dirty="0"/>
+              <a:t>Split DEXPI </a:t>
+            </a:r>
+            <a:r>
+              <a:rPr lang="en-GB" dirty="0" err="1"/>
+              <a:t>PipingNetworkSegment</a:t>
+            </a:r>
+            <a:r>
+              <a:rPr lang="en-GB" dirty="0"/>
+              <a:t> with a piping tee. E.g. split D-20L00004A DEXPI </a:t>
+            </a:r>
+            <a:r>
+              <a:rPr lang="en-GB" dirty="0" err="1"/>
+              <a:t>PipingNetworkSegment</a:t>
+            </a:r>
+            <a:r>
+              <a:rPr lang="en-GB" dirty="0"/>
+              <a:t> by placing a piping tee between the ESV0006 actuated valve and the FE0001 element and include an unnamed valve.</a:t>
+            </a:r>
+          </a:p>
+          <a:p>
+            <a:pPr marL="342900" indent="-342900">
+              <a:buFont typeface="+mj-lt"/>
+              <a:buAutoNum type="arabicPeriod" startAt="3"/>
+            </a:pPr>
+            <a:r>
+              <a:rPr lang="en-GB" dirty="0"/>
+              <a:t>Rename TI0003/TIC0003/TV0003 to TI0013/TIC0013/TV0013 and update associated loop.</a:t>
+            </a:r>
+          </a:p>
+          <a:p>
+            <a:pPr marL="800100" lvl="1" indent="-342900">
+              <a:buFont typeface="Arial" panose="020B0604020202020204" pitchFamily="34" charset="0"/>
+              <a:buChar char="•"/>
+            </a:pPr>
+            <a:r>
+              <a:rPr lang="en-GB" dirty="0"/>
+              <a:t>Retain the original </a:t>
+            </a:r>
+            <a:r>
+              <a:rPr lang="en-GB" dirty="0" err="1"/>
+              <a:t>PersistentID</a:t>
+            </a:r>
+            <a:r>
+              <a:rPr lang="en-GB" dirty="0"/>
+              <a:t> and change the name.</a:t>
+            </a:r>
+          </a:p>
+          <a:p>
+            <a:pPr marL="342900" indent="-342900">
+              <a:buFont typeface="+mj-lt"/>
+              <a:buAutoNum type="arabicPeriod" startAt="4"/>
+            </a:pPr>
+            <a:r>
+              <a:rPr lang="en-GB" dirty="0"/>
+              <a:t>Remove the note and unused nozzle from 20VA001 and update elevation to EL. 400000</a:t>
+            </a:r>
+          </a:p>
+          <a:p>
+            <a:pPr marL="342900" indent="-342900">
+              <a:buFont typeface="+mj-lt"/>
+              <a:buAutoNum type="arabicPeriod" startAt="5"/>
+            </a:pPr>
+            <a:r>
+              <a:rPr lang="en-GB" dirty="0"/>
+              <a:t>Change the type of actuator for HV0001 to a PA006A actuator type</a:t>
+            </a:r>
+          </a:p>
+          <a:p>
+            <a:pPr marL="800100" lvl="1" indent="-342900">
+              <a:buFont typeface="Arial" panose="020B0604020202020204" pitchFamily="34" charset="0"/>
+              <a:buChar char="•"/>
+            </a:pPr>
+            <a:r>
+              <a:rPr lang="en-GB" dirty="0"/>
+              <a:t>Retain </a:t>
+            </a:r>
+            <a:r>
+              <a:rPr lang="en-GB" dirty="0" err="1"/>
+              <a:t>PersistentID</a:t>
+            </a:r>
+            <a:r>
+              <a:rPr lang="en-GB" dirty="0"/>
+              <a:t> of original actuator</a:t>
+            </a:r>
+          </a:p>
+          <a:p>
+            <a:pPr marL="342900" indent="-342900">
+              <a:buFont typeface="+mj-lt"/>
+              <a:buAutoNum type="arabicPeriod" startAt="6"/>
+            </a:pPr>
+            <a:r>
+              <a:rPr lang="en-GB" dirty="0"/>
+              <a:t>Add heat tracing to </a:t>
+            </a:r>
+            <a:r>
+              <a:rPr lang="en-GB" dirty="0" err="1"/>
+              <a:t>PipingNetworkSegment</a:t>
+            </a:r>
+            <a:r>
+              <a:rPr lang="en-GB" dirty="0"/>
+              <a:t> D-20L A- PL-AS200-</a:t>
+            </a:r>
+          </a:p>
+          <a:p>
+            <a:pPr marL="800100" lvl="1" indent="-342900">
+              <a:buFont typeface="Arial" panose="020B0604020202020204" pitchFamily="34" charset="0"/>
+              <a:buChar char="•"/>
+            </a:pPr>
+            <a:r>
+              <a:rPr lang="en-GB" dirty="0"/>
+              <a:t>Modify the heat trace attribute on the segment</a:t>
+            </a:r>
+          </a:p>
+          <a:p>
+            <a:pPr marL="342900" indent="-342900">
+              <a:buFont typeface="+mj-lt"/>
+              <a:buAutoNum type="arabicPeriod" startAt="7"/>
+            </a:pPr>
+            <a:r>
+              <a:rPr lang="en-GB" dirty="0"/>
+              <a:t>Modify TI0007 combination -&gt; TW/TT combination with Special Item on </a:t>
+            </a:r>
+            <a:r>
+              <a:rPr lang="en-GB" dirty="0" err="1"/>
+              <a:t>PipingNetworkSegment</a:t>
+            </a:r>
+            <a:endParaRPr lang="en-GB" dirty="0"/>
+          </a:p>
+          <a:p>
+            <a:pPr marL="800100" lvl="1" indent="-342900">
+              <a:buFont typeface="Arial" panose="020B0604020202020204" pitchFamily="34" charset="0"/>
+              <a:buChar char="•"/>
+            </a:pPr>
+            <a:r>
+              <a:rPr lang="en-GB" dirty="0"/>
+              <a:t>** Use ND0037 ‘hidden’ in-line piping component to give location of special item.</a:t>
+            </a:r>
+          </a:p>
+          <a:p>
+            <a:pPr marL="342900" indent="-342900">
+              <a:buFont typeface="+mj-lt"/>
+              <a:buAutoNum type="arabicPeriod" startAt="8"/>
+            </a:pPr>
+            <a:r>
+              <a:rPr lang="en-GB" dirty="0"/>
+              <a:t>Additional property break at one of the break</a:t>
+            </a:r>
+          </a:p>
+          <a:p>
+            <a:pPr marL="742950" lvl="1" indent="-285750">
+              <a:buFont typeface="Arial" panose="020B0604020202020204" pitchFamily="34" charset="0"/>
+              <a:buChar char="•"/>
+            </a:pPr>
+            <a:r>
+              <a:rPr lang="en-GB" dirty="0"/>
+              <a:t>Add </a:t>
+            </a:r>
+            <a:r>
+              <a:rPr lang="en-GB" dirty="0" err="1"/>
+              <a:t>AreaBreak</a:t>
+            </a:r>
+            <a:r>
+              <a:rPr lang="en-GB" dirty="0"/>
+              <a:t> AP110 / AP310 need to associate these to the </a:t>
+            </a:r>
+            <a:r>
+              <a:rPr lang="en-GB" dirty="0" err="1"/>
+              <a:t>PipingNetworkSystems</a:t>
+            </a:r>
+            <a:endParaRPr lang="en-GB" dirty="0"/>
+          </a:p>
+          <a:p>
+            <a:pPr marL="342900" indent="-342900">
+              <a:buFont typeface="+mj-lt"/>
+              <a:buAutoNum type="arabicPeriod" startAt="9"/>
+            </a:pPr>
+            <a:r>
+              <a:rPr lang="en-GB" dirty="0"/>
+              <a:t>Scale D-20HA001 symbol y-axis scaling 1.25 </a:t>
+            </a:r>
+          </a:p>
+          <a:p>
+            <a:pPr marL="342900" indent="-342900">
+              <a:buFont typeface="+mj-lt"/>
+              <a:buAutoNum type="arabicPeriod" startAt="9"/>
+            </a:pPr>
+            <a:r>
+              <a:rPr lang="en-GB" dirty="0"/>
+              <a:t>Modify pipe lines: </a:t>
+            </a:r>
+            <a:r>
+              <a:rPr lang="en-GB" sz="1800" b="0" i="0" u="none" strike="noStrike" baseline="0" dirty="0"/>
+              <a:t>D-20L00005A-1200PL-AS200-   &amp; D-20L00015A-0800PL-AD750- to test </a:t>
+            </a:r>
+            <a:r>
+              <a:rPr lang="en-GB" sz="1800" b="0" i="0" u="none" strike="noStrike" baseline="0" dirty="0" err="1"/>
+              <a:t>PipingNetworkSegment</a:t>
+            </a:r>
+            <a:r>
+              <a:rPr lang="en-GB" sz="1800" b="0" i="0" u="none" strike="noStrike" baseline="0" dirty="0"/>
+              <a:t> export variants</a:t>
+            </a:r>
+            <a:endParaRPr lang="en-GB" dirty="0"/>
+          </a:p>
+          <a:p>
+            <a:pPr marL="342900" indent="-342900">
+              <a:buFont typeface="+mj-lt"/>
+              <a:buAutoNum type="arabicPeriod" startAt="9"/>
+            </a:pPr>
+            <a:endParaRPr lang="en-GB" dirty="0"/>
+          </a:p>
+          <a:p>
+            <a:pPr marL="342900" indent="-342900">
+              <a:buFont typeface="+mj-lt"/>
+              <a:buAutoNum type="arabicPeriod" startAt="9"/>
+            </a:pPr>
+            <a:endParaRPr lang="en-GB" dirty="0"/>
+          </a:p>
+          <a:p>
+            <a:pPr marL="742950" lvl="1" indent="-285750">
+              <a:buFont typeface="Arial" panose="020B0604020202020204" pitchFamily="34" charset="0"/>
+              <a:buChar char="•"/>
+            </a:pPr>
+            <a:endParaRPr lang="en-GB" dirty="0"/>
+          </a:p>
+        </p:txBody>
+      </p:sp>
+      <p:sp>
+        <p:nvSpPr>
+          <p:cNvPr id="5" name="TextBox 4">
+            <a:extLst>
+              <a:ext uri="{FF2B5EF4-FFF2-40B4-BE49-F238E27FC236}">
+                <a16:creationId xmlns:a16="http://schemas.microsoft.com/office/drawing/2014/main" id="{50376714-33F1-DD7D-A16F-9E4FE0031AE0}"/>
+              </a:ext>
+            </a:extLst>
+          </p:cNvPr>
+          <p:cNvSpPr txBox="1"/>
+          <p:nvPr/>
+        </p:nvSpPr>
+        <p:spPr>
+          <a:xfrm>
+            <a:off x="419100" y="247650"/>
+            <a:ext cx="11372850" cy="400110"/>
+          </a:xfrm>
+          <a:prstGeom prst="rect">
+            <a:avLst/>
+          </a:prstGeom>
+          <a:noFill/>
+        </p:spPr>
+        <p:txBody>
+          <a:bodyPr wrap="square" rtlCol="0">
+            <a:spAutoFit/>
+          </a:bodyPr>
+          <a:lstStyle/>
+          <a:p>
+            <a:r>
+              <a:rPr lang="en-GB" sz="2000" b="1" dirty="0"/>
+              <a:t>Use Cases - continuation</a:t>
+            </a:r>
+          </a:p>
+        </p:txBody>
+      </p:sp>
+    </p:spTree>
+    <p:extLst>
+      <p:ext uri="{BB962C8B-B14F-4D97-AF65-F5344CB8AC3E}">
+        <p14:creationId xmlns:p14="http://schemas.microsoft.com/office/powerpoint/2010/main" val="4172850123"/>
+      </p:ext>
+    </p:extLst>
+  </p:cSld>
+  <p:clrMapOvr>
+    <a:masterClrMapping/>
+  </p:clrMapOvr>
+</p:sld>
+</file>
+
+<file path=ppt/slides/slide3.xml><?xml version="1.0" encoding="utf-8"?>
+<p:sld xmlns:a="http://schemas.openxmlformats.org/drawingml/2006/main" xmlns:r="http://schemas.openxmlformats.org/officeDocument/2006/relationships" xmlns:p="http://schemas.openxmlformats.org/presentationml/2006/main">
+  <p:cSld>
+    <p:spTree>
+      <p:nvGrpSpPr>
         <p:cNvPr id="1" name=""/>
         <p:cNvGrpSpPr/>
         <p:nvPr/>
@@ -5293,7 +5865,7 @@
 </p:sld>
 </file>
 
-<file path=ppt/slides/slide3.xml><?xml version="1.0" encoding="utf-8"?>
+<file path=ppt/slides/slide4.xml><?xml version="1.0" encoding="utf-8"?>
 <p:sld xmlns:a="http://schemas.openxmlformats.org/drawingml/2006/main" xmlns:r="http://schemas.openxmlformats.org/officeDocument/2006/relationships" xmlns:p="http://schemas.openxmlformats.org/presentationml/2006/main">
   <p:cSld>
     <p:spTree>
@@ -5498,7 +6070,7 @@
 </p:sld>
 </file>
 
-<file path=ppt/slides/slide4.xml><?xml version="1.0" encoding="utf-8"?>
+<file path=ppt/slides/slide5.xml><?xml version="1.0" encoding="utf-8"?>
 <p:sld xmlns:a="http://schemas.openxmlformats.org/drawingml/2006/main" xmlns:r="http://schemas.openxmlformats.org/officeDocument/2006/relationships" xmlns:p="http://schemas.openxmlformats.org/presentationml/2006/main">
   <p:cSld>
     <p:spTree>
@@ -5705,7 +6277,7 @@
 </p:sld>
 </file>
 
-<file path=ppt/slides/slide5.xml><?xml version="1.0" encoding="utf-8"?>
+<file path=ppt/slides/slide6.xml><?xml version="1.0" encoding="utf-8"?>
 <p:sld xmlns:a="http://schemas.openxmlformats.org/drawingml/2006/main" xmlns:r="http://schemas.openxmlformats.org/officeDocument/2006/relationships" xmlns:p="http://schemas.openxmlformats.org/presentationml/2006/main">
   <p:cSld>
     <p:spTree>
@@ -5914,7 +6486,7 @@
 </p:sld>
 </file>
 
-<file path=ppt/slides/slide6.xml><?xml version="1.0" encoding="utf-8"?>
+<file path=ppt/slides/slide7.xml><?xml version="1.0" encoding="utf-8"?>
 <p:sld xmlns:a="http://schemas.openxmlformats.org/drawingml/2006/main" xmlns:r="http://schemas.openxmlformats.org/officeDocument/2006/relationships" xmlns:p="http://schemas.openxmlformats.org/presentationml/2006/main">
   <p:cSld>
     <p:spTree>
@@ -6105,7 +6677,7 @@
 </p:sld>
 </file>
 
-<file path=ppt/slides/slide7.xml><?xml version="1.0" encoding="utf-8"?>
+<file path=ppt/slides/slide8.xml><?xml version="1.0" encoding="utf-8"?>
 <p:sld xmlns:a="http://schemas.openxmlformats.org/drawingml/2006/main" xmlns:r="http://schemas.openxmlformats.org/officeDocument/2006/relationships" xmlns:p="http://schemas.openxmlformats.org/presentationml/2006/main">
   <p:cSld>
     <p:spTree>
@@ -6314,7 +6886,7 @@
 </p:sld>
 </file>
 
-<file path=ppt/slides/slide8.xml><?xml version="1.0" encoding="utf-8"?>
+<file path=ppt/slides/slide9.xml><?xml version="1.0" encoding="utf-8"?>
 <p:sld xmlns:a="http://schemas.openxmlformats.org/drawingml/2006/main" xmlns:r="http://schemas.openxmlformats.org/officeDocument/2006/relationships" xmlns:p="http://schemas.openxmlformats.org/presentationml/2006/main">
   <p:cSld>
     <p:spTree>
@@ -6514,212 +7086,6 @@
     <p:extLst>
       <p:ext uri="{BB962C8B-B14F-4D97-AF65-F5344CB8AC3E}">
         <p14:creationId xmlns:p14="http://schemas.microsoft.com/office/powerpoint/2010/main" val="2621331373"/>
-      </p:ext>
-    </p:extLst>
-  </p:cSld>
-  <p:clrMapOvr>
-    <a:masterClrMapping/>
-  </p:clrMapOvr>
-</p:sld>
-</file>
-
-<file path=ppt/slides/slide9.xml><?xml version="1.0" encoding="utf-8"?>
-<p:sld xmlns:a="http://schemas.openxmlformats.org/drawingml/2006/main" xmlns:r="http://schemas.openxmlformats.org/officeDocument/2006/relationships" xmlns:p="http://schemas.openxmlformats.org/presentationml/2006/main">
-  <p:cSld>
-    <p:spTree>
-      <p:nvGrpSpPr>
-        <p:cNvPr id="1" name=""/>
-        <p:cNvGrpSpPr/>
-        <p:nvPr/>
-      </p:nvGrpSpPr>
-      <p:grpSpPr>
-        <a:xfrm>
-          <a:off x="0" y="0"/>
-          <a:ext cx="0" cy="0"/>
-          <a:chOff x="0" y="0"/>
-          <a:chExt cx="0" cy="0"/>
-        </a:xfrm>
-      </p:grpSpPr>
-      <p:sp>
-        <p:nvSpPr>
-          <p:cNvPr id="3" name="TextBox 2">
-            <a:extLst>
-              <a:ext uri="{FF2B5EF4-FFF2-40B4-BE49-F238E27FC236}">
-                <a16:creationId xmlns:a16="http://schemas.microsoft.com/office/drawing/2014/main" id="{7F5AFCD7-CF64-A7F6-B02F-987454D53E76}"/>
-              </a:ext>
-            </a:extLst>
-          </p:cNvPr>
-          <p:cNvSpPr txBox="1"/>
-          <p:nvPr/>
-        </p:nvSpPr>
-        <p:spPr>
-          <a:xfrm>
-            <a:off x="124051" y="102889"/>
-            <a:ext cx="11607874" cy="646331"/>
-          </a:xfrm>
-          <a:prstGeom prst="rect">
-            <a:avLst/>
-          </a:prstGeom>
-          <a:noFill/>
-        </p:spPr>
-        <p:txBody>
-          <a:bodyPr wrap="square">
-            <a:spAutoFit/>
-          </a:bodyPr>
-          <a:lstStyle/>
-          <a:p>
-            <a:pPr marL="342900" indent="-342900">
-              <a:buFont typeface="+mj-lt"/>
-              <a:buAutoNum type="arabicPeriod" startAt="7"/>
-            </a:pPr>
-            <a:r>
-              <a:rPr lang="en-GB" dirty="0"/>
-              <a:t>Modify TI0007 combination -&gt; TW/TT combination with Special Item on </a:t>
-            </a:r>
-            <a:r>
-              <a:rPr lang="en-GB" dirty="0" err="1"/>
-              <a:t>PipingNetworkSegment</a:t>
-            </a:r>
-            <a:endParaRPr lang="en-GB" dirty="0"/>
-          </a:p>
-          <a:p>
-            <a:pPr marL="800100" lvl="1" indent="-342900">
-              <a:buFont typeface="Arial" panose="020B0604020202020204" pitchFamily="34" charset="0"/>
-              <a:buChar char="•"/>
-            </a:pPr>
-            <a:r>
-              <a:rPr lang="en-GB" dirty="0"/>
-              <a:t>** Use ND0037 ‘hidden’ in-line piping component to give location of special item.</a:t>
-            </a:r>
-          </a:p>
-        </p:txBody>
-      </p:sp>
-      <p:graphicFrame>
-        <p:nvGraphicFramePr>
-          <p:cNvPr id="7" name="Table 7">
-            <a:extLst>
-              <a:ext uri="{FF2B5EF4-FFF2-40B4-BE49-F238E27FC236}">
-                <a16:creationId xmlns:a16="http://schemas.microsoft.com/office/drawing/2014/main" id="{122A675D-8A6B-1BF2-70BB-B5522B02FF65}"/>
-              </a:ext>
-            </a:extLst>
-          </p:cNvPr>
-          <p:cNvGraphicFramePr>
-            <a:graphicFrameLocks noGrp="1"/>
-          </p:cNvGraphicFramePr>
-          <p:nvPr/>
-        </p:nvGraphicFramePr>
-        <p:xfrm>
-          <a:off x="307975" y="1191319"/>
-          <a:ext cx="7807325" cy="5257106"/>
-        </p:xfrm>
-        <a:graphic>
-          <a:graphicData uri="http://schemas.openxmlformats.org/drawingml/2006/table">
-            <a:tbl>
-              <a:tblPr firstRow="1" bandRow="1">
-                <a:tableStyleId>{5C22544A-7EE6-4342-B048-85BDC9FD1C3A}</a:tableStyleId>
-              </a:tblPr>
-              <a:tblGrid>
-                <a:gridCol w="7807325">
-                  <a:extLst>
-                    <a:ext uri="{9D8B030D-6E8A-4147-A177-3AD203B41FA5}">
-                      <a16:colId xmlns:a16="http://schemas.microsoft.com/office/drawing/2014/main" val="3422904110"/>
-                    </a:ext>
-                  </a:extLst>
-                </a:gridCol>
-              </a:tblGrid>
-              <a:tr h="5257106">
-                <a:tc>
-                  <a:txBody>
-                    <a:bodyPr/>
-                    <a:lstStyle/>
-                    <a:p>
-                      <a:endParaRPr lang="en-GB" dirty="0"/>
-                    </a:p>
-                  </a:txBody>
-                  <a:tcPr>
-                    <a:lnL w="12700" cap="flat" cmpd="sng" algn="ctr">
-                      <a:solidFill>
-                        <a:schemeClr val="tx1"/>
-                      </a:solidFill>
-                      <a:prstDash val="solid"/>
-                      <a:round/>
-                      <a:headEnd type="none" w="med" len="med"/>
-                      <a:tailEnd type="none" w="med" len="med"/>
-                    </a:lnL>
-                    <a:lnR w="12700" cap="flat" cmpd="sng" algn="ctr">
-                      <a:solidFill>
-                        <a:schemeClr val="tx1"/>
-                      </a:solidFill>
-                      <a:prstDash val="solid"/>
-                      <a:round/>
-                      <a:headEnd type="none" w="med" len="med"/>
-                      <a:tailEnd type="none" w="med" len="med"/>
-                    </a:lnR>
-                    <a:lnT w="12700" cap="flat" cmpd="sng" algn="ctr">
-                      <a:solidFill>
-                        <a:schemeClr val="tx1"/>
-                      </a:solidFill>
-                      <a:prstDash val="solid"/>
-                      <a:round/>
-                      <a:headEnd type="none" w="med" len="med"/>
-                      <a:tailEnd type="none" w="med" len="med"/>
-                    </a:lnT>
-                    <a:lnB w="12700" cap="flat" cmpd="sng" algn="ctr">
-                      <a:solidFill>
-                        <a:schemeClr val="tx1"/>
-                      </a:solidFill>
-                      <a:prstDash val="solid"/>
-                      <a:round/>
-                      <a:headEnd type="none" w="med" len="med"/>
-                      <a:tailEnd type="none" w="med" len="med"/>
-                    </a:lnB>
-                    <a:noFill/>
-                  </a:tcPr>
-                </a:tc>
-                <a:extLst>
-                  <a:ext uri="{0D108BD9-81ED-4DB2-BD59-A6C34878D82A}">
-                    <a16:rowId xmlns:a16="http://schemas.microsoft.com/office/drawing/2014/main" val="1045134656"/>
-                  </a:ext>
-                </a:extLst>
-              </a:tr>
-            </a:tbl>
-          </a:graphicData>
-        </a:graphic>
-      </p:graphicFrame>
-      <p:pic>
-        <p:nvPicPr>
-          <p:cNvPr id="10" name="Picture 9">
-            <a:extLst>
-              <a:ext uri="{FF2B5EF4-FFF2-40B4-BE49-F238E27FC236}">
-                <a16:creationId xmlns:a16="http://schemas.microsoft.com/office/drawing/2014/main" id="{2FE4FC03-15C9-14A5-E453-CCDA76F24BDF}"/>
-              </a:ext>
-            </a:extLst>
-          </p:cNvPr>
-          <p:cNvPicPr>
-            <a:picLocks noChangeAspect="1"/>
-          </p:cNvPicPr>
-          <p:nvPr/>
-        </p:nvPicPr>
-        <p:blipFill>
-          <a:blip r:embed="rId2"/>
-          <a:stretch>
-            <a:fillRect/>
-          </a:stretch>
-        </p:blipFill>
-        <p:spPr>
-          <a:xfrm>
-            <a:off x="348263" y="1322795"/>
-            <a:ext cx="7726747" cy="4691042"/>
-          </a:xfrm>
-          <a:prstGeom prst="rect">
-            <a:avLst/>
-          </a:prstGeom>
-        </p:spPr>
-      </p:pic>
-    </p:spTree>
-    <p:extLst>
-      <p:ext uri="{BB962C8B-B14F-4D97-AF65-F5344CB8AC3E}">
-        <p14:creationId xmlns:p14="http://schemas.microsoft.com/office/powerpoint/2010/main" val="2639372836"/>
       </p:ext>
     </p:extLst>
   </p:cSld>

--- a/Blueprint/UseCases_PersistenID.pptx
+++ b/Blueprint/UseCases_PersistenID.pptx
@@ -18,6 +18,7 @@
     <p:sldId id="276" r:id="rId12"/>
     <p:sldId id="277" r:id="rId13"/>
     <p:sldId id="278" r:id="rId14"/>
+    <p:sldId id="280" r:id="rId15"/>
   </p:sldIdLst>
   <p:sldSz cx="12192000" cy="6858000"/>
   <p:notesSz cx="6858000" cy="9144000"/>
@@ -992,7 +993,7 @@
           <a:p>
             <a:fld id="{29BFE5FB-EE99-4E69-B2F7-C156D52DE4BD}" type="datetimeFigureOut">
               <a:rPr lang="en-GB" smtClean="0"/>
-              <a:t>25/09/2025</a:t>
+              <a:t>09/10/2025</a:t>
             </a:fld>
             <a:endParaRPr lang="en-GB"/>
           </a:p>
@@ -1192,7 +1193,7 @@
           <a:p>
             <a:fld id="{29BFE5FB-EE99-4E69-B2F7-C156D52DE4BD}" type="datetimeFigureOut">
               <a:rPr lang="en-GB" smtClean="0"/>
-              <a:t>25/09/2025</a:t>
+              <a:t>09/10/2025</a:t>
             </a:fld>
             <a:endParaRPr lang="en-GB"/>
           </a:p>
@@ -1402,7 +1403,7 @@
           <a:p>
             <a:fld id="{29BFE5FB-EE99-4E69-B2F7-C156D52DE4BD}" type="datetimeFigureOut">
               <a:rPr lang="en-GB" smtClean="0"/>
-              <a:t>25/09/2025</a:t>
+              <a:t>09/10/2025</a:t>
             </a:fld>
             <a:endParaRPr lang="en-GB"/>
           </a:p>
@@ -1602,7 +1603,7 @@
           <a:p>
             <a:fld id="{29BFE5FB-EE99-4E69-B2F7-C156D52DE4BD}" type="datetimeFigureOut">
               <a:rPr lang="en-GB" smtClean="0"/>
-              <a:t>25/09/2025</a:t>
+              <a:t>09/10/2025</a:t>
             </a:fld>
             <a:endParaRPr lang="en-GB"/>
           </a:p>
@@ -1878,7 +1879,7 @@
           <a:p>
             <a:fld id="{29BFE5FB-EE99-4E69-B2F7-C156D52DE4BD}" type="datetimeFigureOut">
               <a:rPr lang="en-GB" smtClean="0"/>
-              <a:t>25/09/2025</a:t>
+              <a:t>09/10/2025</a:t>
             </a:fld>
             <a:endParaRPr lang="en-GB"/>
           </a:p>
@@ -2146,7 +2147,7 @@
           <a:p>
             <a:fld id="{29BFE5FB-EE99-4E69-B2F7-C156D52DE4BD}" type="datetimeFigureOut">
               <a:rPr lang="en-GB" smtClean="0"/>
-              <a:t>25/09/2025</a:t>
+              <a:t>09/10/2025</a:t>
             </a:fld>
             <a:endParaRPr lang="en-GB"/>
           </a:p>
@@ -2561,7 +2562,7 @@
           <a:p>
             <a:fld id="{29BFE5FB-EE99-4E69-B2F7-C156D52DE4BD}" type="datetimeFigureOut">
               <a:rPr lang="en-GB" smtClean="0"/>
-              <a:t>25/09/2025</a:t>
+              <a:t>09/10/2025</a:t>
             </a:fld>
             <a:endParaRPr lang="en-GB"/>
           </a:p>
@@ -2703,7 +2704,7 @@
           <a:p>
             <a:fld id="{29BFE5FB-EE99-4E69-B2F7-C156D52DE4BD}" type="datetimeFigureOut">
               <a:rPr lang="en-GB" smtClean="0"/>
-              <a:t>25/09/2025</a:t>
+              <a:t>09/10/2025</a:t>
             </a:fld>
             <a:endParaRPr lang="en-GB"/>
           </a:p>
@@ -2816,7 +2817,7 @@
           <a:p>
             <a:fld id="{29BFE5FB-EE99-4E69-B2F7-C156D52DE4BD}" type="datetimeFigureOut">
               <a:rPr lang="en-GB" smtClean="0"/>
-              <a:t>25/09/2025</a:t>
+              <a:t>09/10/2025</a:t>
             </a:fld>
             <a:endParaRPr lang="en-GB"/>
           </a:p>
@@ -3129,7 +3130,7 @@
           <a:p>
             <a:fld id="{29BFE5FB-EE99-4E69-B2F7-C156D52DE4BD}" type="datetimeFigureOut">
               <a:rPr lang="en-GB" smtClean="0"/>
-              <a:t>25/09/2025</a:t>
+              <a:t>09/10/2025</a:t>
             </a:fld>
             <a:endParaRPr lang="en-GB"/>
           </a:p>
@@ -3418,7 +3419,7 @@
           <a:p>
             <a:fld id="{29BFE5FB-EE99-4E69-B2F7-C156D52DE4BD}" type="datetimeFigureOut">
               <a:rPr lang="en-GB" smtClean="0"/>
-              <a:t>25/09/2025</a:t>
+              <a:t>09/10/2025</a:t>
             </a:fld>
             <a:endParaRPr lang="en-GB"/>
           </a:p>
@@ -3661,7 +3662,7 @@
           <a:p>
             <a:fld id="{29BFE5FB-EE99-4E69-B2F7-C156D52DE4BD}" type="datetimeFigureOut">
               <a:rPr lang="en-GB" smtClean="0"/>
-              <a:t>25/09/2025</a:t>
+              <a:t>09/10/2025</a:t>
             </a:fld>
             <a:endParaRPr lang="en-GB"/>
           </a:p>
@@ -5122,51 +5123,12 @@
           <a:chExt cx="0" cy="0"/>
         </a:xfrm>
       </p:grpSpPr>
-      <p:sp>
-        <p:nvSpPr>
-          <p:cNvPr id="3" name="TextBox 2">
-            <a:extLst>
-              <a:ext uri="{FF2B5EF4-FFF2-40B4-BE49-F238E27FC236}">
-                <a16:creationId xmlns:a16="http://schemas.microsoft.com/office/drawing/2014/main" id="{7F5AFCD7-CF64-A7F6-B02F-987454D53E76}"/>
-              </a:ext>
-            </a:extLst>
-          </p:cNvPr>
-          <p:cNvSpPr txBox="1"/>
-          <p:nvPr/>
-        </p:nvSpPr>
-        <p:spPr>
-          <a:xfrm>
-            <a:off x="124051" y="102889"/>
-            <a:ext cx="11607874" cy="369332"/>
-          </a:xfrm>
-          <a:prstGeom prst="rect">
-            <a:avLst/>
-          </a:prstGeom>
-          <a:noFill/>
-        </p:spPr>
-        <p:txBody>
-          <a:bodyPr wrap="square">
-            <a:spAutoFit/>
-          </a:bodyPr>
-          <a:lstStyle/>
-          <a:p>
-            <a:pPr marL="342900" indent="-342900">
-              <a:buFont typeface="+mj-lt"/>
-              <a:buAutoNum type="arabicPeriod" startAt="9"/>
-            </a:pPr>
-            <a:r>
-              <a:rPr lang="en-GB" dirty="0"/>
-              <a:t>Scale D-20HA001 symbol y-axis scaling 1.25 </a:t>
-            </a:r>
-          </a:p>
-        </p:txBody>
-      </p:sp>
       <p:pic>
         <p:nvPicPr>
-          <p:cNvPr id="9" name="Picture 8">
-            <a:extLst>
-              <a:ext uri="{FF2B5EF4-FFF2-40B4-BE49-F238E27FC236}">
-                <a16:creationId xmlns:a16="http://schemas.microsoft.com/office/drawing/2014/main" id="{DAA3EFFF-C56B-6CE0-F69F-364BC8F782E0}"/>
+          <p:cNvPr id="6" name="Picture 5">
+            <a:extLst>
+              <a:ext uri="{FF2B5EF4-FFF2-40B4-BE49-F238E27FC236}">
+                <a16:creationId xmlns:a16="http://schemas.microsoft.com/office/drawing/2014/main" id="{458B31A0-581B-67A9-2076-A070EDB4EF2F}"/>
               </a:ext>
             </a:extLst>
           </p:cNvPr>
@@ -5183,8 +5145,8 @@
         </p:blipFill>
         <p:spPr>
           <a:xfrm>
-            <a:off x="458251" y="914288"/>
-            <a:ext cx="8895299" cy="5410312"/>
+            <a:off x="458251" y="914289"/>
+            <a:ext cx="8895299" cy="5428122"/>
           </a:xfrm>
           <a:prstGeom prst="rect">
             <a:avLst/>
@@ -5196,6 +5158,45 @@
           </a:ln>
         </p:spPr>
       </p:pic>
+      <p:sp>
+        <p:nvSpPr>
+          <p:cNvPr id="3" name="TextBox 2">
+            <a:extLst>
+              <a:ext uri="{FF2B5EF4-FFF2-40B4-BE49-F238E27FC236}">
+                <a16:creationId xmlns:a16="http://schemas.microsoft.com/office/drawing/2014/main" id="{7F5AFCD7-CF64-A7F6-B02F-987454D53E76}"/>
+              </a:ext>
+            </a:extLst>
+          </p:cNvPr>
+          <p:cNvSpPr txBox="1"/>
+          <p:nvPr/>
+        </p:nvSpPr>
+        <p:spPr>
+          <a:xfrm>
+            <a:off x="124051" y="102889"/>
+            <a:ext cx="11607874" cy="369332"/>
+          </a:xfrm>
+          <a:prstGeom prst="rect">
+            <a:avLst/>
+          </a:prstGeom>
+          <a:noFill/>
+        </p:spPr>
+        <p:txBody>
+          <a:bodyPr wrap="square">
+            <a:spAutoFit/>
+          </a:bodyPr>
+          <a:lstStyle/>
+          <a:p>
+            <a:pPr marL="342900" indent="-342900">
+              <a:buFont typeface="+mj-lt"/>
+              <a:buAutoNum type="arabicPeriod" startAt="9"/>
+            </a:pPr>
+            <a:r>
+              <a:rPr lang="en-GB" dirty="0"/>
+              <a:t>Scale D-20HA001 symbol y-axis scaling 1.25 </a:t>
+            </a:r>
+          </a:p>
+        </p:txBody>
+      </p:sp>
     </p:spTree>
     <p:extLst>
       <p:ext uri="{BB962C8B-B14F-4D97-AF65-F5344CB8AC3E}">
@@ -5374,10 +5375,10 @@
       </p:sp>
       <p:pic>
         <p:nvPicPr>
-          <p:cNvPr id="9" name="Picture 8">
-            <a:extLst>
-              <a:ext uri="{FF2B5EF4-FFF2-40B4-BE49-F238E27FC236}">
-                <a16:creationId xmlns:a16="http://schemas.microsoft.com/office/drawing/2014/main" id="{52E76584-269E-74FF-1CE8-1A46CF706B72}"/>
+          <p:cNvPr id="4" name="Picture 3">
+            <a:extLst>
+              <a:ext uri="{FF2B5EF4-FFF2-40B4-BE49-F238E27FC236}">
+                <a16:creationId xmlns:a16="http://schemas.microsoft.com/office/drawing/2014/main" id="{56F2B7C5-5C82-1EFC-24A8-71F0D651C867}"/>
               </a:ext>
             </a:extLst>
           </p:cNvPr>
@@ -5394,8 +5395,8 @@
         </p:blipFill>
         <p:spPr>
           <a:xfrm>
-            <a:off x="243906" y="1285875"/>
-            <a:ext cx="7948816" cy="4838700"/>
+            <a:off x="243907" y="1285875"/>
+            <a:ext cx="7948816" cy="4856904"/>
           </a:xfrm>
           <a:prstGeom prst="rect">
             <a:avLst/>
@@ -5411,6 +5412,179 @@
     <p:extLst>
       <p:ext uri="{BB962C8B-B14F-4D97-AF65-F5344CB8AC3E}">
         <p14:creationId xmlns:p14="http://schemas.microsoft.com/office/powerpoint/2010/main" val="538655942"/>
+      </p:ext>
+    </p:extLst>
+  </p:cSld>
+  <p:clrMapOvr>
+    <a:masterClrMapping/>
+  </p:clrMapOvr>
+</p:sld>
+</file>
+
+<file path=ppt/slides/slide14.xml><?xml version="1.0" encoding="utf-8"?>
+<p:sld xmlns:a="http://schemas.openxmlformats.org/drawingml/2006/main" xmlns:r="http://schemas.openxmlformats.org/officeDocument/2006/relationships" xmlns:p="http://schemas.openxmlformats.org/presentationml/2006/main">
+  <p:cSld>
+    <p:spTree>
+      <p:nvGrpSpPr>
+        <p:cNvPr id="1" name="">
+          <a:extLst>
+            <a:ext uri="{FF2B5EF4-FFF2-40B4-BE49-F238E27FC236}">
+              <a16:creationId xmlns:a16="http://schemas.microsoft.com/office/drawing/2014/main" id="{953554C3-04F3-F7CF-E541-8935FC269E25}"/>
+            </a:ext>
+          </a:extLst>
+        </p:cNvPr>
+        <p:cNvGrpSpPr/>
+        <p:nvPr/>
+      </p:nvGrpSpPr>
+      <p:grpSpPr>
+        <a:xfrm>
+          <a:off x="0" y="0"/>
+          <a:ext cx="0" cy="0"/>
+          <a:chOff x="0" y="0"/>
+          <a:chExt cx="0" cy="0"/>
+        </a:xfrm>
+      </p:grpSpPr>
+      <p:pic>
+        <p:nvPicPr>
+          <p:cNvPr id="8" name="Picture 7">
+            <a:extLst>
+              <a:ext uri="{FF2B5EF4-FFF2-40B4-BE49-F238E27FC236}">
+                <a16:creationId xmlns:a16="http://schemas.microsoft.com/office/drawing/2014/main" id="{C6215A35-5338-1E13-0EF3-27DABDDE13D3}"/>
+              </a:ext>
+            </a:extLst>
+          </p:cNvPr>
+          <p:cNvPicPr>
+            <a:picLocks noChangeAspect="1"/>
+          </p:cNvPicPr>
+          <p:nvPr/>
+        </p:nvPicPr>
+        <p:blipFill>
+          <a:blip r:embed="rId2"/>
+          <a:stretch>
+            <a:fillRect/>
+          </a:stretch>
+        </p:blipFill>
+        <p:spPr>
+          <a:xfrm>
+            <a:off x="243907" y="1285875"/>
+            <a:ext cx="7948816" cy="4850556"/>
+          </a:xfrm>
+          <a:prstGeom prst="rect">
+            <a:avLst/>
+          </a:prstGeom>
+          <a:ln>
+            <a:solidFill>
+              <a:schemeClr val="tx1"/>
+            </a:solidFill>
+          </a:ln>
+        </p:spPr>
+      </p:pic>
+      <p:sp>
+        <p:nvSpPr>
+          <p:cNvPr id="3" name="TextBox 2">
+            <a:extLst>
+              <a:ext uri="{FF2B5EF4-FFF2-40B4-BE49-F238E27FC236}">
+                <a16:creationId xmlns:a16="http://schemas.microsoft.com/office/drawing/2014/main" id="{C4F6CF00-620E-D538-3340-A82F881C25A3}"/>
+              </a:ext>
+            </a:extLst>
+          </p:cNvPr>
+          <p:cNvSpPr txBox="1"/>
+          <p:nvPr/>
+        </p:nvSpPr>
+        <p:spPr>
+          <a:xfrm>
+            <a:off x="124051" y="102889"/>
+            <a:ext cx="11607874" cy="369332"/>
+          </a:xfrm>
+          <a:prstGeom prst="rect">
+            <a:avLst/>
+          </a:prstGeom>
+          <a:noFill/>
+        </p:spPr>
+        <p:txBody>
+          <a:bodyPr wrap="square">
+            <a:spAutoFit/>
+          </a:bodyPr>
+          <a:lstStyle/>
+          <a:p>
+            <a:pPr marL="342900" indent="-342900">
+              <a:buFont typeface="+mj-lt"/>
+              <a:buAutoNum type="arabicPeriod" startAt="11"/>
+            </a:pPr>
+            <a:r>
+              <a:rPr lang="en-GB" dirty="0"/>
+              <a:t>Add driver for pump. Add </a:t>
+            </a:r>
+            <a:r>
+              <a:rPr lang="en-GB" dirty="0" err="1"/>
+              <a:t>VortexBreaker</a:t>
+            </a:r>
+            <a:r>
+              <a:rPr lang="en-GB" dirty="0"/>
+              <a:t> internal.</a:t>
+            </a:r>
+          </a:p>
+        </p:txBody>
+      </p:sp>
+      <p:sp>
+        <p:nvSpPr>
+          <p:cNvPr id="6" name="TextBox 5">
+            <a:extLst>
+              <a:ext uri="{FF2B5EF4-FFF2-40B4-BE49-F238E27FC236}">
+                <a16:creationId xmlns:a16="http://schemas.microsoft.com/office/drawing/2014/main" id="{B86BB71F-A940-4152-3C48-BC9CCCE2DC8E}"/>
+              </a:ext>
+            </a:extLst>
+          </p:cNvPr>
+          <p:cNvSpPr txBox="1"/>
+          <p:nvPr/>
+        </p:nvSpPr>
+        <p:spPr>
+          <a:xfrm>
+            <a:off x="8531794" y="1166068"/>
+            <a:ext cx="3416300" cy="646331"/>
+          </a:xfrm>
+          <a:prstGeom prst="rect">
+            <a:avLst/>
+          </a:prstGeom>
+          <a:noFill/>
+        </p:spPr>
+        <p:txBody>
+          <a:bodyPr wrap="square" rtlCol="0">
+            <a:spAutoFit/>
+          </a:bodyPr>
+          <a:lstStyle/>
+          <a:p>
+            <a:pPr marL="342900" indent="-342900">
+              <a:buAutoNum type="arabicPeriod"/>
+            </a:pPr>
+            <a:r>
+              <a:rPr lang="en-GB" dirty="0"/>
+              <a:t>Add pump driver.</a:t>
+            </a:r>
+          </a:p>
+          <a:p>
+            <a:pPr marL="342900" indent="-342900">
+              <a:buAutoNum type="arabicPeriod"/>
+            </a:pPr>
+            <a:r>
+              <a:rPr lang="en-GB" dirty="0"/>
+              <a:t>Add </a:t>
+            </a:r>
+            <a:r>
+              <a:rPr lang="en-GB" dirty="0" err="1"/>
+              <a:t>VortexBreaker</a:t>
+            </a:r>
+            <a:r>
+              <a:rPr lang="en-GB" dirty="0"/>
+              <a:t> internal</a:t>
+            </a:r>
+          </a:p>
+        </p:txBody>
+      </p:sp>
+    </p:spTree>
+    <p:extLst>
+      <p:ext uri="{BB962C8B-B14F-4D97-AF65-F5344CB8AC3E}">
+        <p14:creationId xmlns:p14="http://schemas.microsoft.com/office/powerpoint/2010/main" val="720805857"/>
       </p:ext>
     </p:extLst>
   </p:cSld>
@@ -5458,7 +5632,7 @@
         <p:spPr>
           <a:xfrm>
             <a:off x="419100" y="740122"/>
-            <a:ext cx="11216639" cy="5632311"/>
+            <a:ext cx="11216639" cy="1200329"/>
           </a:xfrm>
           <a:prstGeom prst="rect">
             <a:avLst/>
@@ -5473,231 +5647,20 @@
           <a:p>
             <a:pPr marL="342900" indent="-342900">
               <a:buFont typeface="+mj-lt"/>
-              <a:buAutoNum type="arabicPeriod"/>
+              <a:buAutoNum type="arabicPeriod" startAt="11"/>
             </a:pPr>
             <a:r>
               <a:rPr lang="en-GB" dirty="0"/>
-              <a:t>Base </a:t>
+              <a:t>Add driver for pump. Add </a:t>
             </a:r>
             <a:r>
               <a:rPr lang="en-GB" dirty="0" err="1"/>
-              <a:t>BluePrint</a:t>
+              <a:t>VortexBreaker</a:t>
             </a:r>
             <a:r>
               <a:rPr lang="en-GB" dirty="0"/>
-              <a:t> File</a:t>
-            </a:r>
-          </a:p>
-          <a:p>
-            <a:pPr marL="342900" indent="-342900">
-              <a:buFont typeface="+mj-lt"/>
-              <a:buAutoNum type="arabicPeriod" startAt="2"/>
-            </a:pPr>
-            <a:r>
-              <a:rPr lang="en-GB" dirty="0"/>
-              <a:t>Split DEXPI </a:t>
-            </a:r>
-            <a:r>
-              <a:rPr lang="en-GB" dirty="0" err="1"/>
-              <a:t>PipingNetworkSegment</a:t>
-            </a:r>
-            <a:r>
-              <a:rPr lang="en-GB" dirty="0"/>
-              <a:t> with a piping tee. E.g. split D-20L00004A DEXPI </a:t>
-            </a:r>
-            <a:r>
-              <a:rPr lang="en-GB" dirty="0" err="1"/>
-              <a:t>PipingNetworkSegment</a:t>
-            </a:r>
-            <a:r>
-              <a:rPr lang="en-GB" dirty="0"/>
-              <a:t> by placing a piping tee between the ESV0006 actuated valve and the FE0001 element and include an unnamed valve.</a:t>
-            </a:r>
-          </a:p>
-          <a:p>
-            <a:pPr marL="342900" indent="-342900">
-              <a:buFont typeface="+mj-lt"/>
-              <a:buAutoNum type="arabicPeriod" startAt="3"/>
-            </a:pPr>
-            <a:r>
-              <a:rPr lang="en-GB" dirty="0"/>
-              <a:t>Rename TI0003/TIC0003/TV0003 to TI0013/TIC0013/TV0013 and update associated loop.</a:t>
-            </a:r>
-          </a:p>
-          <a:p>
-            <a:pPr marL="800100" lvl="1" indent="-342900">
-              <a:buFont typeface="Arial" panose="020B0604020202020204" pitchFamily="34" charset="0"/>
-              <a:buChar char="•"/>
-            </a:pPr>
-            <a:r>
-              <a:rPr lang="en-GB" dirty="0"/>
-              <a:t>Retain the original </a:t>
-            </a:r>
-            <a:r>
-              <a:rPr lang="en-GB" dirty="0" err="1"/>
-              <a:t>PersistentID</a:t>
-            </a:r>
-            <a:r>
-              <a:rPr lang="en-GB" dirty="0"/>
-              <a:t> and change the name.</a:t>
-            </a:r>
-          </a:p>
-          <a:p>
-            <a:pPr marL="342900" indent="-342900">
-              <a:buFont typeface="+mj-lt"/>
-              <a:buAutoNum type="arabicPeriod" startAt="4"/>
-            </a:pPr>
-            <a:r>
-              <a:rPr lang="en-GB" dirty="0"/>
-              <a:t>Remove the note and unused nozzle from 20VA001 and update elevation to EL. 400000</a:t>
-            </a:r>
-          </a:p>
-          <a:p>
-            <a:pPr marL="342900" indent="-342900">
-              <a:buFont typeface="+mj-lt"/>
-              <a:buAutoNum type="arabicPeriod" startAt="5"/>
-            </a:pPr>
-            <a:r>
-              <a:rPr lang="en-GB" dirty="0"/>
-              <a:t>Change the type of actuator for HV0001 to a PA006A actuator type</a:t>
-            </a:r>
-          </a:p>
-          <a:p>
-            <a:pPr marL="800100" lvl="1" indent="-342900">
-              <a:buFont typeface="Arial" panose="020B0604020202020204" pitchFamily="34" charset="0"/>
-              <a:buChar char="•"/>
-            </a:pPr>
-            <a:r>
-              <a:rPr lang="en-GB" dirty="0"/>
-              <a:t>Retain </a:t>
-            </a:r>
-            <a:r>
-              <a:rPr lang="en-GB" dirty="0" err="1"/>
-              <a:t>PersistentID</a:t>
-            </a:r>
-            <a:r>
-              <a:rPr lang="en-GB" dirty="0"/>
-              <a:t> of original actuator</a:t>
-            </a:r>
-          </a:p>
-          <a:p>
-            <a:pPr marL="342900" indent="-342900">
-              <a:buFont typeface="+mj-lt"/>
-              <a:buAutoNum type="arabicPeriod" startAt="6"/>
-            </a:pPr>
-            <a:r>
-              <a:rPr lang="en-GB" dirty="0"/>
-              <a:t>Add heat tracing to </a:t>
-            </a:r>
-            <a:r>
-              <a:rPr lang="en-GB" dirty="0" err="1"/>
-              <a:t>PipingNetworkSegment</a:t>
-            </a:r>
-            <a:r>
-              <a:rPr lang="en-GB" dirty="0"/>
-              <a:t> D-20L A- PL-AS200-</a:t>
-            </a:r>
-          </a:p>
-          <a:p>
-            <a:pPr marL="800100" lvl="1" indent="-342900">
-              <a:buFont typeface="Arial" panose="020B0604020202020204" pitchFamily="34" charset="0"/>
-              <a:buChar char="•"/>
-            </a:pPr>
-            <a:r>
-              <a:rPr lang="en-GB" dirty="0"/>
-              <a:t>Modify the heat trace attribute on the segment</a:t>
-            </a:r>
-          </a:p>
-          <a:p>
-            <a:pPr marL="342900" indent="-342900">
-              <a:buFont typeface="+mj-lt"/>
-              <a:buAutoNum type="arabicPeriod" startAt="7"/>
-            </a:pPr>
-            <a:r>
-              <a:rPr lang="en-GB" dirty="0"/>
-              <a:t>Modify TI0007 combination -&gt; TW/TT combination with Special Item on </a:t>
-            </a:r>
-            <a:r>
-              <a:rPr lang="en-GB" dirty="0" err="1"/>
-              <a:t>PipingNetworkSegment</a:t>
-            </a:r>
-            <a:endParaRPr lang="en-GB" dirty="0"/>
-          </a:p>
-          <a:p>
-            <a:pPr marL="800100" lvl="1" indent="-342900">
-              <a:buFont typeface="Arial" panose="020B0604020202020204" pitchFamily="34" charset="0"/>
-              <a:buChar char="•"/>
-            </a:pPr>
-            <a:r>
-              <a:rPr lang="en-GB" dirty="0"/>
-              <a:t>** Use ND0037 ‘hidden’ in-line piping component to give location of special item.</a:t>
-            </a:r>
-          </a:p>
-          <a:p>
-            <a:pPr marL="342900" indent="-342900">
-              <a:buFont typeface="+mj-lt"/>
-              <a:buAutoNum type="arabicPeriod" startAt="8"/>
-            </a:pPr>
-            <a:r>
-              <a:rPr lang="en-GB" dirty="0"/>
-              <a:t>Additional property break at one of the break</a:t>
-            </a:r>
-          </a:p>
-          <a:p>
-            <a:pPr marL="742950" lvl="1" indent="-285750">
-              <a:buFont typeface="Arial" panose="020B0604020202020204" pitchFamily="34" charset="0"/>
-              <a:buChar char="•"/>
-            </a:pPr>
-            <a:r>
-              <a:rPr lang="en-GB" dirty="0"/>
-              <a:t>Add </a:t>
-            </a:r>
-            <a:r>
-              <a:rPr lang="en-GB" dirty="0" err="1"/>
-              <a:t>AreaBreak</a:t>
-            </a:r>
-            <a:r>
-              <a:rPr lang="en-GB" dirty="0"/>
-              <a:t> AP110 / AP310 need to associate these to the </a:t>
-            </a:r>
-            <a:r>
-              <a:rPr lang="en-GB" dirty="0" err="1"/>
-              <a:t>PipingNetworkSystems</a:t>
-            </a:r>
-            <a:endParaRPr lang="en-GB" dirty="0"/>
-          </a:p>
-          <a:p>
-            <a:pPr marL="342900" indent="-342900">
-              <a:buFont typeface="+mj-lt"/>
-              <a:buAutoNum type="arabicPeriod" startAt="9"/>
-            </a:pPr>
-            <a:r>
-              <a:rPr lang="en-GB" dirty="0"/>
-              <a:t>Scale D-20HA001 symbol y-axis scaling 1.25 </a:t>
-            </a:r>
-          </a:p>
-          <a:p>
-            <a:pPr marL="342900" indent="-342900">
-              <a:buFont typeface="+mj-lt"/>
-              <a:buAutoNum type="arabicPeriod" startAt="9"/>
-            </a:pPr>
-            <a:r>
-              <a:rPr lang="en-GB" dirty="0"/>
-              <a:t>Modify pipe lines: </a:t>
-            </a:r>
-            <a:r>
-              <a:rPr lang="en-GB" sz="1800" b="0" i="0" u="none" strike="noStrike" baseline="0" dirty="0"/>
-              <a:t>D-20L00005A-1200PL-AS200-   &amp; D-20L00015A-0800PL-AD750- to test </a:t>
-            </a:r>
-            <a:r>
-              <a:rPr lang="en-GB" sz="1800" b="0" i="0" u="none" strike="noStrike" baseline="0" dirty="0" err="1"/>
-              <a:t>PipingNetworkSegment</a:t>
-            </a:r>
-            <a:r>
-              <a:rPr lang="en-GB" sz="1800" b="0" i="0" u="none" strike="noStrike" baseline="0" dirty="0"/>
-              <a:t> export variants</a:t>
-            </a:r>
-            <a:endParaRPr lang="en-GB" dirty="0"/>
+              <a:t> internal.</a:t>
+            </a:r>
           </a:p>
           <a:p>
             <a:pPr marL="342900" indent="-342900">

--- a/Blueprint/UseCases_PersistenID.pptx
+++ b/Blueprint/UseCases_PersistenID.pptx
@@ -993,7 +993,7 @@
           <a:p>
             <a:fld id="{29BFE5FB-EE99-4E69-B2F7-C156D52DE4BD}" type="datetimeFigureOut">
               <a:rPr lang="en-GB" smtClean="0"/>
-              <a:t>09/10/2025</a:t>
+              <a:t>27/10/2025</a:t>
             </a:fld>
             <a:endParaRPr lang="en-GB"/>
           </a:p>
@@ -1193,7 +1193,7 @@
           <a:p>
             <a:fld id="{29BFE5FB-EE99-4E69-B2F7-C156D52DE4BD}" type="datetimeFigureOut">
               <a:rPr lang="en-GB" smtClean="0"/>
-              <a:t>09/10/2025</a:t>
+              <a:t>27/10/2025</a:t>
             </a:fld>
             <a:endParaRPr lang="en-GB"/>
           </a:p>
@@ -1403,7 +1403,7 @@
           <a:p>
             <a:fld id="{29BFE5FB-EE99-4E69-B2F7-C156D52DE4BD}" type="datetimeFigureOut">
               <a:rPr lang="en-GB" smtClean="0"/>
-              <a:t>09/10/2025</a:t>
+              <a:t>27/10/2025</a:t>
             </a:fld>
             <a:endParaRPr lang="en-GB"/>
           </a:p>
@@ -1603,7 +1603,7 @@
           <a:p>
             <a:fld id="{29BFE5FB-EE99-4E69-B2F7-C156D52DE4BD}" type="datetimeFigureOut">
               <a:rPr lang="en-GB" smtClean="0"/>
-              <a:t>09/10/2025</a:t>
+              <a:t>27/10/2025</a:t>
             </a:fld>
             <a:endParaRPr lang="en-GB"/>
           </a:p>
@@ -1879,7 +1879,7 @@
           <a:p>
             <a:fld id="{29BFE5FB-EE99-4E69-B2F7-C156D52DE4BD}" type="datetimeFigureOut">
               <a:rPr lang="en-GB" smtClean="0"/>
-              <a:t>09/10/2025</a:t>
+              <a:t>27/10/2025</a:t>
             </a:fld>
             <a:endParaRPr lang="en-GB"/>
           </a:p>
@@ -2147,7 +2147,7 @@
           <a:p>
             <a:fld id="{29BFE5FB-EE99-4E69-B2F7-C156D52DE4BD}" type="datetimeFigureOut">
               <a:rPr lang="en-GB" smtClean="0"/>
-              <a:t>09/10/2025</a:t>
+              <a:t>27/10/2025</a:t>
             </a:fld>
             <a:endParaRPr lang="en-GB"/>
           </a:p>
@@ -2562,7 +2562,7 @@
           <a:p>
             <a:fld id="{29BFE5FB-EE99-4E69-B2F7-C156D52DE4BD}" type="datetimeFigureOut">
               <a:rPr lang="en-GB" smtClean="0"/>
-              <a:t>09/10/2025</a:t>
+              <a:t>27/10/2025</a:t>
             </a:fld>
             <a:endParaRPr lang="en-GB"/>
           </a:p>
@@ -2704,7 +2704,7 @@
           <a:p>
             <a:fld id="{29BFE5FB-EE99-4E69-B2F7-C156D52DE4BD}" type="datetimeFigureOut">
               <a:rPr lang="en-GB" smtClean="0"/>
-              <a:t>09/10/2025</a:t>
+              <a:t>27/10/2025</a:t>
             </a:fld>
             <a:endParaRPr lang="en-GB"/>
           </a:p>
@@ -2817,7 +2817,7 @@
           <a:p>
             <a:fld id="{29BFE5FB-EE99-4E69-B2F7-C156D52DE4BD}" type="datetimeFigureOut">
               <a:rPr lang="en-GB" smtClean="0"/>
-              <a:t>09/10/2025</a:t>
+              <a:t>27/10/2025</a:t>
             </a:fld>
             <a:endParaRPr lang="en-GB"/>
           </a:p>
@@ -3130,7 +3130,7 @@
           <a:p>
             <a:fld id="{29BFE5FB-EE99-4E69-B2F7-C156D52DE4BD}" type="datetimeFigureOut">
               <a:rPr lang="en-GB" smtClean="0"/>
-              <a:t>09/10/2025</a:t>
+              <a:t>27/10/2025</a:t>
             </a:fld>
             <a:endParaRPr lang="en-GB"/>
           </a:p>
@@ -3419,7 +3419,7 @@
           <a:p>
             <a:fld id="{29BFE5FB-EE99-4E69-B2F7-C156D52DE4BD}" type="datetimeFigureOut">
               <a:rPr lang="en-GB" smtClean="0"/>
-              <a:t>09/10/2025</a:t>
+              <a:t>27/10/2025</a:t>
             </a:fld>
             <a:endParaRPr lang="en-GB"/>
           </a:p>
@@ -3662,7 +3662,7 @@
           <a:p>
             <a:fld id="{29BFE5FB-EE99-4E69-B2F7-C156D52DE4BD}" type="datetimeFigureOut">
               <a:rPr lang="en-GB" smtClean="0"/>
-              <a:t>09/10/2025</a:t>
+              <a:t>27/10/2025</a:t>
             </a:fld>
             <a:endParaRPr lang="en-GB"/>
           </a:p>
@@ -4586,10 +4586,10 @@
       </p:graphicFrame>
       <p:pic>
         <p:nvPicPr>
-          <p:cNvPr id="10" name="Picture 9">
-            <a:extLst>
-              <a:ext uri="{FF2B5EF4-FFF2-40B4-BE49-F238E27FC236}">
-                <a16:creationId xmlns:a16="http://schemas.microsoft.com/office/drawing/2014/main" id="{2FE4FC03-15C9-14A5-E453-CCDA76F24BDF}"/>
+          <p:cNvPr id="4" name="Picture 3">
+            <a:extLst>
+              <a:ext uri="{FF2B5EF4-FFF2-40B4-BE49-F238E27FC236}">
+                <a16:creationId xmlns:a16="http://schemas.microsoft.com/office/drawing/2014/main" id="{FD7D1225-BCA1-2AC5-2A06-C98E6B8D9B60}"/>
               </a:ext>
             </a:extLst>
           </p:cNvPr>
@@ -4606,8 +4606,8 @@
         </p:blipFill>
         <p:spPr>
           <a:xfrm>
-            <a:off x="348263" y="1322795"/>
-            <a:ext cx="7726747" cy="4691042"/>
+            <a:off x="480290" y="1477819"/>
+            <a:ext cx="7379856" cy="4515501"/>
           </a:xfrm>
           <a:prstGeom prst="rect">
             <a:avLst/>
@@ -4644,12 +4644,263 @@
           <a:chExt cx="0" cy="0"/>
         </a:xfrm>
       </p:grpSpPr>
+      <p:graphicFrame>
+        <p:nvGraphicFramePr>
+          <p:cNvPr id="7" name="Table 7">
+            <a:extLst>
+              <a:ext uri="{FF2B5EF4-FFF2-40B4-BE49-F238E27FC236}">
+                <a16:creationId xmlns:a16="http://schemas.microsoft.com/office/drawing/2014/main" id="{122A675D-8A6B-1BF2-70BB-B5522B02FF65}"/>
+              </a:ext>
+            </a:extLst>
+          </p:cNvPr>
+          <p:cNvGraphicFramePr>
+            <a:graphicFrameLocks noGrp="1"/>
+          </p:cNvGraphicFramePr>
+          <p:nvPr/>
+        </p:nvGraphicFramePr>
+        <p:xfrm>
+          <a:off x="307975" y="1191319"/>
+          <a:ext cx="7807325" cy="5257106"/>
+        </p:xfrm>
+        <a:graphic>
+          <a:graphicData uri="http://schemas.openxmlformats.org/drawingml/2006/table">
+            <a:tbl>
+              <a:tblPr firstRow="1" bandRow="1">
+                <a:tableStyleId>{5C22544A-7EE6-4342-B048-85BDC9FD1C3A}</a:tableStyleId>
+              </a:tblPr>
+              <a:tblGrid>
+                <a:gridCol w="7807325">
+                  <a:extLst>
+                    <a:ext uri="{9D8B030D-6E8A-4147-A177-3AD203B41FA5}">
+                      <a16:colId xmlns:a16="http://schemas.microsoft.com/office/drawing/2014/main" val="3422904110"/>
+                    </a:ext>
+                  </a:extLst>
+                </a:gridCol>
+              </a:tblGrid>
+              <a:tr h="5257106">
+                <a:tc>
+                  <a:txBody>
+                    <a:bodyPr/>
+                    <a:lstStyle/>
+                    <a:p>
+                      <a:endParaRPr lang="en-GB" dirty="0"/>
+                    </a:p>
+                  </a:txBody>
+                  <a:tcPr>
+                    <a:lnL w="12700" cap="flat" cmpd="sng" algn="ctr">
+                      <a:solidFill>
+                        <a:schemeClr val="tx1"/>
+                      </a:solidFill>
+                      <a:prstDash val="solid"/>
+                      <a:round/>
+                      <a:headEnd type="none" w="med" len="med"/>
+                      <a:tailEnd type="none" w="med" len="med"/>
+                    </a:lnL>
+                    <a:lnR w="12700" cap="flat" cmpd="sng" algn="ctr">
+                      <a:solidFill>
+                        <a:schemeClr val="tx1"/>
+                      </a:solidFill>
+                      <a:prstDash val="solid"/>
+                      <a:round/>
+                      <a:headEnd type="none" w="med" len="med"/>
+                      <a:tailEnd type="none" w="med" len="med"/>
+                    </a:lnR>
+                    <a:lnT w="12700" cap="flat" cmpd="sng" algn="ctr">
+                      <a:solidFill>
+                        <a:schemeClr val="tx1"/>
+                      </a:solidFill>
+                      <a:prstDash val="solid"/>
+                      <a:round/>
+                      <a:headEnd type="none" w="med" len="med"/>
+                      <a:tailEnd type="none" w="med" len="med"/>
+                    </a:lnT>
+                    <a:lnB w="12700" cap="flat" cmpd="sng" algn="ctr">
+                      <a:solidFill>
+                        <a:schemeClr val="tx1"/>
+                      </a:solidFill>
+                      <a:prstDash val="solid"/>
+                      <a:round/>
+                      <a:headEnd type="none" w="med" len="med"/>
+                      <a:tailEnd type="none" w="med" len="med"/>
+                    </a:lnB>
+                    <a:noFill/>
+                  </a:tcPr>
+                </a:tc>
+                <a:extLst>
+                  <a:ext uri="{0D108BD9-81ED-4DB2-BD59-A6C34878D82A}">
+                    <a16:rowId xmlns:a16="http://schemas.microsoft.com/office/drawing/2014/main" val="1045134656"/>
+                  </a:ext>
+                </a:extLst>
+              </a:tr>
+            </a:tbl>
+          </a:graphicData>
+        </a:graphic>
+      </p:graphicFrame>
+      <p:sp>
+        <p:nvSpPr>
+          <p:cNvPr id="3" name="TextBox 2">
+            <a:extLst>
+              <a:ext uri="{FF2B5EF4-FFF2-40B4-BE49-F238E27FC236}">
+                <a16:creationId xmlns:a16="http://schemas.microsoft.com/office/drawing/2014/main" id="{7F5AFCD7-CF64-A7F6-B02F-987454D53E76}"/>
+              </a:ext>
+            </a:extLst>
+          </p:cNvPr>
+          <p:cNvSpPr txBox="1"/>
+          <p:nvPr/>
+        </p:nvSpPr>
+        <p:spPr>
+          <a:xfrm>
+            <a:off x="124051" y="102889"/>
+            <a:ext cx="11607874" cy="646331"/>
+          </a:xfrm>
+          <a:prstGeom prst="rect">
+            <a:avLst/>
+          </a:prstGeom>
+          <a:noFill/>
+        </p:spPr>
+        <p:txBody>
+          <a:bodyPr wrap="square">
+            <a:spAutoFit/>
+          </a:bodyPr>
+          <a:lstStyle/>
+          <a:p>
+            <a:pPr marL="342900" indent="-342900">
+              <a:buFont typeface="+mj-lt"/>
+              <a:buAutoNum type="arabicPeriod" startAt="8"/>
+            </a:pPr>
+            <a:r>
+              <a:rPr lang="en-GB" dirty="0"/>
+              <a:t>Additional property break to the existing breaks</a:t>
+            </a:r>
+          </a:p>
+          <a:p>
+            <a:pPr marL="742950" lvl="1" indent="-285750">
+              <a:buFont typeface="Arial" panose="020B0604020202020204" pitchFamily="34" charset="0"/>
+              <a:buChar char="•"/>
+            </a:pPr>
+            <a:r>
+              <a:rPr lang="en-GB" dirty="0"/>
+              <a:t>Add </a:t>
+            </a:r>
+            <a:r>
+              <a:rPr lang="en-GB" dirty="0" err="1"/>
+              <a:t>AreaBreak</a:t>
+            </a:r>
+            <a:r>
+              <a:rPr lang="en-GB" dirty="0"/>
+              <a:t> AP110 / AP310 need to associate </a:t>
+            </a:r>
+            <a:r>
+              <a:rPr lang="en-GB" dirty="0" err="1"/>
+              <a:t>PlantArea</a:t>
+            </a:r>
+            <a:r>
+              <a:rPr lang="en-GB" dirty="0"/>
+              <a:t> these to the </a:t>
+            </a:r>
+            <a:r>
+              <a:rPr lang="en-GB" dirty="0" err="1"/>
+              <a:t>PipingNetworkSystems</a:t>
+            </a:r>
+            <a:endParaRPr lang="en-GB" dirty="0"/>
+          </a:p>
+        </p:txBody>
+      </p:sp>
+      <p:sp>
+        <p:nvSpPr>
+          <p:cNvPr id="6" name="TextBox 5">
+            <a:extLst>
+              <a:ext uri="{FF2B5EF4-FFF2-40B4-BE49-F238E27FC236}">
+                <a16:creationId xmlns:a16="http://schemas.microsoft.com/office/drawing/2014/main" id="{A6882847-5B32-5A38-EAF6-DBA6981FF24B}"/>
+              </a:ext>
+            </a:extLst>
+          </p:cNvPr>
+          <p:cNvSpPr txBox="1"/>
+          <p:nvPr/>
+        </p:nvSpPr>
+        <p:spPr>
+          <a:xfrm>
+            <a:off x="8448675" y="1204933"/>
+            <a:ext cx="3416300" cy="4801314"/>
+          </a:xfrm>
+          <a:prstGeom prst="rect">
+            <a:avLst/>
+          </a:prstGeom>
+          <a:noFill/>
+        </p:spPr>
+        <p:txBody>
+          <a:bodyPr wrap="square" rtlCol="0">
+            <a:spAutoFit/>
+          </a:bodyPr>
+          <a:lstStyle/>
+          <a:p>
+            <a:r>
+              <a:rPr lang="en-GB" dirty="0"/>
+              <a:t>** Test transfer of </a:t>
+            </a:r>
+            <a:r>
+              <a:rPr lang="en-GB" dirty="0" err="1"/>
+              <a:t>PropertyBreak</a:t>
+            </a:r>
+            <a:r>
+              <a:rPr lang="en-GB" dirty="0"/>
+              <a:t>:</a:t>
+            </a:r>
+          </a:p>
+          <a:p>
+            <a:pPr marL="342900" indent="-342900">
+              <a:buAutoNum type="arabicPeriod"/>
+            </a:pPr>
+            <a:r>
+              <a:rPr lang="en-GB" dirty="0"/>
+              <a:t>Top break: use 2 </a:t>
+            </a:r>
+            <a:r>
+              <a:rPr lang="en-GB" dirty="0" err="1"/>
+              <a:t>PropertyBreak</a:t>
+            </a:r>
+            <a:r>
+              <a:rPr lang="en-GB" dirty="0"/>
+              <a:t> class elements 1 for each break type. 2 separate symbols placed up on each other.</a:t>
+            </a:r>
+          </a:p>
+          <a:p>
+            <a:pPr marL="342900" indent="-342900">
+              <a:buAutoNum type="arabicPeriod"/>
+            </a:pPr>
+            <a:r>
+              <a:rPr lang="en-GB" dirty="0"/>
+              <a:t>Bottom break: use 1 </a:t>
+            </a:r>
+            <a:r>
+              <a:rPr lang="en-GB" dirty="0" err="1"/>
+              <a:t>PropertyBreak</a:t>
+            </a:r>
+            <a:r>
+              <a:rPr lang="en-GB" dirty="0"/>
+              <a:t> class element for both break types. 1 symbol used for the double break.</a:t>
+            </a:r>
+          </a:p>
+          <a:p>
+            <a:pPr marL="342900" indent="-342900">
+              <a:buAutoNum type="arabicPeriod"/>
+            </a:pPr>
+            <a:endParaRPr lang="en-GB" dirty="0"/>
+          </a:p>
+          <a:p>
+            <a:r>
+              <a:rPr lang="en-GB" dirty="0"/>
+              <a:t>In each case the BreakValue1 attribute will be used to transfer the text shown on the left-hand side of the break, BreakValue2 will transfer the text on the right-hand side.</a:t>
+            </a:r>
+          </a:p>
+        </p:txBody>
+      </p:sp>
       <p:pic>
         <p:nvPicPr>
-          <p:cNvPr id="4" name="Picture 3">
-            <a:extLst>
-              <a:ext uri="{FF2B5EF4-FFF2-40B4-BE49-F238E27FC236}">
-                <a16:creationId xmlns:a16="http://schemas.microsoft.com/office/drawing/2014/main" id="{7150F93A-1CB4-5DE3-7A10-32F5499A7E14}"/>
+          <p:cNvPr id="9" name="Picture 8">
+            <a:extLst>
+              <a:ext uri="{FF2B5EF4-FFF2-40B4-BE49-F238E27FC236}">
+                <a16:creationId xmlns:a16="http://schemas.microsoft.com/office/drawing/2014/main" id="{397B3461-35E2-F637-C89E-3414CE436E22}"/>
               </a:ext>
             </a:extLst>
           </p:cNvPr>
@@ -4666,14 +4917,235 @@
         </p:blipFill>
         <p:spPr>
           <a:xfrm>
-            <a:off x="327025" y="1204933"/>
-            <a:ext cx="7763111" cy="4719618"/>
+            <a:off x="512186" y="1594397"/>
+            <a:ext cx="7393752" cy="4510840"/>
           </a:xfrm>
           <a:prstGeom prst="rect">
             <a:avLst/>
           </a:prstGeom>
         </p:spPr>
       </p:pic>
+    </p:spTree>
+    <p:extLst>
+      <p:ext uri="{BB962C8B-B14F-4D97-AF65-F5344CB8AC3E}">
+        <p14:creationId xmlns:p14="http://schemas.microsoft.com/office/powerpoint/2010/main" val="2911805113"/>
+      </p:ext>
+    </p:extLst>
+  </p:cSld>
+  <p:clrMapOvr>
+    <a:masterClrMapping/>
+  </p:clrMapOvr>
+</p:sld>
+</file>
+
+<file path=ppt/slides/slide12.xml><?xml version="1.0" encoding="utf-8"?>
+<p:sld xmlns:a="http://schemas.openxmlformats.org/drawingml/2006/main" xmlns:r="http://schemas.openxmlformats.org/officeDocument/2006/relationships" xmlns:p="http://schemas.openxmlformats.org/presentationml/2006/main">
+  <p:cSld>
+    <p:spTree>
+      <p:nvGrpSpPr>
+        <p:cNvPr id="1" name=""/>
+        <p:cNvGrpSpPr/>
+        <p:nvPr/>
+      </p:nvGrpSpPr>
+      <p:grpSpPr>
+        <a:xfrm>
+          <a:off x="0" y="0"/>
+          <a:ext cx="0" cy="0"/>
+          <a:chOff x="0" y="0"/>
+          <a:chExt cx="0" cy="0"/>
+        </a:xfrm>
+      </p:grpSpPr>
+      <p:graphicFrame>
+        <p:nvGraphicFramePr>
+          <p:cNvPr id="5" name="Table 7">
+            <a:extLst>
+              <a:ext uri="{FF2B5EF4-FFF2-40B4-BE49-F238E27FC236}">
+                <a16:creationId xmlns:a16="http://schemas.microsoft.com/office/drawing/2014/main" id="{4B9C56BB-0976-2E25-FB91-2AB2FECE2FD2}"/>
+              </a:ext>
+            </a:extLst>
+          </p:cNvPr>
+          <p:cNvGraphicFramePr>
+            <a:graphicFrameLocks noGrp="1"/>
+          </p:cNvGraphicFramePr>
+          <p:nvPr/>
+        </p:nvGraphicFramePr>
+        <p:xfrm>
+          <a:off x="307975" y="1191319"/>
+          <a:ext cx="7807325" cy="5257106"/>
+        </p:xfrm>
+        <a:graphic>
+          <a:graphicData uri="http://schemas.openxmlformats.org/drawingml/2006/table">
+            <a:tbl>
+              <a:tblPr firstRow="1" bandRow="1">
+                <a:tableStyleId>{5C22544A-7EE6-4342-B048-85BDC9FD1C3A}</a:tableStyleId>
+              </a:tblPr>
+              <a:tblGrid>
+                <a:gridCol w="7807325">
+                  <a:extLst>
+                    <a:ext uri="{9D8B030D-6E8A-4147-A177-3AD203B41FA5}">
+                      <a16:colId xmlns:a16="http://schemas.microsoft.com/office/drawing/2014/main" val="3422904110"/>
+                    </a:ext>
+                  </a:extLst>
+                </a:gridCol>
+              </a:tblGrid>
+              <a:tr h="5257106">
+                <a:tc>
+                  <a:txBody>
+                    <a:bodyPr/>
+                    <a:lstStyle/>
+                    <a:p>
+                      <a:endParaRPr lang="en-GB" dirty="0"/>
+                    </a:p>
+                  </a:txBody>
+                  <a:tcPr>
+                    <a:lnL w="12700" cap="flat" cmpd="sng" algn="ctr">
+                      <a:solidFill>
+                        <a:schemeClr val="tx1"/>
+                      </a:solidFill>
+                      <a:prstDash val="solid"/>
+                      <a:round/>
+                      <a:headEnd type="none" w="med" len="med"/>
+                      <a:tailEnd type="none" w="med" len="med"/>
+                    </a:lnL>
+                    <a:lnR w="12700" cap="flat" cmpd="sng" algn="ctr">
+                      <a:solidFill>
+                        <a:schemeClr val="tx1"/>
+                      </a:solidFill>
+                      <a:prstDash val="solid"/>
+                      <a:round/>
+                      <a:headEnd type="none" w="med" len="med"/>
+                      <a:tailEnd type="none" w="med" len="med"/>
+                    </a:lnR>
+                    <a:lnT w="12700" cap="flat" cmpd="sng" algn="ctr">
+                      <a:solidFill>
+                        <a:schemeClr val="tx1"/>
+                      </a:solidFill>
+                      <a:prstDash val="solid"/>
+                      <a:round/>
+                      <a:headEnd type="none" w="med" len="med"/>
+                      <a:tailEnd type="none" w="med" len="med"/>
+                    </a:lnT>
+                    <a:lnB w="12700" cap="flat" cmpd="sng" algn="ctr">
+                      <a:solidFill>
+                        <a:schemeClr val="tx1"/>
+                      </a:solidFill>
+                      <a:prstDash val="solid"/>
+                      <a:round/>
+                      <a:headEnd type="none" w="med" len="med"/>
+                      <a:tailEnd type="none" w="med" len="med"/>
+                    </a:lnB>
+                    <a:noFill/>
+                  </a:tcPr>
+                </a:tc>
+                <a:extLst>
+                  <a:ext uri="{0D108BD9-81ED-4DB2-BD59-A6C34878D82A}">
+                    <a16:rowId xmlns:a16="http://schemas.microsoft.com/office/drawing/2014/main" val="1045134656"/>
+                  </a:ext>
+                </a:extLst>
+              </a:tr>
+            </a:tbl>
+          </a:graphicData>
+        </a:graphic>
+      </p:graphicFrame>
+      <p:sp>
+        <p:nvSpPr>
+          <p:cNvPr id="3" name="TextBox 2">
+            <a:extLst>
+              <a:ext uri="{FF2B5EF4-FFF2-40B4-BE49-F238E27FC236}">
+                <a16:creationId xmlns:a16="http://schemas.microsoft.com/office/drawing/2014/main" id="{7F5AFCD7-CF64-A7F6-B02F-987454D53E76}"/>
+              </a:ext>
+            </a:extLst>
+          </p:cNvPr>
+          <p:cNvSpPr txBox="1"/>
+          <p:nvPr/>
+        </p:nvSpPr>
+        <p:spPr>
+          <a:xfrm>
+            <a:off x="124051" y="102889"/>
+            <a:ext cx="11607874" cy="369332"/>
+          </a:xfrm>
+          <a:prstGeom prst="rect">
+            <a:avLst/>
+          </a:prstGeom>
+          <a:noFill/>
+        </p:spPr>
+        <p:txBody>
+          <a:bodyPr wrap="square">
+            <a:spAutoFit/>
+          </a:bodyPr>
+          <a:lstStyle/>
+          <a:p>
+            <a:pPr marL="342900" indent="-342900">
+              <a:buFont typeface="+mj-lt"/>
+              <a:buAutoNum type="arabicPeriod" startAt="9"/>
+            </a:pPr>
+            <a:r>
+              <a:rPr lang="en-GB" dirty="0"/>
+              <a:t>Scale D-20HA001 symbol y-axis scaling 1.25 </a:t>
+            </a:r>
+          </a:p>
+        </p:txBody>
+      </p:sp>
+      <p:pic>
+        <p:nvPicPr>
+          <p:cNvPr id="4" name="Picture 3">
+            <a:extLst>
+              <a:ext uri="{FF2B5EF4-FFF2-40B4-BE49-F238E27FC236}">
+                <a16:creationId xmlns:a16="http://schemas.microsoft.com/office/drawing/2014/main" id="{C71FC7E4-E028-6D46-1C9C-D63E880B7539}"/>
+              </a:ext>
+            </a:extLst>
+          </p:cNvPr>
+          <p:cNvPicPr>
+            <a:picLocks noChangeAspect="1"/>
+          </p:cNvPicPr>
+          <p:nvPr/>
+        </p:nvPicPr>
+        <p:blipFill>
+          <a:blip r:embed="rId2"/>
+          <a:stretch>
+            <a:fillRect/>
+          </a:stretch>
+        </p:blipFill>
+        <p:spPr>
+          <a:xfrm>
+            <a:off x="428310" y="1699491"/>
+            <a:ext cx="7566654" cy="4608945"/>
+          </a:xfrm>
+          <a:prstGeom prst="rect">
+            <a:avLst/>
+          </a:prstGeom>
+        </p:spPr>
+      </p:pic>
+    </p:spTree>
+    <p:extLst>
+      <p:ext uri="{BB962C8B-B14F-4D97-AF65-F5344CB8AC3E}">
+        <p14:creationId xmlns:p14="http://schemas.microsoft.com/office/powerpoint/2010/main" val="2857028273"/>
+      </p:ext>
+    </p:extLst>
+  </p:cSld>
+  <p:clrMapOvr>
+    <a:masterClrMapping/>
+  </p:clrMapOvr>
+</p:sld>
+</file>
+
+<file path=ppt/slides/slide13.xml><?xml version="1.0" encoding="utf-8"?>
+<p:sld xmlns:a="http://schemas.openxmlformats.org/drawingml/2006/main" xmlns:r="http://schemas.openxmlformats.org/officeDocument/2006/relationships" xmlns:p="http://schemas.openxmlformats.org/presentationml/2006/main">
+  <p:cSld>
+    <p:spTree>
+      <p:nvGrpSpPr>
+        <p:cNvPr id="1" name=""/>
+        <p:cNvGrpSpPr/>
+        <p:nvPr/>
+      </p:nvGrpSpPr>
+      <p:grpSpPr>
+        <a:xfrm>
+          <a:off x="0" y="0"/>
+          <a:ext cx="0" cy="0"/>
+          <a:chOff x="0" y="0"/>
+          <a:chExt cx="0" cy="0"/>
+        </a:xfrm>
+      </p:grpSpPr>
       <p:sp>
         <p:nvSpPr>
           <p:cNvPr id="3" name="TextBox 2">
@@ -4704,43 +5176,105 @@
           <a:p>
             <a:pPr marL="342900" indent="-342900">
               <a:buFont typeface="+mj-lt"/>
-              <a:buAutoNum type="arabicPeriod" startAt="8"/>
+              <a:buAutoNum type="arabicPeriod" startAt="10"/>
             </a:pPr>
             <a:r>
               <a:rPr lang="en-GB" dirty="0"/>
-              <a:t>Additional property break to the existing breaks</a:t>
-            </a:r>
-          </a:p>
-          <a:p>
-            <a:pPr marL="742950" lvl="1" indent="-285750">
-              <a:buFont typeface="Arial" panose="020B0604020202020204" pitchFamily="34" charset="0"/>
-              <a:buChar char="•"/>
+              <a:t>Modify pipe lines: </a:t>
+            </a:r>
+            <a:r>
+              <a:rPr lang="en-GB" sz="1800" b="0" i="0" u="none" strike="noStrike" baseline="0" dirty="0"/>
+              <a:t>D-20L00005A-1200PL-AS200-   &amp; D-20L00015A-0800PL-AD750- to test </a:t>
+            </a:r>
+            <a:r>
+              <a:rPr lang="en-GB" sz="1800" b="0" i="0" u="none" strike="noStrike" baseline="0" dirty="0" err="1"/>
+              <a:t>PipingNetworkSegment</a:t>
+            </a:r>
+            <a:r>
+              <a:rPr lang="en-GB" sz="1800" b="0" i="0" u="none" strike="noStrike" baseline="0" dirty="0"/>
+              <a:t> export variants</a:t>
+            </a:r>
+            <a:endParaRPr lang="en-GB" dirty="0"/>
+          </a:p>
+        </p:txBody>
+      </p:sp>
+      <p:sp>
+        <p:nvSpPr>
+          <p:cNvPr id="6" name="TextBox 5">
+            <a:extLst>
+              <a:ext uri="{FF2B5EF4-FFF2-40B4-BE49-F238E27FC236}">
+                <a16:creationId xmlns:a16="http://schemas.microsoft.com/office/drawing/2014/main" id="{FC55ADA1-F79E-E559-BB87-A61490E23126}"/>
+              </a:ext>
+            </a:extLst>
+          </p:cNvPr>
+          <p:cNvSpPr txBox="1"/>
+          <p:nvPr/>
+        </p:nvSpPr>
+        <p:spPr>
+          <a:xfrm>
+            <a:off x="8531794" y="1166068"/>
+            <a:ext cx="3416300" cy="3693319"/>
+          </a:xfrm>
+          <a:prstGeom prst="rect">
+            <a:avLst/>
+          </a:prstGeom>
+          <a:noFill/>
+        </p:spPr>
+        <p:txBody>
+          <a:bodyPr wrap="square" rtlCol="0">
+            <a:spAutoFit/>
+          </a:bodyPr>
+          <a:lstStyle/>
+          <a:p>
+            <a:pPr marL="342900" indent="-342900">
+              <a:buAutoNum type="arabicPeriod"/>
             </a:pPr>
             <a:r>
               <a:rPr lang="en-GB" dirty="0"/>
-              <a:t>Add </a:t>
+              <a:t>Convert </a:t>
+            </a:r>
+            <a:r>
+              <a:rPr lang="en-GB" sz="1800" b="0" i="0" u="none" strike="noStrike" baseline="0" dirty="0"/>
+              <a:t>D-20L00015A-0800PL-AD750- into a segment of D-20L00005A-1200PL-AS200- where all piping properties will be the same as D-20L00005A-1200PL-AS200- main pipe.</a:t>
+            </a:r>
+          </a:p>
+          <a:p>
+            <a:pPr marL="342900" indent="-342900">
+              <a:buAutoNum type="arabicPeriod"/>
+            </a:pPr>
+            <a:r>
+              <a:rPr lang="en-GB" dirty="0"/>
+              <a:t>Add spectacle blind</a:t>
+            </a:r>
+          </a:p>
+          <a:p>
+            <a:pPr marL="342900" indent="-342900">
+              <a:buAutoNum type="arabicPeriod"/>
+            </a:pPr>
+            <a:r>
+              <a:rPr lang="en-GB" dirty="0"/>
+              <a:t>Add physical piping tee near OPC.</a:t>
+            </a:r>
+          </a:p>
+          <a:p>
+            <a:pPr marL="342900" indent="-342900">
+              <a:buAutoNum type="arabicPeriod"/>
+            </a:pPr>
+            <a:endParaRPr lang="en-GB" dirty="0"/>
+          </a:p>
+          <a:p>
+            <a:r>
+              <a:rPr lang="en-GB" dirty="0"/>
+              <a:t>2 </a:t>
             </a:r>
             <a:r>
               <a:rPr lang="en-GB" dirty="0" err="1"/>
-              <a:t>AreaBreak</a:t>
+              <a:t>PipingNetworkSegments</a:t>
             </a:r>
             <a:r>
               <a:rPr lang="en-GB" dirty="0"/>
-              <a:t> AP110 / AP310 need to associate </a:t>
-            </a:r>
-            <a:r>
-              <a:rPr lang="en-GB" dirty="0" err="1"/>
-              <a:t>PlantArea</a:t>
-            </a:r>
-            <a:r>
-              <a:rPr lang="en-GB" dirty="0"/>
-              <a:t> these to the </a:t>
-            </a:r>
-            <a:r>
-              <a:rPr lang="en-GB" dirty="0" err="1"/>
-              <a:t>PipingNetworkSystems</a:t>
-            </a:r>
-            <a:endParaRPr lang="en-GB" dirty="0"/>
+              <a:t> will be created either side of the ball valve that is part of the main line.</a:t>
+            </a:r>
           </a:p>
         </p:txBody>
       </p:sp>
@@ -4749,7 +5283,7 @@
           <p:cNvPr id="7" name="Table 7">
             <a:extLst>
               <a:ext uri="{FF2B5EF4-FFF2-40B4-BE49-F238E27FC236}">
-                <a16:creationId xmlns:a16="http://schemas.microsoft.com/office/drawing/2014/main" id="{122A675D-8A6B-1BF2-70BB-B5522B02FF65}"/>
+                <a16:creationId xmlns:a16="http://schemas.microsoft.com/office/drawing/2014/main" id="{A1A5B0BE-F4C9-85E5-4213-CEF3F77E0FF4}"/>
               </a:ext>
             </a:extLst>
           </p:cNvPr>
@@ -4838,297 +5372,10 @@
       </p:graphicFrame>
       <p:pic>
         <p:nvPicPr>
-          <p:cNvPr id="14" name="Picture 13">
-            <a:extLst>
-              <a:ext uri="{FF2B5EF4-FFF2-40B4-BE49-F238E27FC236}">
-                <a16:creationId xmlns:a16="http://schemas.microsoft.com/office/drawing/2014/main" id="{0867DAD2-EF74-8AFE-7A1D-EB2EDAB00363}"/>
-              </a:ext>
-            </a:extLst>
-          </p:cNvPr>
-          <p:cNvPicPr>
-            <a:picLocks noChangeAspect="1"/>
-          </p:cNvPicPr>
-          <p:nvPr/>
-        </p:nvPicPr>
-        <p:blipFill>
-          <a:blip r:embed="rId3"/>
-          <a:stretch>
-            <a:fillRect/>
-          </a:stretch>
-        </p:blipFill>
-        <p:spPr>
-          <a:xfrm>
-            <a:off x="6062658" y="3324210"/>
-            <a:ext cx="66684" cy="209579"/>
-          </a:xfrm>
-          <a:prstGeom prst="rect">
-            <a:avLst/>
-          </a:prstGeom>
-        </p:spPr>
-      </p:pic>
-      <p:cxnSp>
-        <p:nvCxnSpPr>
-          <p:cNvPr id="16" name="Straight Connector 15">
-            <a:extLst>
-              <a:ext uri="{FF2B5EF4-FFF2-40B4-BE49-F238E27FC236}">
-                <a16:creationId xmlns:a16="http://schemas.microsoft.com/office/drawing/2014/main" id="{A29FB585-2461-CC61-D0BA-ECB0D795D605}"/>
-              </a:ext>
-            </a:extLst>
-          </p:cNvPr>
-          <p:cNvCxnSpPr>
-            <a:cxnSpLocks/>
-          </p:cNvCxnSpPr>
-          <p:nvPr/>
-        </p:nvCxnSpPr>
-        <p:spPr>
-          <a:xfrm flipH="1" flipV="1">
-            <a:off x="4974430" y="4954548"/>
-            <a:ext cx="1" cy="88940"/>
-          </a:xfrm>
-          <a:prstGeom prst="line">
-            <a:avLst/>
-          </a:prstGeom>
-          <a:ln>
-            <a:solidFill>
-              <a:schemeClr val="tx1">
-                <a:alpha val="65000"/>
-              </a:schemeClr>
-            </a:solidFill>
-          </a:ln>
-        </p:spPr>
-        <p:style>
-          <a:lnRef idx="1">
-            <a:schemeClr val="accent1"/>
-          </a:lnRef>
-          <a:fillRef idx="0">
-            <a:schemeClr val="accent1"/>
-          </a:fillRef>
-          <a:effectRef idx="0">
-            <a:schemeClr val="accent1"/>
-          </a:effectRef>
-          <a:fontRef idx="minor">
-            <a:schemeClr val="tx1"/>
-          </a:fontRef>
-        </p:style>
-      </p:cxnSp>
-      <p:sp>
-        <p:nvSpPr>
-          <p:cNvPr id="2" name="TextBox 1">
-            <a:extLst>
-              <a:ext uri="{FF2B5EF4-FFF2-40B4-BE49-F238E27FC236}">
-                <a16:creationId xmlns:a16="http://schemas.microsoft.com/office/drawing/2014/main" id="{74946A1F-3EC1-E064-A437-D07B3B7CE2F6}"/>
-              </a:ext>
-            </a:extLst>
-          </p:cNvPr>
-          <p:cNvSpPr txBox="1"/>
-          <p:nvPr/>
-        </p:nvSpPr>
-        <p:spPr>
-          <a:xfrm>
-            <a:off x="4841839" y="4972451"/>
-            <a:ext cx="121444" cy="38472"/>
-          </a:xfrm>
-          <a:prstGeom prst="rect">
-            <a:avLst/>
-          </a:prstGeom>
-          <a:noFill/>
-        </p:spPr>
-        <p:txBody>
-          <a:bodyPr wrap="square" lIns="0" tIns="0" rIns="0" bIns="0" rtlCol="0">
-            <a:spAutoFit/>
-          </a:bodyPr>
-          <a:lstStyle/>
-          <a:p>
-            <a:pPr algn="r"/>
-            <a:r>
-              <a:rPr lang="en-GB" sz="250" dirty="0">
-                <a:effectLst>
-                  <a:outerShdw blurRad="38100" dist="38100" dir="2700000" algn="tl">
-                    <a:srgbClr val="000000">
-                      <a:alpha val="43137"/>
-                    </a:srgbClr>
-                  </a:outerShdw>
-                </a:effectLst>
-                <a:latin typeface="Bahnschrift Light" panose="020B0502040204020203" pitchFamily="34" charset="0"/>
-                <a:ea typeface="Arial Unicode MS" panose="020B0604020202020204" pitchFamily="34" charset="-128"/>
-                <a:cs typeface="Arial Unicode MS" panose="020B0604020202020204" pitchFamily="34" charset="-128"/>
-              </a:rPr>
-              <a:t>AP110</a:t>
-            </a:r>
-          </a:p>
-        </p:txBody>
-      </p:sp>
-      <p:sp>
-        <p:nvSpPr>
-          <p:cNvPr id="5" name="TextBox 4">
-            <a:extLst>
-              <a:ext uri="{FF2B5EF4-FFF2-40B4-BE49-F238E27FC236}">
-                <a16:creationId xmlns:a16="http://schemas.microsoft.com/office/drawing/2014/main" id="{F090421E-7E42-C945-746D-CC2C8C43115D}"/>
-              </a:ext>
-            </a:extLst>
-          </p:cNvPr>
-          <p:cNvSpPr txBox="1"/>
-          <p:nvPr/>
-        </p:nvSpPr>
-        <p:spPr>
-          <a:xfrm>
-            <a:off x="4993481" y="4972451"/>
-            <a:ext cx="121444" cy="38472"/>
-          </a:xfrm>
-          <a:prstGeom prst="rect">
-            <a:avLst/>
-          </a:prstGeom>
-          <a:noFill/>
-        </p:spPr>
-        <p:txBody>
-          <a:bodyPr wrap="square" lIns="0" tIns="0" rIns="0" bIns="0" rtlCol="0">
-            <a:spAutoFit/>
-          </a:bodyPr>
-          <a:lstStyle/>
-          <a:p>
-            <a:r>
-              <a:rPr lang="en-GB" sz="250" dirty="0">
-                <a:effectLst>
-                  <a:outerShdw blurRad="38100" dist="38100" dir="2700000" algn="tl">
-                    <a:srgbClr val="000000">
-                      <a:alpha val="43137"/>
-                    </a:srgbClr>
-                  </a:outerShdw>
-                </a:effectLst>
-                <a:latin typeface="Bahnschrift Light" panose="020B0502040204020203" pitchFamily="34" charset="0"/>
-                <a:ea typeface="Arial Unicode MS" panose="020B0604020202020204" pitchFamily="34" charset="-128"/>
-                <a:cs typeface="Arial Unicode MS" panose="020B0604020202020204" pitchFamily="34" charset="-128"/>
-              </a:rPr>
-              <a:t>AP310</a:t>
-            </a:r>
-          </a:p>
-        </p:txBody>
-      </p:sp>
-      <p:sp>
-        <p:nvSpPr>
-          <p:cNvPr id="6" name="TextBox 5">
-            <a:extLst>
-              <a:ext uri="{FF2B5EF4-FFF2-40B4-BE49-F238E27FC236}">
-                <a16:creationId xmlns:a16="http://schemas.microsoft.com/office/drawing/2014/main" id="{A6882847-5B32-5A38-EAF6-DBA6981FF24B}"/>
-              </a:ext>
-            </a:extLst>
-          </p:cNvPr>
-          <p:cNvSpPr txBox="1"/>
-          <p:nvPr/>
-        </p:nvSpPr>
-        <p:spPr>
-          <a:xfrm>
-            <a:off x="8448675" y="1204933"/>
-            <a:ext cx="3416300" cy="4801314"/>
-          </a:xfrm>
-          <a:prstGeom prst="rect">
-            <a:avLst/>
-          </a:prstGeom>
-          <a:noFill/>
-        </p:spPr>
-        <p:txBody>
-          <a:bodyPr wrap="square" rtlCol="0">
-            <a:spAutoFit/>
-          </a:bodyPr>
-          <a:lstStyle/>
-          <a:p>
-            <a:r>
-              <a:rPr lang="en-GB" dirty="0"/>
-              <a:t>** Test transfer of </a:t>
-            </a:r>
-            <a:r>
-              <a:rPr lang="en-GB" dirty="0" err="1"/>
-              <a:t>PropertyBreak</a:t>
-            </a:r>
-            <a:r>
-              <a:rPr lang="en-GB" dirty="0"/>
-              <a:t>:</a:t>
-            </a:r>
-          </a:p>
-          <a:p>
-            <a:pPr marL="342900" indent="-342900">
-              <a:buAutoNum type="arabicPeriod"/>
-            </a:pPr>
-            <a:r>
-              <a:rPr lang="en-GB" dirty="0"/>
-              <a:t>Top break: use 2 </a:t>
-            </a:r>
-            <a:r>
-              <a:rPr lang="en-GB" dirty="0" err="1"/>
-              <a:t>PropertyBreak</a:t>
-            </a:r>
-            <a:r>
-              <a:rPr lang="en-GB" dirty="0"/>
-              <a:t> class elements 1 for each break type. 2 separate symbols placed up on each other.</a:t>
-            </a:r>
-          </a:p>
-          <a:p>
-            <a:pPr marL="342900" indent="-342900">
-              <a:buAutoNum type="arabicPeriod"/>
-            </a:pPr>
-            <a:r>
-              <a:rPr lang="en-GB" dirty="0"/>
-              <a:t>Bottom break: use 1 </a:t>
-            </a:r>
-            <a:r>
-              <a:rPr lang="en-GB" dirty="0" err="1"/>
-              <a:t>PropertyBreak</a:t>
-            </a:r>
-            <a:r>
-              <a:rPr lang="en-GB" dirty="0"/>
-              <a:t> class element for both break types. 1 symbol used for the double break.</a:t>
-            </a:r>
-          </a:p>
-          <a:p>
-            <a:pPr marL="342900" indent="-342900">
-              <a:buAutoNum type="arabicPeriod"/>
-            </a:pPr>
-            <a:endParaRPr lang="en-GB" dirty="0"/>
-          </a:p>
-          <a:p>
-            <a:r>
-              <a:rPr lang="en-GB" dirty="0"/>
-              <a:t>In each case the BreakValue1 attribute will be used to transfer the text shown on the left-hand side of the break, BreakValue2 will transfer the text on the right-hand side.</a:t>
-            </a:r>
-          </a:p>
-        </p:txBody>
-      </p:sp>
-    </p:spTree>
-    <p:extLst>
-      <p:ext uri="{BB962C8B-B14F-4D97-AF65-F5344CB8AC3E}">
-        <p14:creationId xmlns:p14="http://schemas.microsoft.com/office/powerpoint/2010/main" val="2911805113"/>
-      </p:ext>
-    </p:extLst>
-  </p:cSld>
-  <p:clrMapOvr>
-    <a:masterClrMapping/>
-  </p:clrMapOvr>
-</p:sld>
-</file>
-
-<file path=ppt/slides/slide12.xml><?xml version="1.0" encoding="utf-8"?>
-<p:sld xmlns:a="http://schemas.openxmlformats.org/drawingml/2006/main" xmlns:r="http://schemas.openxmlformats.org/officeDocument/2006/relationships" xmlns:p="http://schemas.openxmlformats.org/presentationml/2006/main">
-  <p:cSld>
-    <p:spTree>
-      <p:nvGrpSpPr>
-        <p:cNvPr id="1" name=""/>
-        <p:cNvGrpSpPr/>
-        <p:nvPr/>
-      </p:nvGrpSpPr>
-      <p:grpSpPr>
-        <a:xfrm>
-          <a:off x="0" y="0"/>
-          <a:ext cx="0" cy="0"/>
-          <a:chOff x="0" y="0"/>
-          <a:chExt cx="0" cy="0"/>
-        </a:xfrm>
-      </p:grpSpPr>
-      <p:pic>
-        <p:nvPicPr>
-          <p:cNvPr id="6" name="Picture 5">
-            <a:extLst>
-              <a:ext uri="{FF2B5EF4-FFF2-40B4-BE49-F238E27FC236}">
-                <a16:creationId xmlns:a16="http://schemas.microsoft.com/office/drawing/2014/main" id="{458B31A0-581B-67A9-2076-A070EDB4EF2F}"/>
+          <p:cNvPr id="9" name="Picture 8">
+            <a:extLst>
+              <a:ext uri="{FF2B5EF4-FFF2-40B4-BE49-F238E27FC236}">
+                <a16:creationId xmlns:a16="http://schemas.microsoft.com/office/drawing/2014/main" id="{8340A83E-9B70-5525-6729-E6417D9E2FAC}"/>
               </a:ext>
             </a:extLst>
           </p:cNvPr>
@@ -5145,267 +5392,12 @@
         </p:blipFill>
         <p:spPr>
           <a:xfrm>
-            <a:off x="458251" y="914289"/>
-            <a:ext cx="8895299" cy="5428122"/>
+            <a:off x="509236" y="1750900"/>
+            <a:ext cx="7404802" cy="4502119"/>
           </a:xfrm>
           <a:prstGeom prst="rect">
             <a:avLst/>
           </a:prstGeom>
-          <a:ln>
-            <a:solidFill>
-              <a:schemeClr val="tx1"/>
-            </a:solidFill>
-          </a:ln>
-        </p:spPr>
-      </p:pic>
-      <p:sp>
-        <p:nvSpPr>
-          <p:cNvPr id="3" name="TextBox 2">
-            <a:extLst>
-              <a:ext uri="{FF2B5EF4-FFF2-40B4-BE49-F238E27FC236}">
-                <a16:creationId xmlns:a16="http://schemas.microsoft.com/office/drawing/2014/main" id="{7F5AFCD7-CF64-A7F6-B02F-987454D53E76}"/>
-              </a:ext>
-            </a:extLst>
-          </p:cNvPr>
-          <p:cNvSpPr txBox="1"/>
-          <p:nvPr/>
-        </p:nvSpPr>
-        <p:spPr>
-          <a:xfrm>
-            <a:off x="124051" y="102889"/>
-            <a:ext cx="11607874" cy="369332"/>
-          </a:xfrm>
-          <a:prstGeom prst="rect">
-            <a:avLst/>
-          </a:prstGeom>
-          <a:noFill/>
-        </p:spPr>
-        <p:txBody>
-          <a:bodyPr wrap="square">
-            <a:spAutoFit/>
-          </a:bodyPr>
-          <a:lstStyle/>
-          <a:p>
-            <a:pPr marL="342900" indent="-342900">
-              <a:buFont typeface="+mj-lt"/>
-              <a:buAutoNum type="arabicPeriod" startAt="9"/>
-            </a:pPr>
-            <a:r>
-              <a:rPr lang="en-GB" dirty="0"/>
-              <a:t>Scale D-20HA001 symbol y-axis scaling 1.25 </a:t>
-            </a:r>
-          </a:p>
-        </p:txBody>
-      </p:sp>
-    </p:spTree>
-    <p:extLst>
-      <p:ext uri="{BB962C8B-B14F-4D97-AF65-F5344CB8AC3E}">
-        <p14:creationId xmlns:p14="http://schemas.microsoft.com/office/powerpoint/2010/main" val="2857028273"/>
-      </p:ext>
-    </p:extLst>
-  </p:cSld>
-  <p:clrMapOvr>
-    <a:masterClrMapping/>
-  </p:clrMapOvr>
-</p:sld>
-</file>
-
-<file path=ppt/slides/slide13.xml><?xml version="1.0" encoding="utf-8"?>
-<p:sld xmlns:a="http://schemas.openxmlformats.org/drawingml/2006/main" xmlns:r="http://schemas.openxmlformats.org/officeDocument/2006/relationships" xmlns:p="http://schemas.openxmlformats.org/presentationml/2006/main">
-  <p:cSld>
-    <p:spTree>
-      <p:nvGrpSpPr>
-        <p:cNvPr id="1" name=""/>
-        <p:cNvGrpSpPr/>
-        <p:nvPr/>
-      </p:nvGrpSpPr>
-      <p:grpSpPr>
-        <a:xfrm>
-          <a:off x="0" y="0"/>
-          <a:ext cx="0" cy="0"/>
-          <a:chOff x="0" y="0"/>
-          <a:chExt cx="0" cy="0"/>
-        </a:xfrm>
-      </p:grpSpPr>
-      <p:sp>
-        <p:nvSpPr>
-          <p:cNvPr id="3" name="TextBox 2">
-            <a:extLst>
-              <a:ext uri="{FF2B5EF4-FFF2-40B4-BE49-F238E27FC236}">
-                <a16:creationId xmlns:a16="http://schemas.microsoft.com/office/drawing/2014/main" id="{7F5AFCD7-CF64-A7F6-B02F-987454D53E76}"/>
-              </a:ext>
-            </a:extLst>
-          </p:cNvPr>
-          <p:cNvSpPr txBox="1"/>
-          <p:nvPr/>
-        </p:nvSpPr>
-        <p:spPr>
-          <a:xfrm>
-            <a:off x="124051" y="102889"/>
-            <a:ext cx="11607874" cy="646331"/>
-          </a:xfrm>
-          <a:prstGeom prst="rect">
-            <a:avLst/>
-          </a:prstGeom>
-          <a:noFill/>
-        </p:spPr>
-        <p:txBody>
-          <a:bodyPr wrap="square">
-            <a:spAutoFit/>
-          </a:bodyPr>
-          <a:lstStyle/>
-          <a:p>
-            <a:pPr marL="342900" indent="-342900">
-              <a:buFont typeface="+mj-lt"/>
-              <a:buAutoNum type="arabicPeriod" startAt="10"/>
-            </a:pPr>
-            <a:r>
-              <a:rPr lang="en-GB" dirty="0"/>
-              <a:t>Modify pipe lines: </a:t>
-            </a:r>
-            <a:r>
-              <a:rPr lang="en-GB" sz="1800" b="0" i="0" u="none" strike="noStrike" baseline="0" dirty="0"/>
-              <a:t>D-20L00005A-1200PL-AS200-   &amp; D-20L00015A-0800PL-AD750- to test </a:t>
-            </a:r>
-            <a:r>
-              <a:rPr lang="en-GB" sz="1800" b="0" i="0" u="none" strike="noStrike" baseline="0" dirty="0" err="1"/>
-              <a:t>PipingNetworkSegment</a:t>
-            </a:r>
-            <a:r>
-              <a:rPr lang="en-GB" sz="1800" b="0" i="0" u="none" strike="noStrike" baseline="0" dirty="0"/>
-              <a:t> export variants</a:t>
-            </a:r>
-            <a:endParaRPr lang="en-GB" dirty="0"/>
-          </a:p>
-        </p:txBody>
-      </p:sp>
-      <p:sp>
-        <p:nvSpPr>
-          <p:cNvPr id="6" name="TextBox 5">
-            <a:extLst>
-              <a:ext uri="{FF2B5EF4-FFF2-40B4-BE49-F238E27FC236}">
-                <a16:creationId xmlns:a16="http://schemas.microsoft.com/office/drawing/2014/main" id="{FC55ADA1-F79E-E559-BB87-A61490E23126}"/>
-              </a:ext>
-            </a:extLst>
-          </p:cNvPr>
-          <p:cNvSpPr txBox="1"/>
-          <p:nvPr/>
-        </p:nvSpPr>
-        <p:spPr>
-          <a:xfrm>
-            <a:off x="8531794" y="1166068"/>
-            <a:ext cx="3416300" cy="4247317"/>
-          </a:xfrm>
-          <a:prstGeom prst="rect">
-            <a:avLst/>
-          </a:prstGeom>
-          <a:noFill/>
-        </p:spPr>
-        <p:txBody>
-          <a:bodyPr wrap="square" rtlCol="0">
-            <a:spAutoFit/>
-          </a:bodyPr>
-          <a:lstStyle/>
-          <a:p>
-            <a:pPr marL="342900" indent="-342900">
-              <a:buAutoNum type="arabicPeriod"/>
-            </a:pPr>
-            <a:r>
-              <a:rPr lang="en-GB" dirty="0"/>
-              <a:t>Add reducer to </a:t>
-            </a:r>
-            <a:r>
-              <a:rPr lang="en-GB" sz="1800" b="0" i="0" u="none" strike="noStrike" baseline="0" dirty="0"/>
-              <a:t>D-20L00005A-1200PL-AS200-</a:t>
-            </a:r>
-            <a:endParaRPr lang="en-GB" dirty="0"/>
-          </a:p>
-          <a:p>
-            <a:pPr marL="342900" indent="-342900">
-              <a:buAutoNum type="arabicPeriod"/>
-            </a:pPr>
-            <a:r>
-              <a:rPr lang="en-GB" dirty="0"/>
-              <a:t>Convert </a:t>
-            </a:r>
-            <a:r>
-              <a:rPr lang="en-GB" sz="1800" b="0" i="0" u="none" strike="noStrike" baseline="0" dirty="0"/>
-              <a:t>D-20L00015A-0800PL-AD750- into a segment of D-20L00005A-1200PL-AS200- where all piping properties will be the same as D-20L00005A-1200PL-AS200- main pipe.</a:t>
-            </a:r>
-          </a:p>
-          <a:p>
-            <a:pPr marL="342900" indent="-342900">
-              <a:buAutoNum type="arabicPeriod"/>
-            </a:pPr>
-            <a:r>
-              <a:rPr lang="en-GB" dirty="0"/>
-              <a:t>Add spectacle blind</a:t>
-            </a:r>
-          </a:p>
-          <a:p>
-            <a:pPr marL="342900" indent="-342900">
-              <a:buAutoNum type="arabicPeriod"/>
-            </a:pPr>
-            <a:r>
-              <a:rPr lang="en-GB" dirty="0"/>
-              <a:t>Add physical piping tee near OPC.</a:t>
-            </a:r>
-          </a:p>
-          <a:p>
-            <a:pPr marL="342900" indent="-342900">
-              <a:buAutoNum type="arabicPeriod"/>
-            </a:pPr>
-            <a:endParaRPr lang="en-GB" dirty="0"/>
-          </a:p>
-          <a:p>
-            <a:r>
-              <a:rPr lang="en-GB" dirty="0"/>
-              <a:t>2 </a:t>
-            </a:r>
-            <a:r>
-              <a:rPr lang="en-GB" dirty="0" err="1"/>
-              <a:t>PipingNetworkSegments</a:t>
-            </a:r>
-            <a:r>
-              <a:rPr lang="en-GB" dirty="0"/>
-              <a:t> will be created either side of the ball valve that is part of the main line.</a:t>
-            </a:r>
-          </a:p>
-        </p:txBody>
-      </p:sp>
-      <p:pic>
-        <p:nvPicPr>
-          <p:cNvPr id="4" name="Picture 3">
-            <a:extLst>
-              <a:ext uri="{FF2B5EF4-FFF2-40B4-BE49-F238E27FC236}">
-                <a16:creationId xmlns:a16="http://schemas.microsoft.com/office/drawing/2014/main" id="{56F2B7C5-5C82-1EFC-24A8-71F0D651C867}"/>
-              </a:ext>
-            </a:extLst>
-          </p:cNvPr>
-          <p:cNvPicPr>
-            <a:picLocks noChangeAspect="1"/>
-          </p:cNvPicPr>
-          <p:nvPr/>
-        </p:nvPicPr>
-        <p:blipFill>
-          <a:blip r:embed="rId2"/>
-          <a:stretch>
-            <a:fillRect/>
-          </a:stretch>
-        </p:blipFill>
-        <p:spPr>
-          <a:xfrm>
-            <a:off x="243907" y="1285875"/>
-            <a:ext cx="7948816" cy="4856904"/>
-          </a:xfrm>
-          <a:prstGeom prst="rect">
-            <a:avLst/>
-          </a:prstGeom>
-          <a:ln>
-            <a:solidFill>
-              <a:schemeClr val="tx1"/>
-            </a:solidFill>
-          </a:ln>
         </p:spPr>
       </p:pic>
     </p:spTree>
@@ -5444,12 +5436,206 @@
           <a:chExt cx="0" cy="0"/>
         </a:xfrm>
       </p:grpSpPr>
+      <p:sp>
+        <p:nvSpPr>
+          <p:cNvPr id="3" name="TextBox 2">
+            <a:extLst>
+              <a:ext uri="{FF2B5EF4-FFF2-40B4-BE49-F238E27FC236}">
+                <a16:creationId xmlns:a16="http://schemas.microsoft.com/office/drawing/2014/main" id="{C4F6CF00-620E-D538-3340-A82F881C25A3}"/>
+              </a:ext>
+            </a:extLst>
+          </p:cNvPr>
+          <p:cNvSpPr txBox="1"/>
+          <p:nvPr/>
+        </p:nvSpPr>
+        <p:spPr>
+          <a:xfrm>
+            <a:off x="124051" y="102889"/>
+            <a:ext cx="11607874" cy="369332"/>
+          </a:xfrm>
+          <a:prstGeom prst="rect">
+            <a:avLst/>
+          </a:prstGeom>
+          <a:noFill/>
+        </p:spPr>
+        <p:txBody>
+          <a:bodyPr wrap="square">
+            <a:spAutoFit/>
+          </a:bodyPr>
+          <a:lstStyle/>
+          <a:p>
+            <a:pPr marL="342900" indent="-342900">
+              <a:buFont typeface="+mj-lt"/>
+              <a:buAutoNum type="arabicPeriod" startAt="11"/>
+            </a:pPr>
+            <a:r>
+              <a:rPr lang="en-GB" dirty="0"/>
+              <a:t>Add driver for pump. Add </a:t>
+            </a:r>
+            <a:r>
+              <a:rPr lang="en-GB" dirty="0" err="1"/>
+              <a:t>VortexBreaker</a:t>
+            </a:r>
+            <a:r>
+              <a:rPr lang="en-GB" dirty="0"/>
+              <a:t> internal.</a:t>
+            </a:r>
+          </a:p>
+        </p:txBody>
+      </p:sp>
+      <p:sp>
+        <p:nvSpPr>
+          <p:cNvPr id="6" name="TextBox 5">
+            <a:extLst>
+              <a:ext uri="{FF2B5EF4-FFF2-40B4-BE49-F238E27FC236}">
+                <a16:creationId xmlns:a16="http://schemas.microsoft.com/office/drawing/2014/main" id="{B86BB71F-A940-4152-3C48-BC9CCCE2DC8E}"/>
+              </a:ext>
+            </a:extLst>
+          </p:cNvPr>
+          <p:cNvSpPr txBox="1"/>
+          <p:nvPr/>
+        </p:nvSpPr>
+        <p:spPr>
+          <a:xfrm>
+            <a:off x="8531794" y="1166068"/>
+            <a:ext cx="3416300" cy="646331"/>
+          </a:xfrm>
+          <a:prstGeom prst="rect">
+            <a:avLst/>
+          </a:prstGeom>
+          <a:noFill/>
+        </p:spPr>
+        <p:txBody>
+          <a:bodyPr wrap="square" rtlCol="0">
+            <a:spAutoFit/>
+          </a:bodyPr>
+          <a:lstStyle/>
+          <a:p>
+            <a:pPr marL="342900" indent="-342900">
+              <a:buAutoNum type="arabicPeriod"/>
+            </a:pPr>
+            <a:r>
+              <a:rPr lang="en-GB" dirty="0"/>
+              <a:t>Add pump driver.</a:t>
+            </a:r>
+          </a:p>
+          <a:p>
+            <a:pPr marL="342900" indent="-342900">
+              <a:buAutoNum type="arabicPeriod"/>
+            </a:pPr>
+            <a:r>
+              <a:rPr lang="en-GB" dirty="0"/>
+              <a:t>Add </a:t>
+            </a:r>
+            <a:r>
+              <a:rPr lang="en-GB" dirty="0" err="1"/>
+              <a:t>VortexBreaker</a:t>
+            </a:r>
+            <a:r>
+              <a:rPr lang="en-GB" dirty="0"/>
+              <a:t> internal</a:t>
+            </a:r>
+          </a:p>
+        </p:txBody>
+      </p:sp>
+      <p:graphicFrame>
+        <p:nvGraphicFramePr>
+          <p:cNvPr id="2" name="Table 7">
+            <a:extLst>
+              <a:ext uri="{FF2B5EF4-FFF2-40B4-BE49-F238E27FC236}">
+                <a16:creationId xmlns:a16="http://schemas.microsoft.com/office/drawing/2014/main" id="{0D3CBF11-4068-A41D-648F-70EF02009053}"/>
+              </a:ext>
+            </a:extLst>
+          </p:cNvPr>
+          <p:cNvGraphicFramePr>
+            <a:graphicFrameLocks noGrp="1"/>
+          </p:cNvGraphicFramePr>
+          <p:nvPr/>
+        </p:nvGraphicFramePr>
+        <p:xfrm>
+          <a:off x="307975" y="1191319"/>
+          <a:ext cx="7807325" cy="5257106"/>
+        </p:xfrm>
+        <a:graphic>
+          <a:graphicData uri="http://schemas.openxmlformats.org/drawingml/2006/table">
+            <a:tbl>
+              <a:tblPr firstRow="1" bandRow="1">
+                <a:tableStyleId>{5C22544A-7EE6-4342-B048-85BDC9FD1C3A}</a:tableStyleId>
+              </a:tblPr>
+              <a:tblGrid>
+                <a:gridCol w="7807325">
+                  <a:extLst>
+                    <a:ext uri="{9D8B030D-6E8A-4147-A177-3AD203B41FA5}">
+                      <a16:colId xmlns:a16="http://schemas.microsoft.com/office/drawing/2014/main" val="3422904110"/>
+                    </a:ext>
+                  </a:extLst>
+                </a:gridCol>
+              </a:tblGrid>
+              <a:tr h="5257106">
+                <a:tc>
+                  <a:txBody>
+                    <a:bodyPr/>
+                    <a:lstStyle/>
+                    <a:p>
+                      <a:endParaRPr lang="en-GB" dirty="0"/>
+                    </a:p>
+                  </a:txBody>
+                  <a:tcPr>
+                    <a:lnL w="12700" cap="flat" cmpd="sng" algn="ctr">
+                      <a:solidFill>
+                        <a:schemeClr val="tx1"/>
+                      </a:solidFill>
+                      <a:prstDash val="solid"/>
+                      <a:round/>
+                      <a:headEnd type="none" w="med" len="med"/>
+                      <a:tailEnd type="none" w="med" len="med"/>
+                    </a:lnL>
+                    <a:lnR w="12700" cap="flat" cmpd="sng" algn="ctr">
+                      <a:solidFill>
+                        <a:schemeClr val="tx1"/>
+                      </a:solidFill>
+                      <a:prstDash val="solid"/>
+                      <a:round/>
+                      <a:headEnd type="none" w="med" len="med"/>
+                      <a:tailEnd type="none" w="med" len="med"/>
+                    </a:lnR>
+                    <a:lnT w="12700" cap="flat" cmpd="sng" algn="ctr">
+                      <a:solidFill>
+                        <a:schemeClr val="tx1"/>
+                      </a:solidFill>
+                      <a:prstDash val="solid"/>
+                      <a:round/>
+                      <a:headEnd type="none" w="med" len="med"/>
+                      <a:tailEnd type="none" w="med" len="med"/>
+                    </a:lnT>
+                    <a:lnB w="12700" cap="flat" cmpd="sng" algn="ctr">
+                      <a:solidFill>
+                        <a:schemeClr val="tx1"/>
+                      </a:solidFill>
+                      <a:prstDash val="solid"/>
+                      <a:round/>
+                      <a:headEnd type="none" w="med" len="med"/>
+                      <a:tailEnd type="none" w="med" len="med"/>
+                    </a:lnB>
+                    <a:noFill/>
+                  </a:tcPr>
+                </a:tc>
+                <a:extLst>
+                  <a:ext uri="{0D108BD9-81ED-4DB2-BD59-A6C34878D82A}">
+                    <a16:rowId xmlns:a16="http://schemas.microsoft.com/office/drawing/2014/main" val="1045134656"/>
+                  </a:ext>
+                </a:extLst>
+              </a:tr>
+            </a:tbl>
+          </a:graphicData>
+        </a:graphic>
+      </p:graphicFrame>
       <p:pic>
         <p:nvPicPr>
-          <p:cNvPr id="8" name="Picture 7">
-            <a:extLst>
-              <a:ext uri="{FF2B5EF4-FFF2-40B4-BE49-F238E27FC236}">
-                <a16:creationId xmlns:a16="http://schemas.microsoft.com/office/drawing/2014/main" id="{C6215A35-5338-1E13-0EF3-27DABDDE13D3}"/>
+          <p:cNvPr id="5" name="Picture 4">
+            <a:extLst>
+              <a:ext uri="{FF2B5EF4-FFF2-40B4-BE49-F238E27FC236}">
+                <a16:creationId xmlns:a16="http://schemas.microsoft.com/office/drawing/2014/main" id="{7E487E50-16FB-CDA1-43F4-CB847C6D7BC7}"/>
               </a:ext>
             </a:extLst>
           </p:cNvPr>
@@ -5466,121 +5652,14 @@
         </p:blipFill>
         <p:spPr>
           <a:xfrm>
-            <a:off x="243907" y="1285875"/>
-            <a:ext cx="7948816" cy="4850556"/>
+            <a:off x="452528" y="1553776"/>
+            <a:ext cx="7420852" cy="4523751"/>
           </a:xfrm>
           <a:prstGeom prst="rect">
             <a:avLst/>
           </a:prstGeom>
-          <a:ln>
-            <a:solidFill>
-              <a:schemeClr val="tx1"/>
-            </a:solidFill>
-          </a:ln>
         </p:spPr>
       </p:pic>
-      <p:sp>
-        <p:nvSpPr>
-          <p:cNvPr id="3" name="TextBox 2">
-            <a:extLst>
-              <a:ext uri="{FF2B5EF4-FFF2-40B4-BE49-F238E27FC236}">
-                <a16:creationId xmlns:a16="http://schemas.microsoft.com/office/drawing/2014/main" id="{C4F6CF00-620E-D538-3340-A82F881C25A3}"/>
-              </a:ext>
-            </a:extLst>
-          </p:cNvPr>
-          <p:cNvSpPr txBox="1"/>
-          <p:nvPr/>
-        </p:nvSpPr>
-        <p:spPr>
-          <a:xfrm>
-            <a:off x="124051" y="102889"/>
-            <a:ext cx="11607874" cy="369332"/>
-          </a:xfrm>
-          <a:prstGeom prst="rect">
-            <a:avLst/>
-          </a:prstGeom>
-          <a:noFill/>
-        </p:spPr>
-        <p:txBody>
-          <a:bodyPr wrap="square">
-            <a:spAutoFit/>
-          </a:bodyPr>
-          <a:lstStyle/>
-          <a:p>
-            <a:pPr marL="342900" indent="-342900">
-              <a:buFont typeface="+mj-lt"/>
-              <a:buAutoNum type="arabicPeriod" startAt="11"/>
-            </a:pPr>
-            <a:r>
-              <a:rPr lang="en-GB" dirty="0"/>
-              <a:t>Add driver for pump. Add </a:t>
-            </a:r>
-            <a:r>
-              <a:rPr lang="en-GB" dirty="0" err="1"/>
-              <a:t>VortexBreaker</a:t>
-            </a:r>
-            <a:r>
-              <a:rPr lang="en-GB" dirty="0"/>
-              <a:t> internal.</a:t>
-            </a:r>
-          </a:p>
-        </p:txBody>
-      </p:sp>
-      <p:sp>
-        <p:nvSpPr>
-          <p:cNvPr id="6" name="TextBox 5">
-            <a:extLst>
-              <a:ext uri="{FF2B5EF4-FFF2-40B4-BE49-F238E27FC236}">
-                <a16:creationId xmlns:a16="http://schemas.microsoft.com/office/drawing/2014/main" id="{B86BB71F-A940-4152-3C48-BC9CCCE2DC8E}"/>
-              </a:ext>
-            </a:extLst>
-          </p:cNvPr>
-          <p:cNvSpPr txBox="1"/>
-          <p:nvPr/>
-        </p:nvSpPr>
-        <p:spPr>
-          <a:xfrm>
-            <a:off x="8531794" y="1166068"/>
-            <a:ext cx="3416300" cy="646331"/>
-          </a:xfrm>
-          <a:prstGeom prst="rect">
-            <a:avLst/>
-          </a:prstGeom>
-          <a:noFill/>
-        </p:spPr>
-        <p:txBody>
-          <a:bodyPr wrap="square" rtlCol="0">
-            <a:spAutoFit/>
-          </a:bodyPr>
-          <a:lstStyle/>
-          <a:p>
-            <a:pPr marL="342900" indent="-342900">
-              <a:buAutoNum type="arabicPeriod"/>
-            </a:pPr>
-            <a:r>
-              <a:rPr lang="en-GB" dirty="0"/>
-              <a:t>Add pump driver.</a:t>
-            </a:r>
-          </a:p>
-          <a:p>
-            <a:pPr marL="342900" indent="-342900">
-              <a:buAutoNum type="arabicPeriod"/>
-            </a:pPr>
-            <a:r>
-              <a:rPr lang="en-GB" dirty="0"/>
-              <a:t>Add </a:t>
-            </a:r>
-            <a:r>
-              <a:rPr lang="en-GB" dirty="0" err="1"/>
-              <a:t>VortexBreaker</a:t>
-            </a:r>
-            <a:r>
-              <a:rPr lang="en-GB" dirty="0"/>
-              <a:t> internal</a:t>
-            </a:r>
-          </a:p>
-        </p:txBody>
-      </p:sp>
     </p:spTree>
     <p:extLst>
       <p:ext uri="{BB962C8B-B14F-4D97-AF65-F5344CB8AC3E}">
@@ -5992,10 +6071,10 @@
       </p:graphicFrame>
       <p:pic>
         <p:nvPicPr>
-          <p:cNvPr id="4" name="Picture 3">
-            <a:extLst>
-              <a:ext uri="{FF2B5EF4-FFF2-40B4-BE49-F238E27FC236}">
-                <a16:creationId xmlns:a16="http://schemas.microsoft.com/office/drawing/2014/main" id="{503D1E7A-D436-630A-8E9C-82A488C32A9B}"/>
+          <p:cNvPr id="5" name="Picture 4">
+            <a:extLst>
+              <a:ext uri="{FF2B5EF4-FFF2-40B4-BE49-F238E27FC236}">
+                <a16:creationId xmlns:a16="http://schemas.microsoft.com/office/drawing/2014/main" id="{153CFC7E-D035-06F0-A449-BE9B48114C13}"/>
               </a:ext>
             </a:extLst>
           </p:cNvPr>
@@ -6012,8 +6091,8 @@
         </p:blipFill>
         <p:spPr>
           <a:xfrm>
-            <a:off x="330016" y="1215913"/>
-            <a:ext cx="7744958" cy="4699112"/>
+            <a:off x="397693" y="1487604"/>
+            <a:ext cx="7627888" cy="4664536"/>
           </a:xfrm>
           <a:prstGeom prst="rect">
             <a:avLst/>
@@ -6101,6 +6180,615 @@
             <a:r>
               <a:rPr lang="en-GB" dirty="0"/>
               <a:t> by placing a piping tee between the ESV0006 actuated valve and the FE0001 element and include an unnamed valve.</a:t>
+            </a:r>
+          </a:p>
+        </p:txBody>
+      </p:sp>
+      <p:graphicFrame>
+        <p:nvGraphicFramePr>
+          <p:cNvPr id="7" name="Table 7">
+            <a:extLst>
+              <a:ext uri="{FF2B5EF4-FFF2-40B4-BE49-F238E27FC236}">
+                <a16:creationId xmlns:a16="http://schemas.microsoft.com/office/drawing/2014/main" id="{122A675D-8A6B-1BF2-70BB-B5522B02FF65}"/>
+              </a:ext>
+            </a:extLst>
+          </p:cNvPr>
+          <p:cNvGraphicFramePr>
+            <a:graphicFrameLocks noGrp="1"/>
+          </p:cNvGraphicFramePr>
+          <p:nvPr/>
+        </p:nvGraphicFramePr>
+        <p:xfrm>
+          <a:off x="307975" y="1191319"/>
+          <a:ext cx="7807325" cy="5257106"/>
+        </p:xfrm>
+        <a:graphic>
+          <a:graphicData uri="http://schemas.openxmlformats.org/drawingml/2006/table">
+            <a:tbl>
+              <a:tblPr firstRow="1" bandRow="1">
+                <a:tableStyleId>{5C22544A-7EE6-4342-B048-85BDC9FD1C3A}</a:tableStyleId>
+              </a:tblPr>
+              <a:tblGrid>
+                <a:gridCol w="7807325">
+                  <a:extLst>
+                    <a:ext uri="{9D8B030D-6E8A-4147-A177-3AD203B41FA5}">
+                      <a16:colId xmlns:a16="http://schemas.microsoft.com/office/drawing/2014/main" val="3422904110"/>
+                    </a:ext>
+                  </a:extLst>
+                </a:gridCol>
+              </a:tblGrid>
+              <a:tr h="5257106">
+                <a:tc>
+                  <a:txBody>
+                    <a:bodyPr/>
+                    <a:lstStyle/>
+                    <a:p>
+                      <a:endParaRPr lang="en-GB" dirty="0"/>
+                    </a:p>
+                  </a:txBody>
+                  <a:tcPr>
+                    <a:lnL w="12700" cap="flat" cmpd="sng" algn="ctr">
+                      <a:solidFill>
+                        <a:schemeClr val="tx1"/>
+                      </a:solidFill>
+                      <a:prstDash val="solid"/>
+                      <a:round/>
+                      <a:headEnd type="none" w="med" len="med"/>
+                      <a:tailEnd type="none" w="med" len="med"/>
+                    </a:lnL>
+                    <a:lnR w="12700" cap="flat" cmpd="sng" algn="ctr">
+                      <a:solidFill>
+                        <a:schemeClr val="tx1"/>
+                      </a:solidFill>
+                      <a:prstDash val="solid"/>
+                      <a:round/>
+                      <a:headEnd type="none" w="med" len="med"/>
+                      <a:tailEnd type="none" w="med" len="med"/>
+                    </a:lnR>
+                    <a:lnT w="12700" cap="flat" cmpd="sng" algn="ctr">
+                      <a:solidFill>
+                        <a:schemeClr val="tx1"/>
+                      </a:solidFill>
+                      <a:prstDash val="solid"/>
+                      <a:round/>
+                      <a:headEnd type="none" w="med" len="med"/>
+                      <a:tailEnd type="none" w="med" len="med"/>
+                    </a:lnT>
+                    <a:lnB w="12700" cap="flat" cmpd="sng" algn="ctr">
+                      <a:solidFill>
+                        <a:schemeClr val="tx1"/>
+                      </a:solidFill>
+                      <a:prstDash val="solid"/>
+                      <a:round/>
+                      <a:headEnd type="none" w="med" len="med"/>
+                      <a:tailEnd type="none" w="med" len="med"/>
+                    </a:lnB>
+                    <a:noFill/>
+                  </a:tcPr>
+                </a:tc>
+                <a:extLst>
+                  <a:ext uri="{0D108BD9-81ED-4DB2-BD59-A6C34878D82A}">
+                    <a16:rowId xmlns:a16="http://schemas.microsoft.com/office/drawing/2014/main" val="1045134656"/>
+                  </a:ext>
+                </a:extLst>
+              </a:tr>
+            </a:tbl>
+          </a:graphicData>
+        </a:graphic>
+      </p:graphicFrame>
+      <p:pic>
+        <p:nvPicPr>
+          <p:cNvPr id="5" name="Picture 4">
+            <a:extLst>
+              <a:ext uri="{FF2B5EF4-FFF2-40B4-BE49-F238E27FC236}">
+                <a16:creationId xmlns:a16="http://schemas.microsoft.com/office/drawing/2014/main" id="{0597467A-5A94-A69B-1E9C-20020FA7DB8E}"/>
+              </a:ext>
+            </a:extLst>
+          </p:cNvPr>
+          <p:cNvPicPr>
+            <a:picLocks noChangeAspect="1"/>
+          </p:cNvPicPr>
+          <p:nvPr/>
+        </p:nvPicPr>
+        <p:blipFill>
+          <a:blip r:embed="rId2"/>
+          <a:stretch>
+            <a:fillRect/>
+          </a:stretch>
+        </p:blipFill>
+        <p:spPr>
+          <a:xfrm>
+            <a:off x="529476" y="1450110"/>
+            <a:ext cx="7364321" cy="4486989"/>
+          </a:xfrm>
+          <a:prstGeom prst="rect">
+            <a:avLst/>
+          </a:prstGeom>
+        </p:spPr>
+      </p:pic>
+    </p:spTree>
+    <p:extLst>
+      <p:ext uri="{BB962C8B-B14F-4D97-AF65-F5344CB8AC3E}">
+        <p14:creationId xmlns:p14="http://schemas.microsoft.com/office/powerpoint/2010/main" val="1069569012"/>
+      </p:ext>
+    </p:extLst>
+  </p:cSld>
+  <p:clrMapOvr>
+    <a:masterClrMapping/>
+  </p:clrMapOvr>
+</p:sld>
+</file>
+
+<file path=ppt/slides/slide6.xml><?xml version="1.0" encoding="utf-8"?>
+<p:sld xmlns:a="http://schemas.openxmlformats.org/drawingml/2006/main" xmlns:r="http://schemas.openxmlformats.org/officeDocument/2006/relationships" xmlns:p="http://schemas.openxmlformats.org/presentationml/2006/main">
+  <p:cSld>
+    <p:spTree>
+      <p:nvGrpSpPr>
+        <p:cNvPr id="1" name=""/>
+        <p:cNvGrpSpPr/>
+        <p:nvPr/>
+      </p:nvGrpSpPr>
+      <p:grpSpPr>
+        <a:xfrm>
+          <a:off x="0" y="0"/>
+          <a:ext cx="0" cy="0"/>
+          <a:chOff x="0" y="0"/>
+          <a:chExt cx="0" cy="0"/>
+        </a:xfrm>
+      </p:grpSpPr>
+      <p:sp>
+        <p:nvSpPr>
+          <p:cNvPr id="3" name="TextBox 2">
+            <a:extLst>
+              <a:ext uri="{FF2B5EF4-FFF2-40B4-BE49-F238E27FC236}">
+                <a16:creationId xmlns:a16="http://schemas.microsoft.com/office/drawing/2014/main" id="{7F5AFCD7-CF64-A7F6-B02F-987454D53E76}"/>
+              </a:ext>
+            </a:extLst>
+          </p:cNvPr>
+          <p:cNvSpPr txBox="1"/>
+          <p:nvPr/>
+        </p:nvSpPr>
+        <p:spPr>
+          <a:xfrm>
+            <a:off x="124051" y="102889"/>
+            <a:ext cx="11607874" cy="646331"/>
+          </a:xfrm>
+          <a:prstGeom prst="rect">
+            <a:avLst/>
+          </a:prstGeom>
+          <a:noFill/>
+        </p:spPr>
+        <p:txBody>
+          <a:bodyPr wrap="square">
+            <a:spAutoFit/>
+          </a:bodyPr>
+          <a:lstStyle/>
+          <a:p>
+            <a:pPr marL="342900" indent="-342900">
+              <a:buFont typeface="+mj-lt"/>
+              <a:buAutoNum type="arabicPeriod" startAt="3"/>
+            </a:pPr>
+            <a:r>
+              <a:rPr lang="en-GB" dirty="0"/>
+              <a:t>Rename TI0003/TIC0003/TV0003 to TI0013/TIC0013/TV0013 and update associated loop.</a:t>
+            </a:r>
+          </a:p>
+          <a:p>
+            <a:pPr marL="800100" lvl="1" indent="-342900">
+              <a:buFont typeface="Arial" panose="020B0604020202020204" pitchFamily="34" charset="0"/>
+              <a:buChar char="•"/>
+            </a:pPr>
+            <a:r>
+              <a:rPr lang="en-GB" dirty="0"/>
+              <a:t>Retain the original </a:t>
+            </a:r>
+            <a:r>
+              <a:rPr lang="en-GB" dirty="0" err="1"/>
+              <a:t>PersistentID</a:t>
+            </a:r>
+            <a:r>
+              <a:rPr lang="en-GB" dirty="0"/>
+              <a:t> and change the name.</a:t>
+            </a:r>
+          </a:p>
+        </p:txBody>
+      </p:sp>
+      <p:graphicFrame>
+        <p:nvGraphicFramePr>
+          <p:cNvPr id="7" name="Table 7">
+            <a:extLst>
+              <a:ext uri="{FF2B5EF4-FFF2-40B4-BE49-F238E27FC236}">
+                <a16:creationId xmlns:a16="http://schemas.microsoft.com/office/drawing/2014/main" id="{122A675D-8A6B-1BF2-70BB-B5522B02FF65}"/>
+              </a:ext>
+            </a:extLst>
+          </p:cNvPr>
+          <p:cNvGraphicFramePr>
+            <a:graphicFrameLocks noGrp="1"/>
+          </p:cNvGraphicFramePr>
+          <p:nvPr/>
+        </p:nvGraphicFramePr>
+        <p:xfrm>
+          <a:off x="307975" y="1191319"/>
+          <a:ext cx="7807325" cy="5257106"/>
+        </p:xfrm>
+        <a:graphic>
+          <a:graphicData uri="http://schemas.openxmlformats.org/drawingml/2006/table">
+            <a:tbl>
+              <a:tblPr firstRow="1" bandRow="1">
+                <a:tableStyleId>{5C22544A-7EE6-4342-B048-85BDC9FD1C3A}</a:tableStyleId>
+              </a:tblPr>
+              <a:tblGrid>
+                <a:gridCol w="7807325">
+                  <a:extLst>
+                    <a:ext uri="{9D8B030D-6E8A-4147-A177-3AD203B41FA5}">
+                      <a16:colId xmlns:a16="http://schemas.microsoft.com/office/drawing/2014/main" val="3422904110"/>
+                    </a:ext>
+                  </a:extLst>
+                </a:gridCol>
+              </a:tblGrid>
+              <a:tr h="5257106">
+                <a:tc>
+                  <a:txBody>
+                    <a:bodyPr/>
+                    <a:lstStyle/>
+                    <a:p>
+                      <a:endParaRPr lang="en-GB" dirty="0"/>
+                    </a:p>
+                  </a:txBody>
+                  <a:tcPr>
+                    <a:lnL w="12700" cap="flat" cmpd="sng" algn="ctr">
+                      <a:solidFill>
+                        <a:schemeClr val="tx1"/>
+                      </a:solidFill>
+                      <a:prstDash val="solid"/>
+                      <a:round/>
+                      <a:headEnd type="none" w="med" len="med"/>
+                      <a:tailEnd type="none" w="med" len="med"/>
+                    </a:lnL>
+                    <a:lnR w="12700" cap="flat" cmpd="sng" algn="ctr">
+                      <a:solidFill>
+                        <a:schemeClr val="tx1"/>
+                      </a:solidFill>
+                      <a:prstDash val="solid"/>
+                      <a:round/>
+                      <a:headEnd type="none" w="med" len="med"/>
+                      <a:tailEnd type="none" w="med" len="med"/>
+                    </a:lnR>
+                    <a:lnT w="12700" cap="flat" cmpd="sng" algn="ctr">
+                      <a:solidFill>
+                        <a:schemeClr val="tx1"/>
+                      </a:solidFill>
+                      <a:prstDash val="solid"/>
+                      <a:round/>
+                      <a:headEnd type="none" w="med" len="med"/>
+                      <a:tailEnd type="none" w="med" len="med"/>
+                    </a:lnT>
+                    <a:lnB w="12700" cap="flat" cmpd="sng" algn="ctr">
+                      <a:solidFill>
+                        <a:schemeClr val="tx1"/>
+                      </a:solidFill>
+                      <a:prstDash val="solid"/>
+                      <a:round/>
+                      <a:headEnd type="none" w="med" len="med"/>
+                      <a:tailEnd type="none" w="med" len="med"/>
+                    </a:lnB>
+                    <a:noFill/>
+                  </a:tcPr>
+                </a:tc>
+                <a:extLst>
+                  <a:ext uri="{0D108BD9-81ED-4DB2-BD59-A6C34878D82A}">
+                    <a16:rowId xmlns:a16="http://schemas.microsoft.com/office/drawing/2014/main" val="1045134656"/>
+                  </a:ext>
+                </a:extLst>
+              </a:tr>
+            </a:tbl>
+          </a:graphicData>
+        </a:graphic>
+      </p:graphicFrame>
+      <p:pic>
+        <p:nvPicPr>
+          <p:cNvPr id="5" name="Picture 4">
+            <a:extLst>
+              <a:ext uri="{FF2B5EF4-FFF2-40B4-BE49-F238E27FC236}">
+                <a16:creationId xmlns:a16="http://schemas.microsoft.com/office/drawing/2014/main" id="{A34C257C-9CB2-BE58-F1B5-55EA9E0BA6E4}"/>
+              </a:ext>
+            </a:extLst>
+          </p:cNvPr>
+          <p:cNvPicPr>
+            <a:picLocks noChangeAspect="1"/>
+          </p:cNvPicPr>
+          <p:nvPr/>
+        </p:nvPicPr>
+        <p:blipFill>
+          <a:blip r:embed="rId2"/>
+          <a:stretch>
+            <a:fillRect/>
+          </a:stretch>
+        </p:blipFill>
+        <p:spPr>
+          <a:xfrm>
+            <a:off x="354047" y="1469490"/>
+            <a:ext cx="7715180" cy="4700763"/>
+          </a:xfrm>
+          <a:prstGeom prst="rect">
+            <a:avLst/>
+          </a:prstGeom>
+        </p:spPr>
+      </p:pic>
+    </p:spTree>
+    <p:extLst>
+      <p:ext uri="{BB962C8B-B14F-4D97-AF65-F5344CB8AC3E}">
+        <p14:creationId xmlns:p14="http://schemas.microsoft.com/office/powerpoint/2010/main" val="1461351059"/>
+      </p:ext>
+    </p:extLst>
+  </p:cSld>
+  <p:clrMapOvr>
+    <a:masterClrMapping/>
+  </p:clrMapOvr>
+</p:sld>
+</file>
+
+<file path=ppt/slides/slide7.xml><?xml version="1.0" encoding="utf-8"?>
+<p:sld xmlns:a="http://schemas.openxmlformats.org/drawingml/2006/main" xmlns:r="http://schemas.openxmlformats.org/officeDocument/2006/relationships" xmlns:p="http://schemas.openxmlformats.org/presentationml/2006/main">
+  <p:cSld>
+    <p:spTree>
+      <p:nvGrpSpPr>
+        <p:cNvPr id="1" name=""/>
+        <p:cNvGrpSpPr/>
+        <p:nvPr/>
+      </p:nvGrpSpPr>
+      <p:grpSpPr>
+        <a:xfrm>
+          <a:off x="0" y="0"/>
+          <a:ext cx="0" cy="0"/>
+          <a:chOff x="0" y="0"/>
+          <a:chExt cx="0" cy="0"/>
+        </a:xfrm>
+      </p:grpSpPr>
+      <p:sp>
+        <p:nvSpPr>
+          <p:cNvPr id="3" name="TextBox 2">
+            <a:extLst>
+              <a:ext uri="{FF2B5EF4-FFF2-40B4-BE49-F238E27FC236}">
+                <a16:creationId xmlns:a16="http://schemas.microsoft.com/office/drawing/2014/main" id="{7F5AFCD7-CF64-A7F6-B02F-987454D53E76}"/>
+              </a:ext>
+            </a:extLst>
+          </p:cNvPr>
+          <p:cNvSpPr txBox="1"/>
+          <p:nvPr/>
+        </p:nvSpPr>
+        <p:spPr>
+          <a:xfrm>
+            <a:off x="124051" y="102889"/>
+            <a:ext cx="11607874" cy="369332"/>
+          </a:xfrm>
+          <a:prstGeom prst="rect">
+            <a:avLst/>
+          </a:prstGeom>
+          <a:noFill/>
+        </p:spPr>
+        <p:txBody>
+          <a:bodyPr wrap="square">
+            <a:spAutoFit/>
+          </a:bodyPr>
+          <a:lstStyle/>
+          <a:p>
+            <a:pPr marL="342900" indent="-342900">
+              <a:buFont typeface="+mj-lt"/>
+              <a:buAutoNum type="arabicPeriod" startAt="4"/>
+            </a:pPr>
+            <a:r>
+              <a:rPr lang="en-GB" dirty="0"/>
+              <a:t>Remove the note and unused nozzle from 20VA001 and update elevation to EL. 400000</a:t>
+            </a:r>
+          </a:p>
+        </p:txBody>
+      </p:sp>
+      <p:graphicFrame>
+        <p:nvGraphicFramePr>
+          <p:cNvPr id="7" name="Table 7">
+            <a:extLst>
+              <a:ext uri="{FF2B5EF4-FFF2-40B4-BE49-F238E27FC236}">
+                <a16:creationId xmlns:a16="http://schemas.microsoft.com/office/drawing/2014/main" id="{122A675D-8A6B-1BF2-70BB-B5522B02FF65}"/>
+              </a:ext>
+            </a:extLst>
+          </p:cNvPr>
+          <p:cNvGraphicFramePr>
+            <a:graphicFrameLocks noGrp="1"/>
+          </p:cNvGraphicFramePr>
+          <p:nvPr/>
+        </p:nvGraphicFramePr>
+        <p:xfrm>
+          <a:off x="307975" y="1191319"/>
+          <a:ext cx="7807325" cy="5257106"/>
+        </p:xfrm>
+        <a:graphic>
+          <a:graphicData uri="http://schemas.openxmlformats.org/drawingml/2006/table">
+            <a:tbl>
+              <a:tblPr firstRow="1" bandRow="1">
+                <a:tableStyleId>{5C22544A-7EE6-4342-B048-85BDC9FD1C3A}</a:tableStyleId>
+              </a:tblPr>
+              <a:tblGrid>
+                <a:gridCol w="7807325">
+                  <a:extLst>
+                    <a:ext uri="{9D8B030D-6E8A-4147-A177-3AD203B41FA5}">
+                      <a16:colId xmlns:a16="http://schemas.microsoft.com/office/drawing/2014/main" val="3422904110"/>
+                    </a:ext>
+                  </a:extLst>
+                </a:gridCol>
+              </a:tblGrid>
+              <a:tr h="5257106">
+                <a:tc>
+                  <a:txBody>
+                    <a:bodyPr/>
+                    <a:lstStyle/>
+                    <a:p>
+                      <a:endParaRPr lang="en-GB" dirty="0"/>
+                    </a:p>
+                  </a:txBody>
+                  <a:tcPr>
+                    <a:lnL w="12700" cap="flat" cmpd="sng" algn="ctr">
+                      <a:solidFill>
+                        <a:schemeClr val="tx1"/>
+                      </a:solidFill>
+                      <a:prstDash val="solid"/>
+                      <a:round/>
+                      <a:headEnd type="none" w="med" len="med"/>
+                      <a:tailEnd type="none" w="med" len="med"/>
+                    </a:lnL>
+                    <a:lnR w="12700" cap="flat" cmpd="sng" algn="ctr">
+                      <a:solidFill>
+                        <a:schemeClr val="tx1"/>
+                      </a:solidFill>
+                      <a:prstDash val="solid"/>
+                      <a:round/>
+                      <a:headEnd type="none" w="med" len="med"/>
+                      <a:tailEnd type="none" w="med" len="med"/>
+                    </a:lnR>
+                    <a:lnT w="12700" cap="flat" cmpd="sng" algn="ctr">
+                      <a:solidFill>
+                        <a:schemeClr val="tx1"/>
+                      </a:solidFill>
+                      <a:prstDash val="solid"/>
+                      <a:round/>
+                      <a:headEnd type="none" w="med" len="med"/>
+                      <a:tailEnd type="none" w="med" len="med"/>
+                    </a:lnT>
+                    <a:lnB w="12700" cap="flat" cmpd="sng" algn="ctr">
+                      <a:solidFill>
+                        <a:schemeClr val="tx1"/>
+                      </a:solidFill>
+                      <a:prstDash val="solid"/>
+                      <a:round/>
+                      <a:headEnd type="none" w="med" len="med"/>
+                      <a:tailEnd type="none" w="med" len="med"/>
+                    </a:lnB>
+                    <a:noFill/>
+                  </a:tcPr>
+                </a:tc>
+                <a:extLst>
+                  <a:ext uri="{0D108BD9-81ED-4DB2-BD59-A6C34878D82A}">
+                    <a16:rowId xmlns:a16="http://schemas.microsoft.com/office/drawing/2014/main" val="1045134656"/>
+                  </a:ext>
+                </a:extLst>
+              </a:tr>
+            </a:tbl>
+          </a:graphicData>
+        </a:graphic>
+      </p:graphicFrame>
+      <p:pic>
+        <p:nvPicPr>
+          <p:cNvPr id="5" name="Picture 4">
+            <a:extLst>
+              <a:ext uri="{FF2B5EF4-FFF2-40B4-BE49-F238E27FC236}">
+                <a16:creationId xmlns:a16="http://schemas.microsoft.com/office/drawing/2014/main" id="{D4F8D10C-0A0A-A211-9EE2-413A7BE17408}"/>
+              </a:ext>
+            </a:extLst>
+          </p:cNvPr>
+          <p:cNvPicPr>
+            <a:picLocks noChangeAspect="1"/>
+          </p:cNvPicPr>
+          <p:nvPr/>
+        </p:nvPicPr>
+        <p:blipFill>
+          <a:blip r:embed="rId2"/>
+          <a:stretch>
+            <a:fillRect/>
+          </a:stretch>
+        </p:blipFill>
+        <p:spPr>
+          <a:xfrm>
+            <a:off x="395652" y="1440873"/>
+            <a:ext cx="7670003" cy="4679377"/>
+          </a:xfrm>
+          <a:prstGeom prst="rect">
+            <a:avLst/>
+          </a:prstGeom>
+        </p:spPr>
+      </p:pic>
+    </p:spTree>
+    <p:extLst>
+      <p:ext uri="{BB962C8B-B14F-4D97-AF65-F5344CB8AC3E}">
+        <p14:creationId xmlns:p14="http://schemas.microsoft.com/office/powerpoint/2010/main" val="3478772804"/>
+      </p:ext>
+    </p:extLst>
+  </p:cSld>
+  <p:clrMapOvr>
+    <a:masterClrMapping/>
+  </p:clrMapOvr>
+</p:sld>
+</file>
+
+<file path=ppt/slides/slide8.xml><?xml version="1.0" encoding="utf-8"?>
+<p:sld xmlns:a="http://schemas.openxmlformats.org/drawingml/2006/main" xmlns:r="http://schemas.openxmlformats.org/officeDocument/2006/relationships" xmlns:p="http://schemas.openxmlformats.org/presentationml/2006/main">
+  <p:cSld>
+    <p:spTree>
+      <p:nvGrpSpPr>
+        <p:cNvPr id="1" name=""/>
+        <p:cNvGrpSpPr/>
+        <p:nvPr/>
+      </p:nvGrpSpPr>
+      <p:grpSpPr>
+        <a:xfrm>
+          <a:off x="0" y="0"/>
+          <a:ext cx="0" cy="0"/>
+          <a:chOff x="0" y="0"/>
+          <a:chExt cx="0" cy="0"/>
+        </a:xfrm>
+      </p:grpSpPr>
+      <p:sp>
+        <p:nvSpPr>
+          <p:cNvPr id="3" name="TextBox 2">
+            <a:extLst>
+              <a:ext uri="{FF2B5EF4-FFF2-40B4-BE49-F238E27FC236}">
+                <a16:creationId xmlns:a16="http://schemas.microsoft.com/office/drawing/2014/main" id="{7F5AFCD7-CF64-A7F6-B02F-987454D53E76}"/>
+              </a:ext>
+            </a:extLst>
+          </p:cNvPr>
+          <p:cNvSpPr txBox="1"/>
+          <p:nvPr/>
+        </p:nvSpPr>
+        <p:spPr>
+          <a:xfrm>
+            <a:off x="124051" y="102889"/>
+            <a:ext cx="11607874" cy="646331"/>
+          </a:xfrm>
+          <a:prstGeom prst="rect">
+            <a:avLst/>
+          </a:prstGeom>
+          <a:noFill/>
+        </p:spPr>
+        <p:txBody>
+          <a:bodyPr wrap="square">
+            <a:spAutoFit/>
+          </a:bodyPr>
+          <a:lstStyle/>
+          <a:p>
+            <a:pPr marL="342900" indent="-342900">
+              <a:buFont typeface="+mj-lt"/>
+              <a:buAutoNum type="arabicPeriod" startAt="5"/>
+            </a:pPr>
+            <a:r>
+              <a:rPr lang="en-GB" dirty="0"/>
+              <a:t>Change the type of actuator for HV0001 to a PA006A actuator type</a:t>
+            </a:r>
+          </a:p>
+          <a:p>
+            <a:pPr marL="800100" lvl="1" indent="-342900">
+              <a:buFont typeface="Arial" panose="020B0604020202020204" pitchFamily="34" charset="0"/>
+              <a:buChar char="•"/>
+            </a:pPr>
+            <a:r>
+              <a:rPr lang="en-GB" dirty="0"/>
+              <a:t>Retain </a:t>
+            </a:r>
+            <a:r>
+              <a:rPr lang="en-GB" dirty="0" err="1"/>
+              <a:t>PersistentID</a:t>
+            </a:r>
+            <a:r>
+              <a:rPr lang="en-GB" dirty="0"/>
+              <a:t> of original actuator</a:t>
             </a:r>
           </a:p>
         </p:txBody>
@@ -6202,7 +6890,7 @@
           <p:cNvPr id="4" name="Picture 3">
             <a:extLst>
               <a:ext uri="{FF2B5EF4-FFF2-40B4-BE49-F238E27FC236}">
-                <a16:creationId xmlns:a16="http://schemas.microsoft.com/office/drawing/2014/main" id="{AF3FF895-3135-7DA4-C161-2DE72DC33DDF}"/>
+                <a16:creationId xmlns:a16="http://schemas.microsoft.com/office/drawing/2014/main" id="{3B43E670-A5E8-B4DD-B351-55FEFBB80D1B}"/>
               </a:ext>
             </a:extLst>
           </p:cNvPr>
@@ -6219,8 +6907,8 @@
         </p:blipFill>
         <p:spPr>
           <a:xfrm>
-            <a:off x="373359" y="1383526"/>
-            <a:ext cx="7741941" cy="4710093"/>
+            <a:off x="464652" y="1541389"/>
+            <a:ext cx="7432439" cy="4528492"/>
           </a:xfrm>
           <a:prstGeom prst="rect">
             <a:avLst/>
@@ -6230,7 +6918,7 @@
     </p:spTree>
     <p:extLst>
       <p:ext uri="{BB962C8B-B14F-4D97-AF65-F5344CB8AC3E}">
-        <p14:creationId xmlns:p14="http://schemas.microsoft.com/office/powerpoint/2010/main" val="1069569012"/>
+        <p14:creationId xmlns:p14="http://schemas.microsoft.com/office/powerpoint/2010/main" val="1232242120"/>
       </p:ext>
     </p:extLst>
   </p:cSld>
@@ -6240,7 +6928,7 @@
 </p:sld>
 </file>
 
-<file path=ppt/slides/slide6.xml><?xml version="1.0" encoding="utf-8"?>
+<file path=ppt/slides/slide9.xml><?xml version="1.0" encoding="utf-8"?>
 <p:sld xmlns:a="http://schemas.openxmlformats.org/drawingml/2006/main" xmlns:r="http://schemas.openxmlformats.org/officeDocument/2006/relationships" xmlns:p="http://schemas.openxmlformats.org/presentationml/2006/main">
   <p:cSld>
     <p:spTree>
@@ -6287,11 +6975,19 @@
           <a:p>
             <a:pPr marL="342900" indent="-342900">
               <a:buFont typeface="+mj-lt"/>
-              <a:buAutoNum type="arabicPeriod" startAt="3"/>
+              <a:buAutoNum type="arabicPeriod" startAt="6"/>
             </a:pPr>
             <a:r>
               <a:rPr lang="en-GB" dirty="0"/>
-              <a:t>Rename TI0003/TIC0003/TV0003 to TI0013/TIC0013/TV0013 and update associated loop.</a:t>
+              <a:t>Add heat tracing to </a:t>
+            </a:r>
+            <a:r>
+              <a:rPr lang="en-GB" dirty="0" err="1"/>
+              <a:t>PipingNetworkSegment</a:t>
+            </a:r>
+            <a:r>
+              <a:rPr lang="en-GB" dirty="0"/>
+              <a:t> D-20L A- PL-AS200-</a:t>
             </a:r>
           </a:p>
           <a:p>
@@ -6301,415 +6997,7 @@
             </a:pPr>
             <a:r>
               <a:rPr lang="en-GB" dirty="0"/>
-              <a:t>Retain the original </a:t>
-            </a:r>
-            <a:r>
-              <a:rPr lang="en-GB" dirty="0" err="1"/>
-              <a:t>PersistentID</a:t>
-            </a:r>
-            <a:r>
-              <a:rPr lang="en-GB" dirty="0"/>
-              <a:t> and change the name.</a:t>
-            </a:r>
-          </a:p>
-        </p:txBody>
-      </p:sp>
-      <p:graphicFrame>
-        <p:nvGraphicFramePr>
-          <p:cNvPr id="7" name="Table 7">
-            <a:extLst>
-              <a:ext uri="{FF2B5EF4-FFF2-40B4-BE49-F238E27FC236}">
-                <a16:creationId xmlns:a16="http://schemas.microsoft.com/office/drawing/2014/main" id="{122A675D-8A6B-1BF2-70BB-B5522B02FF65}"/>
-              </a:ext>
-            </a:extLst>
-          </p:cNvPr>
-          <p:cNvGraphicFramePr>
-            <a:graphicFrameLocks noGrp="1"/>
-          </p:cNvGraphicFramePr>
-          <p:nvPr/>
-        </p:nvGraphicFramePr>
-        <p:xfrm>
-          <a:off x="307975" y="1191319"/>
-          <a:ext cx="7807325" cy="5257106"/>
-        </p:xfrm>
-        <a:graphic>
-          <a:graphicData uri="http://schemas.openxmlformats.org/drawingml/2006/table">
-            <a:tbl>
-              <a:tblPr firstRow="1" bandRow="1">
-                <a:tableStyleId>{5C22544A-7EE6-4342-B048-85BDC9FD1C3A}</a:tableStyleId>
-              </a:tblPr>
-              <a:tblGrid>
-                <a:gridCol w="7807325">
-                  <a:extLst>
-                    <a:ext uri="{9D8B030D-6E8A-4147-A177-3AD203B41FA5}">
-                      <a16:colId xmlns:a16="http://schemas.microsoft.com/office/drawing/2014/main" val="3422904110"/>
-                    </a:ext>
-                  </a:extLst>
-                </a:gridCol>
-              </a:tblGrid>
-              <a:tr h="5257106">
-                <a:tc>
-                  <a:txBody>
-                    <a:bodyPr/>
-                    <a:lstStyle/>
-                    <a:p>
-                      <a:endParaRPr lang="en-GB" dirty="0"/>
-                    </a:p>
-                  </a:txBody>
-                  <a:tcPr>
-                    <a:lnL w="12700" cap="flat" cmpd="sng" algn="ctr">
-                      <a:solidFill>
-                        <a:schemeClr val="tx1"/>
-                      </a:solidFill>
-                      <a:prstDash val="solid"/>
-                      <a:round/>
-                      <a:headEnd type="none" w="med" len="med"/>
-                      <a:tailEnd type="none" w="med" len="med"/>
-                    </a:lnL>
-                    <a:lnR w="12700" cap="flat" cmpd="sng" algn="ctr">
-                      <a:solidFill>
-                        <a:schemeClr val="tx1"/>
-                      </a:solidFill>
-                      <a:prstDash val="solid"/>
-                      <a:round/>
-                      <a:headEnd type="none" w="med" len="med"/>
-                      <a:tailEnd type="none" w="med" len="med"/>
-                    </a:lnR>
-                    <a:lnT w="12700" cap="flat" cmpd="sng" algn="ctr">
-                      <a:solidFill>
-                        <a:schemeClr val="tx1"/>
-                      </a:solidFill>
-                      <a:prstDash val="solid"/>
-                      <a:round/>
-                      <a:headEnd type="none" w="med" len="med"/>
-                      <a:tailEnd type="none" w="med" len="med"/>
-                    </a:lnT>
-                    <a:lnB w="12700" cap="flat" cmpd="sng" algn="ctr">
-                      <a:solidFill>
-                        <a:schemeClr val="tx1"/>
-                      </a:solidFill>
-                      <a:prstDash val="solid"/>
-                      <a:round/>
-                      <a:headEnd type="none" w="med" len="med"/>
-                      <a:tailEnd type="none" w="med" len="med"/>
-                    </a:lnB>
-                    <a:noFill/>
-                  </a:tcPr>
-                </a:tc>
-                <a:extLst>
-                  <a:ext uri="{0D108BD9-81ED-4DB2-BD59-A6C34878D82A}">
-                    <a16:rowId xmlns:a16="http://schemas.microsoft.com/office/drawing/2014/main" val="1045134656"/>
-                  </a:ext>
-                </a:extLst>
-              </a:tr>
-            </a:tbl>
-          </a:graphicData>
-        </a:graphic>
-      </p:graphicFrame>
-      <p:pic>
-        <p:nvPicPr>
-          <p:cNvPr id="4" name="Picture 3">
-            <a:extLst>
-              <a:ext uri="{FF2B5EF4-FFF2-40B4-BE49-F238E27FC236}">
-                <a16:creationId xmlns:a16="http://schemas.microsoft.com/office/drawing/2014/main" id="{739207D1-8AF2-0AE0-FDCC-67614CEEEFEF}"/>
-              </a:ext>
-            </a:extLst>
-          </p:cNvPr>
-          <p:cNvPicPr>
-            <a:picLocks noChangeAspect="1"/>
-          </p:cNvPicPr>
-          <p:nvPr/>
-        </p:nvPicPr>
-        <p:blipFill>
-          <a:blip r:embed="rId2"/>
-          <a:stretch>
-            <a:fillRect/>
-          </a:stretch>
-        </p:blipFill>
-        <p:spPr>
-          <a:xfrm>
-            <a:off x="319482" y="1210369"/>
-            <a:ext cx="7795818" cy="4745040"/>
-          </a:xfrm>
-          <a:prstGeom prst="rect">
-            <a:avLst/>
-          </a:prstGeom>
-        </p:spPr>
-      </p:pic>
-    </p:spTree>
-    <p:extLst>
-      <p:ext uri="{BB962C8B-B14F-4D97-AF65-F5344CB8AC3E}">
-        <p14:creationId xmlns:p14="http://schemas.microsoft.com/office/powerpoint/2010/main" val="1461351059"/>
-      </p:ext>
-    </p:extLst>
-  </p:cSld>
-  <p:clrMapOvr>
-    <a:masterClrMapping/>
-  </p:clrMapOvr>
-</p:sld>
-</file>
-
-<file path=ppt/slides/slide7.xml><?xml version="1.0" encoding="utf-8"?>
-<p:sld xmlns:a="http://schemas.openxmlformats.org/drawingml/2006/main" xmlns:r="http://schemas.openxmlformats.org/officeDocument/2006/relationships" xmlns:p="http://schemas.openxmlformats.org/presentationml/2006/main">
-  <p:cSld>
-    <p:spTree>
-      <p:nvGrpSpPr>
-        <p:cNvPr id="1" name=""/>
-        <p:cNvGrpSpPr/>
-        <p:nvPr/>
-      </p:nvGrpSpPr>
-      <p:grpSpPr>
-        <a:xfrm>
-          <a:off x="0" y="0"/>
-          <a:ext cx="0" cy="0"/>
-          <a:chOff x="0" y="0"/>
-          <a:chExt cx="0" cy="0"/>
-        </a:xfrm>
-      </p:grpSpPr>
-      <p:sp>
-        <p:nvSpPr>
-          <p:cNvPr id="3" name="TextBox 2">
-            <a:extLst>
-              <a:ext uri="{FF2B5EF4-FFF2-40B4-BE49-F238E27FC236}">
-                <a16:creationId xmlns:a16="http://schemas.microsoft.com/office/drawing/2014/main" id="{7F5AFCD7-CF64-A7F6-B02F-987454D53E76}"/>
-              </a:ext>
-            </a:extLst>
-          </p:cNvPr>
-          <p:cNvSpPr txBox="1"/>
-          <p:nvPr/>
-        </p:nvSpPr>
-        <p:spPr>
-          <a:xfrm>
-            <a:off x="124051" y="102889"/>
-            <a:ext cx="11607874" cy="369332"/>
-          </a:xfrm>
-          <a:prstGeom prst="rect">
-            <a:avLst/>
-          </a:prstGeom>
-          <a:noFill/>
-        </p:spPr>
-        <p:txBody>
-          <a:bodyPr wrap="square">
-            <a:spAutoFit/>
-          </a:bodyPr>
-          <a:lstStyle/>
-          <a:p>
-            <a:pPr marL="342900" indent="-342900">
-              <a:buFont typeface="+mj-lt"/>
-              <a:buAutoNum type="arabicPeriod" startAt="4"/>
-            </a:pPr>
-            <a:r>
-              <a:rPr lang="en-GB" dirty="0"/>
-              <a:t>Remove the note and unused nozzle from 20VA001 and update elevation to EL. 400000</a:t>
-            </a:r>
-          </a:p>
-        </p:txBody>
-      </p:sp>
-      <p:graphicFrame>
-        <p:nvGraphicFramePr>
-          <p:cNvPr id="7" name="Table 7">
-            <a:extLst>
-              <a:ext uri="{FF2B5EF4-FFF2-40B4-BE49-F238E27FC236}">
-                <a16:creationId xmlns:a16="http://schemas.microsoft.com/office/drawing/2014/main" id="{122A675D-8A6B-1BF2-70BB-B5522B02FF65}"/>
-              </a:ext>
-            </a:extLst>
-          </p:cNvPr>
-          <p:cNvGraphicFramePr>
-            <a:graphicFrameLocks noGrp="1"/>
-          </p:cNvGraphicFramePr>
-          <p:nvPr/>
-        </p:nvGraphicFramePr>
-        <p:xfrm>
-          <a:off x="307975" y="1191319"/>
-          <a:ext cx="7807325" cy="5257106"/>
-        </p:xfrm>
-        <a:graphic>
-          <a:graphicData uri="http://schemas.openxmlformats.org/drawingml/2006/table">
-            <a:tbl>
-              <a:tblPr firstRow="1" bandRow="1">
-                <a:tableStyleId>{5C22544A-7EE6-4342-B048-85BDC9FD1C3A}</a:tableStyleId>
-              </a:tblPr>
-              <a:tblGrid>
-                <a:gridCol w="7807325">
-                  <a:extLst>
-                    <a:ext uri="{9D8B030D-6E8A-4147-A177-3AD203B41FA5}">
-                      <a16:colId xmlns:a16="http://schemas.microsoft.com/office/drawing/2014/main" val="3422904110"/>
-                    </a:ext>
-                  </a:extLst>
-                </a:gridCol>
-              </a:tblGrid>
-              <a:tr h="5257106">
-                <a:tc>
-                  <a:txBody>
-                    <a:bodyPr/>
-                    <a:lstStyle/>
-                    <a:p>
-                      <a:endParaRPr lang="en-GB" dirty="0"/>
-                    </a:p>
-                  </a:txBody>
-                  <a:tcPr>
-                    <a:lnL w="12700" cap="flat" cmpd="sng" algn="ctr">
-                      <a:solidFill>
-                        <a:schemeClr val="tx1"/>
-                      </a:solidFill>
-                      <a:prstDash val="solid"/>
-                      <a:round/>
-                      <a:headEnd type="none" w="med" len="med"/>
-                      <a:tailEnd type="none" w="med" len="med"/>
-                    </a:lnL>
-                    <a:lnR w="12700" cap="flat" cmpd="sng" algn="ctr">
-                      <a:solidFill>
-                        <a:schemeClr val="tx1"/>
-                      </a:solidFill>
-                      <a:prstDash val="solid"/>
-                      <a:round/>
-                      <a:headEnd type="none" w="med" len="med"/>
-                      <a:tailEnd type="none" w="med" len="med"/>
-                    </a:lnR>
-                    <a:lnT w="12700" cap="flat" cmpd="sng" algn="ctr">
-                      <a:solidFill>
-                        <a:schemeClr val="tx1"/>
-                      </a:solidFill>
-                      <a:prstDash val="solid"/>
-                      <a:round/>
-                      <a:headEnd type="none" w="med" len="med"/>
-                      <a:tailEnd type="none" w="med" len="med"/>
-                    </a:lnT>
-                    <a:lnB w="12700" cap="flat" cmpd="sng" algn="ctr">
-                      <a:solidFill>
-                        <a:schemeClr val="tx1"/>
-                      </a:solidFill>
-                      <a:prstDash val="solid"/>
-                      <a:round/>
-                      <a:headEnd type="none" w="med" len="med"/>
-                      <a:tailEnd type="none" w="med" len="med"/>
-                    </a:lnB>
-                    <a:noFill/>
-                  </a:tcPr>
-                </a:tc>
-                <a:extLst>
-                  <a:ext uri="{0D108BD9-81ED-4DB2-BD59-A6C34878D82A}">
-                    <a16:rowId xmlns:a16="http://schemas.microsoft.com/office/drawing/2014/main" val="1045134656"/>
-                  </a:ext>
-                </a:extLst>
-              </a:tr>
-            </a:tbl>
-          </a:graphicData>
-        </a:graphic>
-      </p:graphicFrame>
-      <p:pic>
-        <p:nvPicPr>
-          <p:cNvPr id="4" name="Picture 3">
-            <a:extLst>
-              <a:ext uri="{FF2B5EF4-FFF2-40B4-BE49-F238E27FC236}">
-                <a16:creationId xmlns:a16="http://schemas.microsoft.com/office/drawing/2014/main" id="{D514F321-6564-E0F8-07C3-23B51A094B9A}"/>
-              </a:ext>
-            </a:extLst>
-          </p:cNvPr>
-          <p:cNvPicPr>
-            <a:picLocks noChangeAspect="1"/>
-          </p:cNvPicPr>
-          <p:nvPr/>
-        </p:nvPicPr>
-        <p:blipFill>
-          <a:blip r:embed="rId2"/>
-          <a:stretch>
-            <a:fillRect/>
-          </a:stretch>
-        </p:blipFill>
-        <p:spPr>
-          <a:xfrm>
-            <a:off x="339495" y="1233508"/>
-            <a:ext cx="7695369" cy="4671992"/>
-          </a:xfrm>
-          <a:prstGeom prst="rect">
-            <a:avLst/>
-          </a:prstGeom>
-        </p:spPr>
-      </p:pic>
-    </p:spTree>
-    <p:extLst>
-      <p:ext uri="{BB962C8B-B14F-4D97-AF65-F5344CB8AC3E}">
-        <p14:creationId xmlns:p14="http://schemas.microsoft.com/office/powerpoint/2010/main" val="3478772804"/>
-      </p:ext>
-    </p:extLst>
-  </p:cSld>
-  <p:clrMapOvr>
-    <a:masterClrMapping/>
-  </p:clrMapOvr>
-</p:sld>
-</file>
-
-<file path=ppt/slides/slide8.xml><?xml version="1.0" encoding="utf-8"?>
-<p:sld xmlns:a="http://schemas.openxmlformats.org/drawingml/2006/main" xmlns:r="http://schemas.openxmlformats.org/officeDocument/2006/relationships" xmlns:p="http://schemas.openxmlformats.org/presentationml/2006/main">
-  <p:cSld>
-    <p:spTree>
-      <p:nvGrpSpPr>
-        <p:cNvPr id="1" name=""/>
-        <p:cNvGrpSpPr/>
-        <p:nvPr/>
-      </p:nvGrpSpPr>
-      <p:grpSpPr>
-        <a:xfrm>
-          <a:off x="0" y="0"/>
-          <a:ext cx="0" cy="0"/>
-          <a:chOff x="0" y="0"/>
-          <a:chExt cx="0" cy="0"/>
-        </a:xfrm>
-      </p:grpSpPr>
-      <p:sp>
-        <p:nvSpPr>
-          <p:cNvPr id="3" name="TextBox 2">
-            <a:extLst>
-              <a:ext uri="{FF2B5EF4-FFF2-40B4-BE49-F238E27FC236}">
-                <a16:creationId xmlns:a16="http://schemas.microsoft.com/office/drawing/2014/main" id="{7F5AFCD7-CF64-A7F6-B02F-987454D53E76}"/>
-              </a:ext>
-            </a:extLst>
-          </p:cNvPr>
-          <p:cNvSpPr txBox="1"/>
-          <p:nvPr/>
-        </p:nvSpPr>
-        <p:spPr>
-          <a:xfrm>
-            <a:off x="124051" y="102889"/>
-            <a:ext cx="11607874" cy="646331"/>
-          </a:xfrm>
-          <a:prstGeom prst="rect">
-            <a:avLst/>
-          </a:prstGeom>
-          <a:noFill/>
-        </p:spPr>
-        <p:txBody>
-          <a:bodyPr wrap="square">
-            <a:spAutoFit/>
-          </a:bodyPr>
-          <a:lstStyle/>
-          <a:p>
-            <a:pPr marL="342900" indent="-342900">
-              <a:buFont typeface="+mj-lt"/>
-              <a:buAutoNum type="arabicPeriod" startAt="5"/>
-            </a:pPr>
-            <a:r>
-              <a:rPr lang="en-GB" dirty="0"/>
-              <a:t>Change the type of actuator for HV0001 to a PA006A actuator type</a:t>
-            </a:r>
-          </a:p>
-          <a:p>
-            <a:pPr marL="800100" lvl="1" indent="-342900">
-              <a:buFont typeface="Arial" panose="020B0604020202020204" pitchFamily="34" charset="0"/>
-              <a:buChar char="•"/>
-            </a:pPr>
-            <a:r>
-              <a:rPr lang="en-GB" dirty="0"/>
-              <a:t>Retain </a:t>
-            </a:r>
-            <a:r>
-              <a:rPr lang="en-GB" dirty="0" err="1"/>
-              <a:t>PersistentID</a:t>
-            </a:r>
-            <a:r>
-              <a:rPr lang="en-GB" dirty="0"/>
-              <a:t> of original actuator</a:t>
+              <a:t>Modify the heat trace attribute on the segment</a:t>
             </a:r>
           </a:p>
         </p:txBody>
@@ -6811,7 +7099,7 @@
           <p:cNvPr id="5" name="Picture 4">
             <a:extLst>
               <a:ext uri="{FF2B5EF4-FFF2-40B4-BE49-F238E27FC236}">
-                <a16:creationId xmlns:a16="http://schemas.microsoft.com/office/drawing/2014/main" id="{1C2DC9F4-7946-3CBB-D5DF-0C178739918B}"/>
+                <a16:creationId xmlns:a16="http://schemas.microsoft.com/office/drawing/2014/main" id="{D5647089-CEE8-A1E7-3A06-4AED218A8942}"/>
               </a:ext>
             </a:extLst>
           </p:cNvPr>
@@ -6828,217 +7116,8 @@
         </p:blipFill>
         <p:spPr>
           <a:xfrm>
-            <a:off x="341367" y="1219894"/>
-            <a:ext cx="7743349" cy="4685606"/>
-          </a:xfrm>
-          <a:prstGeom prst="rect">
-            <a:avLst/>
-          </a:prstGeom>
-        </p:spPr>
-      </p:pic>
-    </p:spTree>
-    <p:extLst>
-      <p:ext uri="{BB962C8B-B14F-4D97-AF65-F5344CB8AC3E}">
-        <p14:creationId xmlns:p14="http://schemas.microsoft.com/office/powerpoint/2010/main" val="1232242120"/>
-      </p:ext>
-    </p:extLst>
-  </p:cSld>
-  <p:clrMapOvr>
-    <a:masterClrMapping/>
-  </p:clrMapOvr>
-</p:sld>
-</file>
-
-<file path=ppt/slides/slide9.xml><?xml version="1.0" encoding="utf-8"?>
-<p:sld xmlns:a="http://schemas.openxmlformats.org/drawingml/2006/main" xmlns:r="http://schemas.openxmlformats.org/officeDocument/2006/relationships" xmlns:p="http://schemas.openxmlformats.org/presentationml/2006/main">
-  <p:cSld>
-    <p:spTree>
-      <p:nvGrpSpPr>
-        <p:cNvPr id="1" name=""/>
-        <p:cNvGrpSpPr/>
-        <p:nvPr/>
-      </p:nvGrpSpPr>
-      <p:grpSpPr>
-        <a:xfrm>
-          <a:off x="0" y="0"/>
-          <a:ext cx="0" cy="0"/>
-          <a:chOff x="0" y="0"/>
-          <a:chExt cx="0" cy="0"/>
-        </a:xfrm>
-      </p:grpSpPr>
-      <p:sp>
-        <p:nvSpPr>
-          <p:cNvPr id="3" name="TextBox 2">
-            <a:extLst>
-              <a:ext uri="{FF2B5EF4-FFF2-40B4-BE49-F238E27FC236}">
-                <a16:creationId xmlns:a16="http://schemas.microsoft.com/office/drawing/2014/main" id="{7F5AFCD7-CF64-A7F6-B02F-987454D53E76}"/>
-              </a:ext>
-            </a:extLst>
-          </p:cNvPr>
-          <p:cNvSpPr txBox="1"/>
-          <p:nvPr/>
-        </p:nvSpPr>
-        <p:spPr>
-          <a:xfrm>
-            <a:off x="124051" y="102889"/>
-            <a:ext cx="11607874" cy="646331"/>
-          </a:xfrm>
-          <a:prstGeom prst="rect">
-            <a:avLst/>
-          </a:prstGeom>
-          <a:noFill/>
-        </p:spPr>
-        <p:txBody>
-          <a:bodyPr wrap="square">
-            <a:spAutoFit/>
-          </a:bodyPr>
-          <a:lstStyle/>
-          <a:p>
-            <a:pPr marL="342900" indent="-342900">
-              <a:buFont typeface="+mj-lt"/>
-              <a:buAutoNum type="arabicPeriod" startAt="6"/>
-            </a:pPr>
-            <a:r>
-              <a:rPr lang="en-GB" dirty="0"/>
-              <a:t>Add heat tracing to </a:t>
-            </a:r>
-            <a:r>
-              <a:rPr lang="en-GB" dirty="0" err="1"/>
-              <a:t>PipingNetworkSegment</a:t>
-            </a:r>
-            <a:r>
-              <a:rPr lang="en-GB" dirty="0"/>
-              <a:t> D-20L A- PL-AS200-</a:t>
-            </a:r>
-          </a:p>
-          <a:p>
-            <a:pPr marL="800100" lvl="1" indent="-342900">
-              <a:buFont typeface="Arial" panose="020B0604020202020204" pitchFamily="34" charset="0"/>
-              <a:buChar char="•"/>
-            </a:pPr>
-            <a:r>
-              <a:rPr lang="en-GB" dirty="0"/>
-              <a:t>Modify the heat trace attribute on the segment</a:t>
-            </a:r>
-          </a:p>
-        </p:txBody>
-      </p:sp>
-      <p:graphicFrame>
-        <p:nvGraphicFramePr>
-          <p:cNvPr id="7" name="Table 7">
-            <a:extLst>
-              <a:ext uri="{FF2B5EF4-FFF2-40B4-BE49-F238E27FC236}">
-                <a16:creationId xmlns:a16="http://schemas.microsoft.com/office/drawing/2014/main" id="{122A675D-8A6B-1BF2-70BB-B5522B02FF65}"/>
-              </a:ext>
-            </a:extLst>
-          </p:cNvPr>
-          <p:cNvGraphicFramePr>
-            <a:graphicFrameLocks noGrp="1"/>
-          </p:cNvGraphicFramePr>
-          <p:nvPr/>
-        </p:nvGraphicFramePr>
-        <p:xfrm>
-          <a:off x="307975" y="1191319"/>
-          <a:ext cx="7807325" cy="5257106"/>
-        </p:xfrm>
-        <a:graphic>
-          <a:graphicData uri="http://schemas.openxmlformats.org/drawingml/2006/table">
-            <a:tbl>
-              <a:tblPr firstRow="1" bandRow="1">
-                <a:tableStyleId>{5C22544A-7EE6-4342-B048-85BDC9FD1C3A}</a:tableStyleId>
-              </a:tblPr>
-              <a:tblGrid>
-                <a:gridCol w="7807325">
-                  <a:extLst>
-                    <a:ext uri="{9D8B030D-6E8A-4147-A177-3AD203B41FA5}">
-                      <a16:colId xmlns:a16="http://schemas.microsoft.com/office/drawing/2014/main" val="3422904110"/>
-                    </a:ext>
-                  </a:extLst>
-                </a:gridCol>
-              </a:tblGrid>
-              <a:tr h="5257106">
-                <a:tc>
-                  <a:txBody>
-                    <a:bodyPr/>
-                    <a:lstStyle/>
-                    <a:p>
-                      <a:endParaRPr lang="en-GB" dirty="0"/>
-                    </a:p>
-                  </a:txBody>
-                  <a:tcPr>
-                    <a:lnL w="12700" cap="flat" cmpd="sng" algn="ctr">
-                      <a:solidFill>
-                        <a:schemeClr val="tx1"/>
-                      </a:solidFill>
-                      <a:prstDash val="solid"/>
-                      <a:round/>
-                      <a:headEnd type="none" w="med" len="med"/>
-                      <a:tailEnd type="none" w="med" len="med"/>
-                    </a:lnL>
-                    <a:lnR w="12700" cap="flat" cmpd="sng" algn="ctr">
-                      <a:solidFill>
-                        <a:schemeClr val="tx1"/>
-                      </a:solidFill>
-                      <a:prstDash val="solid"/>
-                      <a:round/>
-                      <a:headEnd type="none" w="med" len="med"/>
-                      <a:tailEnd type="none" w="med" len="med"/>
-                    </a:lnR>
-                    <a:lnT w="12700" cap="flat" cmpd="sng" algn="ctr">
-                      <a:solidFill>
-                        <a:schemeClr val="tx1"/>
-                      </a:solidFill>
-                      <a:prstDash val="solid"/>
-                      <a:round/>
-                      <a:headEnd type="none" w="med" len="med"/>
-                      <a:tailEnd type="none" w="med" len="med"/>
-                    </a:lnT>
-                    <a:lnB w="12700" cap="flat" cmpd="sng" algn="ctr">
-                      <a:solidFill>
-                        <a:schemeClr val="tx1"/>
-                      </a:solidFill>
-                      <a:prstDash val="solid"/>
-                      <a:round/>
-                      <a:headEnd type="none" w="med" len="med"/>
-                      <a:tailEnd type="none" w="med" len="med"/>
-                    </a:lnB>
-                    <a:noFill/>
-                  </a:tcPr>
-                </a:tc>
-                <a:extLst>
-                  <a:ext uri="{0D108BD9-81ED-4DB2-BD59-A6C34878D82A}">
-                    <a16:rowId xmlns:a16="http://schemas.microsoft.com/office/drawing/2014/main" val="1045134656"/>
-                  </a:ext>
-                </a:extLst>
-              </a:tr>
-            </a:tbl>
-          </a:graphicData>
-        </a:graphic>
-      </p:graphicFrame>
-      <p:pic>
-        <p:nvPicPr>
-          <p:cNvPr id="4" name="Picture 3">
-            <a:extLst>
-              <a:ext uri="{FF2B5EF4-FFF2-40B4-BE49-F238E27FC236}">
-                <a16:creationId xmlns:a16="http://schemas.microsoft.com/office/drawing/2014/main" id="{FFB5CC03-97CF-F1D6-6D76-EA790534863B}"/>
-              </a:ext>
-            </a:extLst>
-          </p:cNvPr>
-          <p:cNvPicPr>
-            <a:picLocks noChangeAspect="1"/>
-          </p:cNvPicPr>
-          <p:nvPr/>
-        </p:nvPicPr>
-        <p:blipFill>
-          <a:blip r:embed="rId2"/>
-          <a:stretch>
-            <a:fillRect/>
-          </a:stretch>
-        </p:blipFill>
-        <p:spPr>
-          <a:xfrm>
-            <a:off x="344404" y="1219894"/>
-            <a:ext cx="7694696" cy="4672560"/>
+            <a:off x="612603" y="1627026"/>
+            <a:ext cx="7198067" cy="4385692"/>
           </a:xfrm>
           <a:prstGeom prst="rect">
             <a:avLst/>

--- a/Blueprint/UseCases_PersistenID.pptx
+++ b/Blueprint/UseCases_PersistenID.pptx
@@ -993,7 +993,7 @@
           <a:p>
             <a:fld id="{29BFE5FB-EE99-4E69-B2F7-C156D52DE4BD}" type="datetimeFigureOut">
               <a:rPr lang="en-GB" smtClean="0"/>
-              <a:t>27/10/2025</a:t>
+              <a:t>28/10/2025</a:t>
             </a:fld>
             <a:endParaRPr lang="en-GB"/>
           </a:p>
@@ -1047,7 +1047,7 @@
           <a:p>
             <a:fld id="{3836AF56-0639-4F1D-BCB4-5CA5D280A9DE}" type="slidenum">
               <a:rPr lang="en-GB" smtClean="0"/>
-              <a:t>‹#›</a:t>
+              <a:t>‹Nr.›</a:t>
             </a:fld>
             <a:endParaRPr lang="en-GB"/>
           </a:p>
@@ -1193,7 +1193,7 @@
           <a:p>
             <a:fld id="{29BFE5FB-EE99-4E69-B2F7-C156D52DE4BD}" type="datetimeFigureOut">
               <a:rPr lang="en-GB" smtClean="0"/>
-              <a:t>27/10/2025</a:t>
+              <a:t>28/10/2025</a:t>
             </a:fld>
             <a:endParaRPr lang="en-GB"/>
           </a:p>
@@ -1247,7 +1247,7 @@
           <a:p>
             <a:fld id="{3836AF56-0639-4F1D-BCB4-5CA5D280A9DE}" type="slidenum">
               <a:rPr lang="en-GB" smtClean="0"/>
-              <a:t>‹#›</a:t>
+              <a:t>‹Nr.›</a:t>
             </a:fld>
             <a:endParaRPr lang="en-GB"/>
           </a:p>
@@ -1403,7 +1403,7 @@
           <a:p>
             <a:fld id="{29BFE5FB-EE99-4E69-B2F7-C156D52DE4BD}" type="datetimeFigureOut">
               <a:rPr lang="en-GB" smtClean="0"/>
-              <a:t>27/10/2025</a:t>
+              <a:t>28/10/2025</a:t>
             </a:fld>
             <a:endParaRPr lang="en-GB"/>
           </a:p>
@@ -1457,7 +1457,7 @@
           <a:p>
             <a:fld id="{3836AF56-0639-4F1D-BCB4-5CA5D280A9DE}" type="slidenum">
               <a:rPr lang="en-GB" smtClean="0"/>
-              <a:t>‹#›</a:t>
+              <a:t>‹Nr.›</a:t>
             </a:fld>
             <a:endParaRPr lang="en-GB"/>
           </a:p>
@@ -1603,7 +1603,7 @@
           <a:p>
             <a:fld id="{29BFE5FB-EE99-4E69-B2F7-C156D52DE4BD}" type="datetimeFigureOut">
               <a:rPr lang="en-GB" smtClean="0"/>
-              <a:t>27/10/2025</a:t>
+              <a:t>28/10/2025</a:t>
             </a:fld>
             <a:endParaRPr lang="en-GB"/>
           </a:p>
@@ -1657,7 +1657,7 @@
           <a:p>
             <a:fld id="{3836AF56-0639-4F1D-BCB4-5CA5D280A9DE}" type="slidenum">
               <a:rPr lang="en-GB" smtClean="0"/>
-              <a:t>‹#›</a:t>
+              <a:t>‹Nr.›</a:t>
             </a:fld>
             <a:endParaRPr lang="en-GB"/>
           </a:p>
@@ -1879,7 +1879,7 @@
           <a:p>
             <a:fld id="{29BFE5FB-EE99-4E69-B2F7-C156D52DE4BD}" type="datetimeFigureOut">
               <a:rPr lang="en-GB" smtClean="0"/>
-              <a:t>27/10/2025</a:t>
+              <a:t>28/10/2025</a:t>
             </a:fld>
             <a:endParaRPr lang="en-GB"/>
           </a:p>
@@ -1933,7 +1933,7 @@
           <a:p>
             <a:fld id="{3836AF56-0639-4F1D-BCB4-5CA5D280A9DE}" type="slidenum">
               <a:rPr lang="en-GB" smtClean="0"/>
-              <a:t>‹#›</a:t>
+              <a:t>‹Nr.›</a:t>
             </a:fld>
             <a:endParaRPr lang="en-GB"/>
           </a:p>
@@ -2147,7 +2147,7 @@
           <a:p>
             <a:fld id="{29BFE5FB-EE99-4E69-B2F7-C156D52DE4BD}" type="datetimeFigureOut">
               <a:rPr lang="en-GB" smtClean="0"/>
-              <a:t>27/10/2025</a:t>
+              <a:t>28/10/2025</a:t>
             </a:fld>
             <a:endParaRPr lang="en-GB"/>
           </a:p>
@@ -2201,7 +2201,7 @@
           <a:p>
             <a:fld id="{3836AF56-0639-4F1D-BCB4-5CA5D280A9DE}" type="slidenum">
               <a:rPr lang="en-GB" smtClean="0"/>
-              <a:t>‹#›</a:t>
+              <a:t>‹Nr.›</a:t>
             </a:fld>
             <a:endParaRPr lang="en-GB"/>
           </a:p>
@@ -2562,7 +2562,7 @@
           <a:p>
             <a:fld id="{29BFE5FB-EE99-4E69-B2F7-C156D52DE4BD}" type="datetimeFigureOut">
               <a:rPr lang="en-GB" smtClean="0"/>
-              <a:t>27/10/2025</a:t>
+              <a:t>28/10/2025</a:t>
             </a:fld>
             <a:endParaRPr lang="en-GB"/>
           </a:p>
@@ -2616,7 +2616,7 @@
           <a:p>
             <a:fld id="{3836AF56-0639-4F1D-BCB4-5CA5D280A9DE}" type="slidenum">
               <a:rPr lang="en-GB" smtClean="0"/>
-              <a:t>‹#›</a:t>
+              <a:t>‹Nr.›</a:t>
             </a:fld>
             <a:endParaRPr lang="en-GB"/>
           </a:p>
@@ -2704,7 +2704,7 @@
           <a:p>
             <a:fld id="{29BFE5FB-EE99-4E69-B2F7-C156D52DE4BD}" type="datetimeFigureOut">
               <a:rPr lang="en-GB" smtClean="0"/>
-              <a:t>27/10/2025</a:t>
+              <a:t>28/10/2025</a:t>
             </a:fld>
             <a:endParaRPr lang="en-GB"/>
           </a:p>
@@ -2758,7 +2758,7 @@
           <a:p>
             <a:fld id="{3836AF56-0639-4F1D-BCB4-5CA5D280A9DE}" type="slidenum">
               <a:rPr lang="en-GB" smtClean="0"/>
-              <a:t>‹#›</a:t>
+              <a:t>‹Nr.›</a:t>
             </a:fld>
             <a:endParaRPr lang="en-GB"/>
           </a:p>
@@ -2817,7 +2817,7 @@
           <a:p>
             <a:fld id="{29BFE5FB-EE99-4E69-B2F7-C156D52DE4BD}" type="datetimeFigureOut">
               <a:rPr lang="en-GB" smtClean="0"/>
-              <a:t>27/10/2025</a:t>
+              <a:t>28/10/2025</a:t>
             </a:fld>
             <a:endParaRPr lang="en-GB"/>
           </a:p>
@@ -2871,7 +2871,7 @@
           <a:p>
             <a:fld id="{3836AF56-0639-4F1D-BCB4-5CA5D280A9DE}" type="slidenum">
               <a:rPr lang="en-GB" smtClean="0"/>
-              <a:t>‹#›</a:t>
+              <a:t>‹Nr.›</a:t>
             </a:fld>
             <a:endParaRPr lang="en-GB"/>
           </a:p>
@@ -3130,7 +3130,7 @@
           <a:p>
             <a:fld id="{29BFE5FB-EE99-4E69-B2F7-C156D52DE4BD}" type="datetimeFigureOut">
               <a:rPr lang="en-GB" smtClean="0"/>
-              <a:t>27/10/2025</a:t>
+              <a:t>28/10/2025</a:t>
             </a:fld>
             <a:endParaRPr lang="en-GB"/>
           </a:p>
@@ -3184,7 +3184,7 @@
           <a:p>
             <a:fld id="{3836AF56-0639-4F1D-BCB4-5CA5D280A9DE}" type="slidenum">
               <a:rPr lang="en-GB" smtClean="0"/>
-              <a:t>‹#›</a:t>
+              <a:t>‹Nr.›</a:t>
             </a:fld>
             <a:endParaRPr lang="en-GB"/>
           </a:p>
@@ -3419,7 +3419,7 @@
           <a:p>
             <a:fld id="{29BFE5FB-EE99-4E69-B2F7-C156D52DE4BD}" type="datetimeFigureOut">
               <a:rPr lang="en-GB" smtClean="0"/>
-              <a:t>27/10/2025</a:t>
+              <a:t>28/10/2025</a:t>
             </a:fld>
             <a:endParaRPr lang="en-GB"/>
           </a:p>
@@ -3473,7 +3473,7 @@
           <a:p>
             <a:fld id="{3836AF56-0639-4F1D-BCB4-5CA5D280A9DE}" type="slidenum">
               <a:rPr lang="en-GB" smtClean="0"/>
-              <a:t>‹#›</a:t>
+              <a:t>‹Nr.›</a:t>
             </a:fld>
             <a:endParaRPr lang="en-GB"/>
           </a:p>
@@ -3662,7 +3662,7 @@
           <a:p>
             <a:fld id="{29BFE5FB-EE99-4E69-B2F7-C156D52DE4BD}" type="datetimeFigureOut">
               <a:rPr lang="en-GB" smtClean="0"/>
-              <a:t>27/10/2025</a:t>
+              <a:t>28/10/2025</a:t>
             </a:fld>
             <a:endParaRPr lang="en-GB"/>
           </a:p>
@@ -3752,7 +3752,7 @@
           <a:p>
             <a:fld id="{3836AF56-0639-4F1D-BCB4-5CA5D280A9DE}" type="slidenum">
               <a:rPr lang="en-GB" smtClean="0"/>
-              <a:t>‹#›</a:t>
+              <a:t>‹Nr.›</a:t>
             </a:fld>
             <a:endParaRPr lang="en-GB"/>
           </a:p>
@@ -5213,7 +5213,7 @@
         <p:spPr>
           <a:xfrm>
             <a:off x="8531794" y="1166068"/>
-            <a:ext cx="3416300" cy="3693319"/>
+            <a:ext cx="3416300" cy="4247317"/>
           </a:xfrm>
           <a:prstGeom prst="rect">
             <a:avLst/>
@@ -5260,6 +5260,15 @@
             <a:pPr marL="342900" indent="-342900">
               <a:buAutoNum type="arabicPeriod"/>
             </a:pPr>
+            <a:r>
+              <a:rPr lang="en-GB" dirty="0"/>
+              <a:t>Add ball valve D-VB20-0005</a:t>
+            </a:r>
+          </a:p>
+          <a:p>
+            <a:pPr marL="342900" indent="-342900">
+              <a:buAutoNum type="arabicPeriod"/>
+            </a:pPr>
             <a:endParaRPr lang="en-GB" dirty="0"/>
           </a:p>
           <a:p>
@@ -5273,7 +5282,7 @@
             </a:r>
             <a:r>
               <a:rPr lang="en-GB" dirty="0"/>
-              <a:t> will be created either side of the ball valve that is part of the main line.</a:t>
+              <a:t> will be created either side of the ball valve D-VB20-0002 that is part of the main line.</a:t>
             </a:r>
           </a:p>
         </p:txBody>

--- a/Blueprint/UseCases_PersistenID.pptx
+++ b/Blueprint/UseCases_PersistenID.pptx
@@ -19,6 +19,7 @@
     <p:sldId id="277" r:id="rId13"/>
     <p:sldId id="278" r:id="rId14"/>
     <p:sldId id="280" r:id="rId15"/>
+    <p:sldId id="281" r:id="rId16"/>
   </p:sldIdLst>
   <p:sldSz cx="12192000" cy="6858000"/>
   <p:notesSz cx="6858000" cy="9144000"/>
@@ -993,7 +994,7 @@
           <a:p>
             <a:fld id="{29BFE5FB-EE99-4E69-B2F7-C156D52DE4BD}" type="datetimeFigureOut">
               <a:rPr lang="en-GB" smtClean="0"/>
-              <a:t>28/10/2025</a:t>
+              <a:t>03/11/2025</a:t>
             </a:fld>
             <a:endParaRPr lang="en-GB"/>
           </a:p>
@@ -1047,7 +1048,7 @@
           <a:p>
             <a:fld id="{3836AF56-0639-4F1D-BCB4-5CA5D280A9DE}" type="slidenum">
               <a:rPr lang="en-GB" smtClean="0"/>
-              <a:t>‹Nr.›</a:t>
+              <a:t>‹#›</a:t>
             </a:fld>
             <a:endParaRPr lang="en-GB"/>
           </a:p>
@@ -1193,7 +1194,7 @@
           <a:p>
             <a:fld id="{29BFE5FB-EE99-4E69-B2F7-C156D52DE4BD}" type="datetimeFigureOut">
               <a:rPr lang="en-GB" smtClean="0"/>
-              <a:t>28/10/2025</a:t>
+              <a:t>03/11/2025</a:t>
             </a:fld>
             <a:endParaRPr lang="en-GB"/>
           </a:p>
@@ -1247,7 +1248,7 @@
           <a:p>
             <a:fld id="{3836AF56-0639-4F1D-BCB4-5CA5D280A9DE}" type="slidenum">
               <a:rPr lang="en-GB" smtClean="0"/>
-              <a:t>‹Nr.›</a:t>
+              <a:t>‹#›</a:t>
             </a:fld>
             <a:endParaRPr lang="en-GB"/>
           </a:p>
@@ -1403,7 +1404,7 @@
           <a:p>
             <a:fld id="{29BFE5FB-EE99-4E69-B2F7-C156D52DE4BD}" type="datetimeFigureOut">
               <a:rPr lang="en-GB" smtClean="0"/>
-              <a:t>28/10/2025</a:t>
+              <a:t>03/11/2025</a:t>
             </a:fld>
             <a:endParaRPr lang="en-GB"/>
           </a:p>
@@ -1457,7 +1458,7 @@
           <a:p>
             <a:fld id="{3836AF56-0639-4F1D-BCB4-5CA5D280A9DE}" type="slidenum">
               <a:rPr lang="en-GB" smtClean="0"/>
-              <a:t>‹Nr.›</a:t>
+              <a:t>‹#›</a:t>
             </a:fld>
             <a:endParaRPr lang="en-GB"/>
           </a:p>
@@ -1603,7 +1604,7 @@
           <a:p>
             <a:fld id="{29BFE5FB-EE99-4E69-B2F7-C156D52DE4BD}" type="datetimeFigureOut">
               <a:rPr lang="en-GB" smtClean="0"/>
-              <a:t>28/10/2025</a:t>
+              <a:t>03/11/2025</a:t>
             </a:fld>
             <a:endParaRPr lang="en-GB"/>
           </a:p>
@@ -1657,7 +1658,7 @@
           <a:p>
             <a:fld id="{3836AF56-0639-4F1D-BCB4-5CA5D280A9DE}" type="slidenum">
               <a:rPr lang="en-GB" smtClean="0"/>
-              <a:t>‹Nr.›</a:t>
+              <a:t>‹#›</a:t>
             </a:fld>
             <a:endParaRPr lang="en-GB"/>
           </a:p>
@@ -1879,7 +1880,7 @@
           <a:p>
             <a:fld id="{29BFE5FB-EE99-4E69-B2F7-C156D52DE4BD}" type="datetimeFigureOut">
               <a:rPr lang="en-GB" smtClean="0"/>
-              <a:t>28/10/2025</a:t>
+              <a:t>03/11/2025</a:t>
             </a:fld>
             <a:endParaRPr lang="en-GB"/>
           </a:p>
@@ -1933,7 +1934,7 @@
           <a:p>
             <a:fld id="{3836AF56-0639-4F1D-BCB4-5CA5D280A9DE}" type="slidenum">
               <a:rPr lang="en-GB" smtClean="0"/>
-              <a:t>‹Nr.›</a:t>
+              <a:t>‹#›</a:t>
             </a:fld>
             <a:endParaRPr lang="en-GB"/>
           </a:p>
@@ -2147,7 +2148,7 @@
           <a:p>
             <a:fld id="{29BFE5FB-EE99-4E69-B2F7-C156D52DE4BD}" type="datetimeFigureOut">
               <a:rPr lang="en-GB" smtClean="0"/>
-              <a:t>28/10/2025</a:t>
+              <a:t>03/11/2025</a:t>
             </a:fld>
             <a:endParaRPr lang="en-GB"/>
           </a:p>
@@ -2201,7 +2202,7 @@
           <a:p>
             <a:fld id="{3836AF56-0639-4F1D-BCB4-5CA5D280A9DE}" type="slidenum">
               <a:rPr lang="en-GB" smtClean="0"/>
-              <a:t>‹Nr.›</a:t>
+              <a:t>‹#›</a:t>
             </a:fld>
             <a:endParaRPr lang="en-GB"/>
           </a:p>
@@ -2562,7 +2563,7 @@
           <a:p>
             <a:fld id="{29BFE5FB-EE99-4E69-B2F7-C156D52DE4BD}" type="datetimeFigureOut">
               <a:rPr lang="en-GB" smtClean="0"/>
-              <a:t>28/10/2025</a:t>
+              <a:t>03/11/2025</a:t>
             </a:fld>
             <a:endParaRPr lang="en-GB"/>
           </a:p>
@@ -2616,7 +2617,7 @@
           <a:p>
             <a:fld id="{3836AF56-0639-4F1D-BCB4-5CA5D280A9DE}" type="slidenum">
               <a:rPr lang="en-GB" smtClean="0"/>
-              <a:t>‹Nr.›</a:t>
+              <a:t>‹#›</a:t>
             </a:fld>
             <a:endParaRPr lang="en-GB"/>
           </a:p>
@@ -2704,7 +2705,7 @@
           <a:p>
             <a:fld id="{29BFE5FB-EE99-4E69-B2F7-C156D52DE4BD}" type="datetimeFigureOut">
               <a:rPr lang="en-GB" smtClean="0"/>
-              <a:t>28/10/2025</a:t>
+              <a:t>03/11/2025</a:t>
             </a:fld>
             <a:endParaRPr lang="en-GB"/>
           </a:p>
@@ -2758,7 +2759,7 @@
           <a:p>
             <a:fld id="{3836AF56-0639-4F1D-BCB4-5CA5D280A9DE}" type="slidenum">
               <a:rPr lang="en-GB" smtClean="0"/>
-              <a:t>‹Nr.›</a:t>
+              <a:t>‹#›</a:t>
             </a:fld>
             <a:endParaRPr lang="en-GB"/>
           </a:p>
@@ -2817,7 +2818,7 @@
           <a:p>
             <a:fld id="{29BFE5FB-EE99-4E69-B2F7-C156D52DE4BD}" type="datetimeFigureOut">
               <a:rPr lang="en-GB" smtClean="0"/>
-              <a:t>28/10/2025</a:t>
+              <a:t>03/11/2025</a:t>
             </a:fld>
             <a:endParaRPr lang="en-GB"/>
           </a:p>
@@ -2871,7 +2872,7 @@
           <a:p>
             <a:fld id="{3836AF56-0639-4F1D-BCB4-5CA5D280A9DE}" type="slidenum">
               <a:rPr lang="en-GB" smtClean="0"/>
-              <a:t>‹Nr.›</a:t>
+              <a:t>‹#›</a:t>
             </a:fld>
             <a:endParaRPr lang="en-GB"/>
           </a:p>
@@ -3130,7 +3131,7 @@
           <a:p>
             <a:fld id="{29BFE5FB-EE99-4E69-B2F7-C156D52DE4BD}" type="datetimeFigureOut">
               <a:rPr lang="en-GB" smtClean="0"/>
-              <a:t>28/10/2025</a:t>
+              <a:t>03/11/2025</a:t>
             </a:fld>
             <a:endParaRPr lang="en-GB"/>
           </a:p>
@@ -3184,7 +3185,7 @@
           <a:p>
             <a:fld id="{3836AF56-0639-4F1D-BCB4-5CA5D280A9DE}" type="slidenum">
               <a:rPr lang="en-GB" smtClean="0"/>
-              <a:t>‹Nr.›</a:t>
+              <a:t>‹#›</a:t>
             </a:fld>
             <a:endParaRPr lang="en-GB"/>
           </a:p>
@@ -3419,7 +3420,7 @@
           <a:p>
             <a:fld id="{29BFE5FB-EE99-4E69-B2F7-C156D52DE4BD}" type="datetimeFigureOut">
               <a:rPr lang="en-GB" smtClean="0"/>
-              <a:t>28/10/2025</a:t>
+              <a:t>03/11/2025</a:t>
             </a:fld>
             <a:endParaRPr lang="en-GB"/>
           </a:p>
@@ -3473,7 +3474,7 @@
           <a:p>
             <a:fld id="{3836AF56-0639-4F1D-BCB4-5CA5D280A9DE}" type="slidenum">
               <a:rPr lang="en-GB" smtClean="0"/>
-              <a:t>‹Nr.›</a:t>
+              <a:t>‹#›</a:t>
             </a:fld>
             <a:endParaRPr lang="en-GB"/>
           </a:p>
@@ -3662,7 +3663,7 @@
           <a:p>
             <a:fld id="{29BFE5FB-EE99-4E69-B2F7-C156D52DE4BD}" type="datetimeFigureOut">
               <a:rPr lang="en-GB" smtClean="0"/>
-              <a:t>28/10/2025</a:t>
+              <a:t>03/11/2025</a:t>
             </a:fld>
             <a:endParaRPr lang="en-GB"/>
           </a:p>
@@ -3752,7 +3753,7 @@
           <a:p>
             <a:fld id="{3836AF56-0639-4F1D-BCB4-5CA5D280A9DE}" type="slidenum">
               <a:rPr lang="en-GB" smtClean="0"/>
-              <a:t>‹Nr.›</a:t>
+              <a:t>‹#›</a:t>
             </a:fld>
             <a:endParaRPr lang="en-GB"/>
           </a:p>
@@ -4586,10 +4587,10 @@
       </p:graphicFrame>
       <p:pic>
         <p:nvPicPr>
-          <p:cNvPr id="4" name="Picture 3">
-            <a:extLst>
-              <a:ext uri="{FF2B5EF4-FFF2-40B4-BE49-F238E27FC236}">
-                <a16:creationId xmlns:a16="http://schemas.microsoft.com/office/drawing/2014/main" id="{FD7D1225-BCA1-2AC5-2A06-C98E6B8D9B60}"/>
+          <p:cNvPr id="5" name="Picture 4">
+            <a:extLst>
+              <a:ext uri="{FF2B5EF4-FFF2-40B4-BE49-F238E27FC236}">
+                <a16:creationId xmlns:a16="http://schemas.microsoft.com/office/drawing/2014/main" id="{4301A0F3-0A9A-311E-1E56-1F57DBE1EAD7}"/>
               </a:ext>
             </a:extLst>
           </p:cNvPr>
@@ -4606,8 +4607,8 @@
         </p:blipFill>
         <p:spPr>
           <a:xfrm>
-            <a:off x="480290" y="1477819"/>
-            <a:ext cx="7379856" cy="4515501"/>
+            <a:off x="517687" y="1638299"/>
+            <a:ext cx="7236952" cy="4400551"/>
           </a:xfrm>
           <a:prstGeom prst="rect">
             <a:avLst/>
@@ -4897,10 +4898,10 @@
       </p:sp>
       <p:pic>
         <p:nvPicPr>
-          <p:cNvPr id="9" name="Picture 8">
-            <a:extLst>
-              <a:ext uri="{FF2B5EF4-FFF2-40B4-BE49-F238E27FC236}">
-                <a16:creationId xmlns:a16="http://schemas.microsoft.com/office/drawing/2014/main" id="{397B3461-35E2-F637-C89E-3414CE436E22}"/>
+          <p:cNvPr id="4" name="Picture 3">
+            <a:extLst>
+              <a:ext uri="{FF2B5EF4-FFF2-40B4-BE49-F238E27FC236}">
+                <a16:creationId xmlns:a16="http://schemas.microsoft.com/office/drawing/2014/main" id="{2D7F2DE7-0A80-6AB8-F8EB-8A2D7AFB16D4}"/>
               </a:ext>
             </a:extLst>
           </p:cNvPr>
@@ -4917,8 +4918,8 @@
         </p:blipFill>
         <p:spPr>
           <a:xfrm>
-            <a:off x="512186" y="1594397"/>
-            <a:ext cx="7393752" cy="4510840"/>
+            <a:off x="380605" y="1614062"/>
+            <a:ext cx="7662063" cy="4662913"/>
           </a:xfrm>
           <a:prstGeom prst="rect">
             <a:avLst/>
@@ -5088,10 +5089,10 @@
       </p:sp>
       <p:pic>
         <p:nvPicPr>
-          <p:cNvPr id="4" name="Picture 3">
-            <a:extLst>
-              <a:ext uri="{FF2B5EF4-FFF2-40B4-BE49-F238E27FC236}">
-                <a16:creationId xmlns:a16="http://schemas.microsoft.com/office/drawing/2014/main" id="{C71FC7E4-E028-6D46-1C9C-D63E880B7539}"/>
+          <p:cNvPr id="6" name="Picture 5">
+            <a:extLst>
+              <a:ext uri="{FF2B5EF4-FFF2-40B4-BE49-F238E27FC236}">
+                <a16:creationId xmlns:a16="http://schemas.microsoft.com/office/drawing/2014/main" id="{6AD5D568-F1A9-14EB-EB3C-E35C2D1D65D2}"/>
               </a:ext>
             </a:extLst>
           </p:cNvPr>
@@ -5108,8 +5109,8 @@
         </p:blipFill>
         <p:spPr>
           <a:xfrm>
-            <a:off x="428310" y="1699491"/>
-            <a:ext cx="7566654" cy="4608945"/>
+            <a:off x="643284" y="1650340"/>
+            <a:ext cx="7136705" cy="4339063"/>
           </a:xfrm>
           <a:prstGeom prst="rect">
             <a:avLst/>
@@ -5293,6 +5294,266 @@
             <a:extLst>
               <a:ext uri="{FF2B5EF4-FFF2-40B4-BE49-F238E27FC236}">
                 <a16:creationId xmlns:a16="http://schemas.microsoft.com/office/drawing/2014/main" id="{A1A5B0BE-F4C9-85E5-4213-CEF3F77E0FF4}"/>
+              </a:ext>
+            </a:extLst>
+          </p:cNvPr>
+          <p:cNvGraphicFramePr>
+            <a:graphicFrameLocks noGrp="1"/>
+          </p:cNvGraphicFramePr>
+          <p:nvPr/>
+        </p:nvGraphicFramePr>
+        <p:xfrm>
+          <a:off x="307975" y="1191319"/>
+          <a:ext cx="7807325" cy="5257106"/>
+        </p:xfrm>
+        <a:graphic>
+          <a:graphicData uri="http://schemas.openxmlformats.org/drawingml/2006/table">
+            <a:tbl>
+              <a:tblPr firstRow="1" bandRow="1">
+                <a:tableStyleId>{5C22544A-7EE6-4342-B048-85BDC9FD1C3A}</a:tableStyleId>
+              </a:tblPr>
+              <a:tblGrid>
+                <a:gridCol w="7807325">
+                  <a:extLst>
+                    <a:ext uri="{9D8B030D-6E8A-4147-A177-3AD203B41FA5}">
+                      <a16:colId xmlns:a16="http://schemas.microsoft.com/office/drawing/2014/main" val="3422904110"/>
+                    </a:ext>
+                  </a:extLst>
+                </a:gridCol>
+              </a:tblGrid>
+              <a:tr h="5257106">
+                <a:tc>
+                  <a:txBody>
+                    <a:bodyPr/>
+                    <a:lstStyle/>
+                    <a:p>
+                      <a:endParaRPr lang="en-GB" dirty="0"/>
+                    </a:p>
+                  </a:txBody>
+                  <a:tcPr>
+                    <a:lnL w="12700" cap="flat" cmpd="sng" algn="ctr">
+                      <a:solidFill>
+                        <a:schemeClr val="tx1"/>
+                      </a:solidFill>
+                      <a:prstDash val="solid"/>
+                      <a:round/>
+                      <a:headEnd type="none" w="med" len="med"/>
+                      <a:tailEnd type="none" w="med" len="med"/>
+                    </a:lnL>
+                    <a:lnR w="12700" cap="flat" cmpd="sng" algn="ctr">
+                      <a:solidFill>
+                        <a:schemeClr val="tx1"/>
+                      </a:solidFill>
+                      <a:prstDash val="solid"/>
+                      <a:round/>
+                      <a:headEnd type="none" w="med" len="med"/>
+                      <a:tailEnd type="none" w="med" len="med"/>
+                    </a:lnR>
+                    <a:lnT w="12700" cap="flat" cmpd="sng" algn="ctr">
+                      <a:solidFill>
+                        <a:schemeClr val="tx1"/>
+                      </a:solidFill>
+                      <a:prstDash val="solid"/>
+                      <a:round/>
+                      <a:headEnd type="none" w="med" len="med"/>
+                      <a:tailEnd type="none" w="med" len="med"/>
+                    </a:lnT>
+                    <a:lnB w="12700" cap="flat" cmpd="sng" algn="ctr">
+                      <a:solidFill>
+                        <a:schemeClr val="tx1"/>
+                      </a:solidFill>
+                      <a:prstDash val="solid"/>
+                      <a:round/>
+                      <a:headEnd type="none" w="med" len="med"/>
+                      <a:tailEnd type="none" w="med" len="med"/>
+                    </a:lnB>
+                    <a:noFill/>
+                  </a:tcPr>
+                </a:tc>
+                <a:extLst>
+                  <a:ext uri="{0D108BD9-81ED-4DB2-BD59-A6C34878D82A}">
+                    <a16:rowId xmlns:a16="http://schemas.microsoft.com/office/drawing/2014/main" val="1045134656"/>
+                  </a:ext>
+                </a:extLst>
+              </a:tr>
+            </a:tbl>
+          </a:graphicData>
+        </a:graphic>
+      </p:graphicFrame>
+      <p:pic>
+        <p:nvPicPr>
+          <p:cNvPr id="4" name="Picture 3">
+            <a:extLst>
+              <a:ext uri="{FF2B5EF4-FFF2-40B4-BE49-F238E27FC236}">
+                <a16:creationId xmlns:a16="http://schemas.microsoft.com/office/drawing/2014/main" id="{59F657A0-FC75-88D0-B3CF-984D26CF0D54}"/>
+              </a:ext>
+            </a:extLst>
+          </p:cNvPr>
+          <p:cNvPicPr>
+            <a:picLocks noChangeAspect="1"/>
+          </p:cNvPicPr>
+          <p:nvPr/>
+        </p:nvPicPr>
+        <p:blipFill>
+          <a:blip r:embed="rId2"/>
+          <a:stretch>
+            <a:fillRect/>
+          </a:stretch>
+        </p:blipFill>
+        <p:spPr>
+          <a:xfrm>
+            <a:off x="478482" y="1433646"/>
+            <a:ext cx="7414770" cy="4519479"/>
+          </a:xfrm>
+          <a:prstGeom prst="rect">
+            <a:avLst/>
+          </a:prstGeom>
+        </p:spPr>
+      </p:pic>
+    </p:spTree>
+    <p:extLst>
+      <p:ext uri="{BB962C8B-B14F-4D97-AF65-F5344CB8AC3E}">
+        <p14:creationId xmlns:p14="http://schemas.microsoft.com/office/powerpoint/2010/main" val="538655942"/>
+      </p:ext>
+    </p:extLst>
+  </p:cSld>
+  <p:clrMapOvr>
+    <a:masterClrMapping/>
+  </p:clrMapOvr>
+</p:sld>
+</file>
+
+<file path=ppt/slides/slide14.xml><?xml version="1.0" encoding="utf-8"?>
+<p:sld xmlns:a="http://schemas.openxmlformats.org/drawingml/2006/main" xmlns:r="http://schemas.openxmlformats.org/officeDocument/2006/relationships" xmlns:p="http://schemas.openxmlformats.org/presentationml/2006/main">
+  <p:cSld>
+    <p:spTree>
+      <p:nvGrpSpPr>
+        <p:cNvPr id="1" name="">
+          <a:extLst>
+            <a:ext uri="{FF2B5EF4-FFF2-40B4-BE49-F238E27FC236}">
+              <a16:creationId xmlns:a16="http://schemas.microsoft.com/office/drawing/2014/main" id="{953554C3-04F3-F7CF-E541-8935FC269E25}"/>
+            </a:ext>
+          </a:extLst>
+        </p:cNvPr>
+        <p:cNvGrpSpPr/>
+        <p:nvPr/>
+      </p:nvGrpSpPr>
+      <p:grpSpPr>
+        <a:xfrm>
+          <a:off x="0" y="0"/>
+          <a:ext cx="0" cy="0"/>
+          <a:chOff x="0" y="0"/>
+          <a:chExt cx="0" cy="0"/>
+        </a:xfrm>
+      </p:grpSpPr>
+      <p:sp>
+        <p:nvSpPr>
+          <p:cNvPr id="3" name="TextBox 2">
+            <a:extLst>
+              <a:ext uri="{FF2B5EF4-FFF2-40B4-BE49-F238E27FC236}">
+                <a16:creationId xmlns:a16="http://schemas.microsoft.com/office/drawing/2014/main" id="{C4F6CF00-620E-D538-3340-A82F881C25A3}"/>
+              </a:ext>
+            </a:extLst>
+          </p:cNvPr>
+          <p:cNvSpPr txBox="1"/>
+          <p:nvPr/>
+        </p:nvSpPr>
+        <p:spPr>
+          <a:xfrm>
+            <a:off x="124051" y="102889"/>
+            <a:ext cx="11607874" cy="369332"/>
+          </a:xfrm>
+          <a:prstGeom prst="rect">
+            <a:avLst/>
+          </a:prstGeom>
+          <a:noFill/>
+        </p:spPr>
+        <p:txBody>
+          <a:bodyPr wrap="square">
+            <a:spAutoFit/>
+          </a:bodyPr>
+          <a:lstStyle/>
+          <a:p>
+            <a:pPr marL="342900" indent="-342900">
+              <a:buFont typeface="+mj-lt"/>
+              <a:buAutoNum type="arabicPeriod" startAt="11"/>
+            </a:pPr>
+            <a:r>
+              <a:rPr lang="en-GB" dirty="0"/>
+              <a:t>Add driver for pump. Add </a:t>
+            </a:r>
+            <a:r>
+              <a:rPr lang="en-GB" dirty="0" err="1"/>
+              <a:t>VortexBreaker</a:t>
+            </a:r>
+            <a:r>
+              <a:rPr lang="en-GB" dirty="0"/>
+              <a:t> internal.</a:t>
+            </a:r>
+          </a:p>
+        </p:txBody>
+      </p:sp>
+      <p:sp>
+        <p:nvSpPr>
+          <p:cNvPr id="6" name="TextBox 5">
+            <a:extLst>
+              <a:ext uri="{FF2B5EF4-FFF2-40B4-BE49-F238E27FC236}">
+                <a16:creationId xmlns:a16="http://schemas.microsoft.com/office/drawing/2014/main" id="{B86BB71F-A940-4152-3C48-BC9CCCE2DC8E}"/>
+              </a:ext>
+            </a:extLst>
+          </p:cNvPr>
+          <p:cNvSpPr txBox="1"/>
+          <p:nvPr/>
+        </p:nvSpPr>
+        <p:spPr>
+          <a:xfrm>
+            <a:off x="8531794" y="1166068"/>
+            <a:ext cx="3416300" cy="646331"/>
+          </a:xfrm>
+          <a:prstGeom prst="rect">
+            <a:avLst/>
+          </a:prstGeom>
+          <a:noFill/>
+        </p:spPr>
+        <p:txBody>
+          <a:bodyPr wrap="square" rtlCol="0">
+            <a:spAutoFit/>
+          </a:bodyPr>
+          <a:lstStyle/>
+          <a:p>
+            <a:pPr marL="342900" indent="-342900">
+              <a:buAutoNum type="arabicPeriod"/>
+            </a:pPr>
+            <a:r>
+              <a:rPr lang="en-GB" dirty="0"/>
+              <a:t>Add pump driver.</a:t>
+            </a:r>
+          </a:p>
+          <a:p>
+            <a:pPr marL="342900" indent="-342900">
+              <a:buAutoNum type="arabicPeriod"/>
+            </a:pPr>
+            <a:r>
+              <a:rPr lang="en-GB" dirty="0"/>
+              <a:t>Add </a:t>
+            </a:r>
+            <a:r>
+              <a:rPr lang="en-GB" dirty="0" err="1"/>
+              <a:t>VortexBreaker</a:t>
+            </a:r>
+            <a:r>
+              <a:rPr lang="en-GB" dirty="0"/>
+              <a:t> internal</a:t>
+            </a:r>
+          </a:p>
+        </p:txBody>
+      </p:sp>
+      <p:graphicFrame>
+        <p:nvGraphicFramePr>
+          <p:cNvPr id="2" name="Table 7">
+            <a:extLst>
+              <a:ext uri="{FF2B5EF4-FFF2-40B4-BE49-F238E27FC236}">
+                <a16:creationId xmlns:a16="http://schemas.microsoft.com/office/drawing/2014/main" id="{0D3CBF11-4068-A41D-648F-70EF02009053}"/>
               </a:ext>
             </a:extLst>
           </p:cNvPr>
@@ -5384,7 +5645,7 @@
           <p:cNvPr id="9" name="Picture 8">
             <a:extLst>
               <a:ext uri="{FF2B5EF4-FFF2-40B4-BE49-F238E27FC236}">
-                <a16:creationId xmlns:a16="http://schemas.microsoft.com/office/drawing/2014/main" id="{8340A83E-9B70-5525-6729-E6417D9E2FAC}"/>
+                <a16:creationId xmlns:a16="http://schemas.microsoft.com/office/drawing/2014/main" id="{2C6B2ED1-9A9E-CB4C-DC54-80D99776C5F4}"/>
               </a:ext>
             </a:extLst>
           </p:cNvPr>
@@ -5401,8 +5662,8 @@
         </p:blipFill>
         <p:spPr>
           <a:xfrm>
-            <a:off x="509236" y="1750900"/>
-            <a:ext cx="7404802" cy="4502119"/>
+            <a:off x="628216" y="1660019"/>
+            <a:ext cx="7187497" cy="4384373"/>
           </a:xfrm>
           <a:prstGeom prst="rect">
             <a:avLst/>
@@ -5412,7 +5673,7 @@
     </p:spTree>
     <p:extLst>
       <p:ext uri="{BB962C8B-B14F-4D97-AF65-F5344CB8AC3E}">
-        <p14:creationId xmlns:p14="http://schemas.microsoft.com/office/powerpoint/2010/main" val="538655942"/>
+        <p14:creationId xmlns:p14="http://schemas.microsoft.com/office/powerpoint/2010/main" val="720805857"/>
       </p:ext>
     </p:extLst>
   </p:cSld>
@@ -5422,7 +5683,7 @@
 </p:sld>
 </file>
 
-<file path=ppt/slides/slide14.xml><?xml version="1.0" encoding="utf-8"?>
+<file path=ppt/slides/slide15.xml><?xml version="1.0" encoding="utf-8"?>
 <p:sld xmlns:a="http://schemas.openxmlformats.org/drawingml/2006/main" xmlns:r="http://schemas.openxmlformats.org/officeDocument/2006/relationships" xmlns:p="http://schemas.openxmlformats.org/presentationml/2006/main">
   <p:cSld>
     <p:spTree>
@@ -5430,7 +5691,7 @@
         <p:cNvPr id="1" name="">
           <a:extLst>
             <a:ext uri="{FF2B5EF4-FFF2-40B4-BE49-F238E27FC236}">
-              <a16:creationId xmlns:a16="http://schemas.microsoft.com/office/drawing/2014/main" id="{953554C3-04F3-F7CF-E541-8935FC269E25}"/>
+              <a16:creationId xmlns:a16="http://schemas.microsoft.com/office/drawing/2014/main" id="{79EFBF20-FC29-A74C-A9B4-7D412B11C1F4}"/>
             </a:ext>
           </a:extLst>
         </p:cNvPr>
@@ -5450,7 +5711,7 @@
           <p:cNvPr id="3" name="TextBox 2">
             <a:extLst>
               <a:ext uri="{FF2B5EF4-FFF2-40B4-BE49-F238E27FC236}">
-                <a16:creationId xmlns:a16="http://schemas.microsoft.com/office/drawing/2014/main" id="{C4F6CF00-620E-D538-3340-A82F881C25A3}"/>
+                <a16:creationId xmlns:a16="http://schemas.microsoft.com/office/drawing/2014/main" id="{C4F2C000-E825-A2F7-701F-D0FD61D62923}"/>
               </a:ext>
             </a:extLst>
           </p:cNvPr>
@@ -5475,19 +5736,11 @@
           <a:p>
             <a:pPr marL="342900" indent="-342900">
               <a:buFont typeface="+mj-lt"/>
-              <a:buAutoNum type="arabicPeriod" startAt="11"/>
+              <a:buAutoNum type="arabicPeriod" startAt="12"/>
             </a:pPr>
             <a:r>
               <a:rPr lang="en-GB" dirty="0"/>
-              <a:t>Add driver for pump. Add </a:t>
-            </a:r>
-            <a:r>
-              <a:rPr lang="en-GB" dirty="0" err="1"/>
-              <a:t>VortexBreaker</a:t>
-            </a:r>
-            <a:r>
-              <a:rPr lang="en-GB" dirty="0"/>
-              <a:t> internal.</a:t>
+              <a:t>Mount-on &amp; Off-Page Signal</a:t>
             </a:r>
           </a:p>
         </p:txBody>
@@ -5497,7 +5750,7 @@
           <p:cNvPr id="6" name="TextBox 5">
             <a:extLst>
               <a:ext uri="{FF2B5EF4-FFF2-40B4-BE49-F238E27FC236}">
-                <a16:creationId xmlns:a16="http://schemas.microsoft.com/office/drawing/2014/main" id="{B86BB71F-A940-4152-3C48-BC9CCCE2DC8E}"/>
+                <a16:creationId xmlns:a16="http://schemas.microsoft.com/office/drawing/2014/main" id="{788CE263-7A33-C7FA-82AA-264233426691}"/>
               </a:ext>
             </a:extLst>
           </p:cNvPr>
@@ -5507,7 +5760,7 @@
         <p:spPr>
           <a:xfrm>
             <a:off x="8531794" y="1166068"/>
-            <a:ext cx="3416300" cy="646331"/>
+            <a:ext cx="3416300" cy="923330"/>
           </a:xfrm>
           <a:prstGeom prst="rect">
             <a:avLst/>
@@ -5525,7 +5778,17 @@
             </a:pPr>
             <a:r>
               <a:rPr lang="en-GB" dirty="0"/>
-              <a:t>Add pump driver.</a:t>
+              <a:t>Add Mount-on level element</a:t>
+            </a:r>
+          </a:p>
+          <a:p>
+            <a:pPr marL="800100" lvl="1" indent="-342900">
+              <a:buFont typeface="Arial" panose="020B0604020202020204" pitchFamily="34" charset="0"/>
+              <a:buChar char="•"/>
+            </a:pPr>
+            <a:r>
+              <a:rPr lang="en-GB" dirty="0"/>
+              <a:t>Remove N04 </a:t>
             </a:r>
           </a:p>
           <a:p>
@@ -5534,15 +5797,7 @@
             </a:pPr>
             <a:r>
               <a:rPr lang="en-GB" dirty="0"/>
-              <a:t>Add </a:t>
-            </a:r>
-            <a:r>
-              <a:rPr lang="en-GB" dirty="0" err="1"/>
-              <a:t>VortexBreaker</a:t>
-            </a:r>
-            <a:r>
-              <a:rPr lang="en-GB" dirty="0"/>
-              <a:t> internal</a:t>
+              <a:t>Add signal line off page</a:t>
             </a:r>
           </a:p>
         </p:txBody>
@@ -5552,7 +5807,7 @@
           <p:cNvPr id="2" name="Table 7">
             <a:extLst>
               <a:ext uri="{FF2B5EF4-FFF2-40B4-BE49-F238E27FC236}">
-                <a16:creationId xmlns:a16="http://schemas.microsoft.com/office/drawing/2014/main" id="{0D3CBF11-4068-A41D-648F-70EF02009053}"/>
+                <a16:creationId xmlns:a16="http://schemas.microsoft.com/office/drawing/2014/main" id="{0BE302E4-0D46-4C6E-FC81-381B55C9BC8F}"/>
               </a:ext>
             </a:extLst>
           </p:cNvPr>
@@ -5641,10 +5896,10 @@
       </p:graphicFrame>
       <p:pic>
         <p:nvPicPr>
-          <p:cNvPr id="5" name="Picture 4">
-            <a:extLst>
-              <a:ext uri="{FF2B5EF4-FFF2-40B4-BE49-F238E27FC236}">
-                <a16:creationId xmlns:a16="http://schemas.microsoft.com/office/drawing/2014/main" id="{7E487E50-16FB-CDA1-43F4-CB847C6D7BC7}"/>
+          <p:cNvPr id="9" name="Picture 8">
+            <a:extLst>
+              <a:ext uri="{FF2B5EF4-FFF2-40B4-BE49-F238E27FC236}">
+                <a16:creationId xmlns:a16="http://schemas.microsoft.com/office/drawing/2014/main" id="{ECBA5D5F-8F1F-AE29-B7E6-CCA012FAE2CC}"/>
               </a:ext>
             </a:extLst>
           </p:cNvPr>
@@ -5661,8 +5916,8 @@
         </p:blipFill>
         <p:spPr>
           <a:xfrm>
-            <a:off x="452528" y="1553776"/>
-            <a:ext cx="7420852" cy="4523751"/>
+            <a:off x="387509" y="1490321"/>
+            <a:ext cx="7648255" cy="4659101"/>
           </a:xfrm>
           <a:prstGeom prst="rect">
             <a:avLst/>
@@ -5672,7 +5927,7 @@
     </p:spTree>
     <p:extLst>
       <p:ext uri="{BB962C8B-B14F-4D97-AF65-F5344CB8AC3E}">
-        <p14:creationId xmlns:p14="http://schemas.microsoft.com/office/powerpoint/2010/main" val="720805857"/>
+        <p14:creationId xmlns:p14="http://schemas.microsoft.com/office/powerpoint/2010/main" val="2221858855"/>
       </p:ext>
     </p:extLst>
   </p:cSld>
@@ -5720,7 +5975,7 @@
         <p:spPr>
           <a:xfrm>
             <a:off x="419100" y="740122"/>
-            <a:ext cx="11216639" cy="1200329"/>
+            <a:ext cx="11216639" cy="1754326"/>
           </a:xfrm>
           <a:prstGeom prst="rect">
             <a:avLst/>
@@ -5749,6 +6004,23 @@
               <a:rPr lang="en-GB" dirty="0"/>
               <a:t> internal.</a:t>
             </a:r>
+          </a:p>
+          <a:p>
+            <a:pPr marL="342900" indent="-342900">
+              <a:buFont typeface="+mj-lt"/>
+              <a:buAutoNum type="arabicPeriod" startAt="11"/>
+            </a:pPr>
+            <a:r>
+              <a:rPr lang="en-GB" dirty="0"/>
+              <a:t>Add Mount-on level element (Remove N04) &amp; Add signal line off page</a:t>
+            </a:r>
+          </a:p>
+          <a:p>
+            <a:pPr marL="342900" indent="-342900">
+              <a:buFont typeface="+mj-lt"/>
+              <a:buAutoNum type="arabicPeriod" startAt="11"/>
+            </a:pPr>
+            <a:endParaRPr lang="en-GB" dirty="0"/>
           </a:p>
           <a:p>
             <a:pPr marL="342900" indent="-342900">
@@ -6080,10 +6352,10 @@
       </p:graphicFrame>
       <p:pic>
         <p:nvPicPr>
-          <p:cNvPr id="5" name="Picture 4">
-            <a:extLst>
-              <a:ext uri="{FF2B5EF4-FFF2-40B4-BE49-F238E27FC236}">
-                <a16:creationId xmlns:a16="http://schemas.microsoft.com/office/drawing/2014/main" id="{153CFC7E-D035-06F0-A449-BE9B48114C13}"/>
+          <p:cNvPr id="8" name="Picture 7">
+            <a:extLst>
+              <a:ext uri="{FF2B5EF4-FFF2-40B4-BE49-F238E27FC236}">
+                <a16:creationId xmlns:a16="http://schemas.microsoft.com/office/drawing/2014/main" id="{1ED705C4-5DF1-3C4A-D6F7-4893B654A217}"/>
               </a:ext>
             </a:extLst>
           </p:cNvPr>
@@ -6100,8 +6372,8 @@
         </p:blipFill>
         <p:spPr>
           <a:xfrm>
-            <a:off x="397693" y="1487604"/>
-            <a:ext cx="7627888" cy="4664536"/>
+            <a:off x="792528" y="1792490"/>
+            <a:ext cx="6654881" cy="4054764"/>
           </a:xfrm>
           <a:prstGeom prst="rect">
             <a:avLst/>
@@ -6189,6 +6461,615 @@
             <a:r>
               <a:rPr lang="en-GB" dirty="0"/>
               <a:t> by placing a piping tee between the ESV0006 actuated valve and the FE0001 element and include an unnamed valve.</a:t>
+            </a:r>
+          </a:p>
+        </p:txBody>
+      </p:sp>
+      <p:graphicFrame>
+        <p:nvGraphicFramePr>
+          <p:cNvPr id="7" name="Table 7">
+            <a:extLst>
+              <a:ext uri="{FF2B5EF4-FFF2-40B4-BE49-F238E27FC236}">
+                <a16:creationId xmlns:a16="http://schemas.microsoft.com/office/drawing/2014/main" id="{122A675D-8A6B-1BF2-70BB-B5522B02FF65}"/>
+              </a:ext>
+            </a:extLst>
+          </p:cNvPr>
+          <p:cNvGraphicFramePr>
+            <a:graphicFrameLocks noGrp="1"/>
+          </p:cNvGraphicFramePr>
+          <p:nvPr/>
+        </p:nvGraphicFramePr>
+        <p:xfrm>
+          <a:off x="307975" y="1191319"/>
+          <a:ext cx="7807325" cy="5257106"/>
+        </p:xfrm>
+        <a:graphic>
+          <a:graphicData uri="http://schemas.openxmlformats.org/drawingml/2006/table">
+            <a:tbl>
+              <a:tblPr firstRow="1" bandRow="1">
+                <a:tableStyleId>{5C22544A-7EE6-4342-B048-85BDC9FD1C3A}</a:tableStyleId>
+              </a:tblPr>
+              <a:tblGrid>
+                <a:gridCol w="7807325">
+                  <a:extLst>
+                    <a:ext uri="{9D8B030D-6E8A-4147-A177-3AD203B41FA5}">
+                      <a16:colId xmlns:a16="http://schemas.microsoft.com/office/drawing/2014/main" val="3422904110"/>
+                    </a:ext>
+                  </a:extLst>
+                </a:gridCol>
+              </a:tblGrid>
+              <a:tr h="5257106">
+                <a:tc>
+                  <a:txBody>
+                    <a:bodyPr/>
+                    <a:lstStyle/>
+                    <a:p>
+                      <a:endParaRPr lang="en-GB" dirty="0"/>
+                    </a:p>
+                  </a:txBody>
+                  <a:tcPr>
+                    <a:lnL w="12700" cap="flat" cmpd="sng" algn="ctr">
+                      <a:solidFill>
+                        <a:schemeClr val="tx1"/>
+                      </a:solidFill>
+                      <a:prstDash val="solid"/>
+                      <a:round/>
+                      <a:headEnd type="none" w="med" len="med"/>
+                      <a:tailEnd type="none" w="med" len="med"/>
+                    </a:lnL>
+                    <a:lnR w="12700" cap="flat" cmpd="sng" algn="ctr">
+                      <a:solidFill>
+                        <a:schemeClr val="tx1"/>
+                      </a:solidFill>
+                      <a:prstDash val="solid"/>
+                      <a:round/>
+                      <a:headEnd type="none" w="med" len="med"/>
+                      <a:tailEnd type="none" w="med" len="med"/>
+                    </a:lnR>
+                    <a:lnT w="12700" cap="flat" cmpd="sng" algn="ctr">
+                      <a:solidFill>
+                        <a:schemeClr val="tx1"/>
+                      </a:solidFill>
+                      <a:prstDash val="solid"/>
+                      <a:round/>
+                      <a:headEnd type="none" w="med" len="med"/>
+                      <a:tailEnd type="none" w="med" len="med"/>
+                    </a:lnT>
+                    <a:lnB w="12700" cap="flat" cmpd="sng" algn="ctr">
+                      <a:solidFill>
+                        <a:schemeClr val="tx1"/>
+                      </a:solidFill>
+                      <a:prstDash val="solid"/>
+                      <a:round/>
+                      <a:headEnd type="none" w="med" len="med"/>
+                      <a:tailEnd type="none" w="med" len="med"/>
+                    </a:lnB>
+                    <a:noFill/>
+                  </a:tcPr>
+                </a:tc>
+                <a:extLst>
+                  <a:ext uri="{0D108BD9-81ED-4DB2-BD59-A6C34878D82A}">
+                    <a16:rowId xmlns:a16="http://schemas.microsoft.com/office/drawing/2014/main" val="1045134656"/>
+                  </a:ext>
+                </a:extLst>
+              </a:tr>
+            </a:tbl>
+          </a:graphicData>
+        </a:graphic>
+      </p:graphicFrame>
+      <p:pic>
+        <p:nvPicPr>
+          <p:cNvPr id="4" name="Picture 3">
+            <a:extLst>
+              <a:ext uri="{FF2B5EF4-FFF2-40B4-BE49-F238E27FC236}">
+                <a16:creationId xmlns:a16="http://schemas.microsoft.com/office/drawing/2014/main" id="{59B6F5F5-8E8B-16DD-1BAD-A34E842C1CFA}"/>
+              </a:ext>
+            </a:extLst>
+          </p:cNvPr>
+          <p:cNvPicPr>
+            <a:picLocks noChangeAspect="1"/>
+          </p:cNvPicPr>
+          <p:nvPr/>
+        </p:nvPicPr>
+        <p:blipFill>
+          <a:blip r:embed="rId2"/>
+          <a:stretch>
+            <a:fillRect/>
+          </a:stretch>
+        </p:blipFill>
+        <p:spPr>
+          <a:xfrm>
+            <a:off x="487426" y="1589297"/>
+            <a:ext cx="7332599" cy="4484920"/>
+          </a:xfrm>
+          <a:prstGeom prst="rect">
+            <a:avLst/>
+          </a:prstGeom>
+        </p:spPr>
+      </p:pic>
+    </p:spTree>
+    <p:extLst>
+      <p:ext uri="{BB962C8B-B14F-4D97-AF65-F5344CB8AC3E}">
+        <p14:creationId xmlns:p14="http://schemas.microsoft.com/office/powerpoint/2010/main" val="1069569012"/>
+      </p:ext>
+    </p:extLst>
+  </p:cSld>
+  <p:clrMapOvr>
+    <a:masterClrMapping/>
+  </p:clrMapOvr>
+</p:sld>
+</file>
+
+<file path=ppt/slides/slide6.xml><?xml version="1.0" encoding="utf-8"?>
+<p:sld xmlns:a="http://schemas.openxmlformats.org/drawingml/2006/main" xmlns:r="http://schemas.openxmlformats.org/officeDocument/2006/relationships" xmlns:p="http://schemas.openxmlformats.org/presentationml/2006/main">
+  <p:cSld>
+    <p:spTree>
+      <p:nvGrpSpPr>
+        <p:cNvPr id="1" name=""/>
+        <p:cNvGrpSpPr/>
+        <p:nvPr/>
+      </p:nvGrpSpPr>
+      <p:grpSpPr>
+        <a:xfrm>
+          <a:off x="0" y="0"/>
+          <a:ext cx="0" cy="0"/>
+          <a:chOff x="0" y="0"/>
+          <a:chExt cx="0" cy="0"/>
+        </a:xfrm>
+      </p:grpSpPr>
+      <p:sp>
+        <p:nvSpPr>
+          <p:cNvPr id="3" name="TextBox 2">
+            <a:extLst>
+              <a:ext uri="{FF2B5EF4-FFF2-40B4-BE49-F238E27FC236}">
+                <a16:creationId xmlns:a16="http://schemas.microsoft.com/office/drawing/2014/main" id="{7F5AFCD7-CF64-A7F6-B02F-987454D53E76}"/>
+              </a:ext>
+            </a:extLst>
+          </p:cNvPr>
+          <p:cNvSpPr txBox="1"/>
+          <p:nvPr/>
+        </p:nvSpPr>
+        <p:spPr>
+          <a:xfrm>
+            <a:off x="124051" y="102889"/>
+            <a:ext cx="11607874" cy="646331"/>
+          </a:xfrm>
+          <a:prstGeom prst="rect">
+            <a:avLst/>
+          </a:prstGeom>
+          <a:noFill/>
+        </p:spPr>
+        <p:txBody>
+          <a:bodyPr wrap="square">
+            <a:spAutoFit/>
+          </a:bodyPr>
+          <a:lstStyle/>
+          <a:p>
+            <a:pPr marL="342900" indent="-342900">
+              <a:buFont typeface="+mj-lt"/>
+              <a:buAutoNum type="arabicPeriod" startAt="3"/>
+            </a:pPr>
+            <a:r>
+              <a:rPr lang="en-GB" dirty="0"/>
+              <a:t>Rename TI0003/TIC0003/TV0003 to TI0013/TIC0013/TV0013 and update associated loop.</a:t>
+            </a:r>
+          </a:p>
+          <a:p>
+            <a:pPr marL="800100" lvl="1" indent="-342900">
+              <a:buFont typeface="Arial" panose="020B0604020202020204" pitchFamily="34" charset="0"/>
+              <a:buChar char="•"/>
+            </a:pPr>
+            <a:r>
+              <a:rPr lang="en-GB" dirty="0"/>
+              <a:t>Retain the original </a:t>
+            </a:r>
+            <a:r>
+              <a:rPr lang="en-GB" dirty="0" err="1"/>
+              <a:t>PersistentID</a:t>
+            </a:r>
+            <a:r>
+              <a:rPr lang="en-GB" dirty="0"/>
+              <a:t> and change the name.</a:t>
+            </a:r>
+          </a:p>
+        </p:txBody>
+      </p:sp>
+      <p:graphicFrame>
+        <p:nvGraphicFramePr>
+          <p:cNvPr id="7" name="Table 7">
+            <a:extLst>
+              <a:ext uri="{FF2B5EF4-FFF2-40B4-BE49-F238E27FC236}">
+                <a16:creationId xmlns:a16="http://schemas.microsoft.com/office/drawing/2014/main" id="{122A675D-8A6B-1BF2-70BB-B5522B02FF65}"/>
+              </a:ext>
+            </a:extLst>
+          </p:cNvPr>
+          <p:cNvGraphicFramePr>
+            <a:graphicFrameLocks noGrp="1"/>
+          </p:cNvGraphicFramePr>
+          <p:nvPr/>
+        </p:nvGraphicFramePr>
+        <p:xfrm>
+          <a:off x="307975" y="1191319"/>
+          <a:ext cx="7807325" cy="5257106"/>
+        </p:xfrm>
+        <a:graphic>
+          <a:graphicData uri="http://schemas.openxmlformats.org/drawingml/2006/table">
+            <a:tbl>
+              <a:tblPr firstRow="1" bandRow="1">
+                <a:tableStyleId>{5C22544A-7EE6-4342-B048-85BDC9FD1C3A}</a:tableStyleId>
+              </a:tblPr>
+              <a:tblGrid>
+                <a:gridCol w="7807325">
+                  <a:extLst>
+                    <a:ext uri="{9D8B030D-6E8A-4147-A177-3AD203B41FA5}">
+                      <a16:colId xmlns:a16="http://schemas.microsoft.com/office/drawing/2014/main" val="3422904110"/>
+                    </a:ext>
+                  </a:extLst>
+                </a:gridCol>
+              </a:tblGrid>
+              <a:tr h="5257106">
+                <a:tc>
+                  <a:txBody>
+                    <a:bodyPr/>
+                    <a:lstStyle/>
+                    <a:p>
+                      <a:endParaRPr lang="en-GB" dirty="0"/>
+                    </a:p>
+                  </a:txBody>
+                  <a:tcPr>
+                    <a:lnL w="12700" cap="flat" cmpd="sng" algn="ctr">
+                      <a:solidFill>
+                        <a:schemeClr val="tx1"/>
+                      </a:solidFill>
+                      <a:prstDash val="solid"/>
+                      <a:round/>
+                      <a:headEnd type="none" w="med" len="med"/>
+                      <a:tailEnd type="none" w="med" len="med"/>
+                    </a:lnL>
+                    <a:lnR w="12700" cap="flat" cmpd="sng" algn="ctr">
+                      <a:solidFill>
+                        <a:schemeClr val="tx1"/>
+                      </a:solidFill>
+                      <a:prstDash val="solid"/>
+                      <a:round/>
+                      <a:headEnd type="none" w="med" len="med"/>
+                      <a:tailEnd type="none" w="med" len="med"/>
+                    </a:lnR>
+                    <a:lnT w="12700" cap="flat" cmpd="sng" algn="ctr">
+                      <a:solidFill>
+                        <a:schemeClr val="tx1"/>
+                      </a:solidFill>
+                      <a:prstDash val="solid"/>
+                      <a:round/>
+                      <a:headEnd type="none" w="med" len="med"/>
+                      <a:tailEnd type="none" w="med" len="med"/>
+                    </a:lnT>
+                    <a:lnB w="12700" cap="flat" cmpd="sng" algn="ctr">
+                      <a:solidFill>
+                        <a:schemeClr val="tx1"/>
+                      </a:solidFill>
+                      <a:prstDash val="solid"/>
+                      <a:round/>
+                      <a:headEnd type="none" w="med" len="med"/>
+                      <a:tailEnd type="none" w="med" len="med"/>
+                    </a:lnB>
+                    <a:noFill/>
+                  </a:tcPr>
+                </a:tc>
+                <a:extLst>
+                  <a:ext uri="{0D108BD9-81ED-4DB2-BD59-A6C34878D82A}">
+                    <a16:rowId xmlns:a16="http://schemas.microsoft.com/office/drawing/2014/main" val="1045134656"/>
+                  </a:ext>
+                </a:extLst>
+              </a:tr>
+            </a:tbl>
+          </a:graphicData>
+        </a:graphic>
+      </p:graphicFrame>
+      <p:pic>
+        <p:nvPicPr>
+          <p:cNvPr id="4" name="Picture 3">
+            <a:extLst>
+              <a:ext uri="{FF2B5EF4-FFF2-40B4-BE49-F238E27FC236}">
+                <a16:creationId xmlns:a16="http://schemas.microsoft.com/office/drawing/2014/main" id="{0763C1C7-5BFE-93A4-B428-788D29E49226}"/>
+              </a:ext>
+            </a:extLst>
+          </p:cNvPr>
+          <p:cNvPicPr>
+            <a:picLocks noChangeAspect="1"/>
+          </p:cNvPicPr>
+          <p:nvPr/>
+        </p:nvPicPr>
+        <p:blipFill>
+          <a:blip r:embed="rId2"/>
+          <a:stretch>
+            <a:fillRect/>
+          </a:stretch>
+        </p:blipFill>
+        <p:spPr>
+          <a:xfrm>
+            <a:off x="415734" y="1390650"/>
+            <a:ext cx="7591805" cy="4629150"/>
+          </a:xfrm>
+          <a:prstGeom prst="rect">
+            <a:avLst/>
+          </a:prstGeom>
+        </p:spPr>
+      </p:pic>
+    </p:spTree>
+    <p:extLst>
+      <p:ext uri="{BB962C8B-B14F-4D97-AF65-F5344CB8AC3E}">
+        <p14:creationId xmlns:p14="http://schemas.microsoft.com/office/powerpoint/2010/main" val="1461351059"/>
+      </p:ext>
+    </p:extLst>
+  </p:cSld>
+  <p:clrMapOvr>
+    <a:masterClrMapping/>
+  </p:clrMapOvr>
+</p:sld>
+</file>
+
+<file path=ppt/slides/slide7.xml><?xml version="1.0" encoding="utf-8"?>
+<p:sld xmlns:a="http://schemas.openxmlformats.org/drawingml/2006/main" xmlns:r="http://schemas.openxmlformats.org/officeDocument/2006/relationships" xmlns:p="http://schemas.openxmlformats.org/presentationml/2006/main">
+  <p:cSld>
+    <p:spTree>
+      <p:nvGrpSpPr>
+        <p:cNvPr id="1" name=""/>
+        <p:cNvGrpSpPr/>
+        <p:nvPr/>
+      </p:nvGrpSpPr>
+      <p:grpSpPr>
+        <a:xfrm>
+          <a:off x="0" y="0"/>
+          <a:ext cx="0" cy="0"/>
+          <a:chOff x="0" y="0"/>
+          <a:chExt cx="0" cy="0"/>
+        </a:xfrm>
+      </p:grpSpPr>
+      <p:sp>
+        <p:nvSpPr>
+          <p:cNvPr id="3" name="TextBox 2">
+            <a:extLst>
+              <a:ext uri="{FF2B5EF4-FFF2-40B4-BE49-F238E27FC236}">
+                <a16:creationId xmlns:a16="http://schemas.microsoft.com/office/drawing/2014/main" id="{7F5AFCD7-CF64-A7F6-B02F-987454D53E76}"/>
+              </a:ext>
+            </a:extLst>
+          </p:cNvPr>
+          <p:cNvSpPr txBox="1"/>
+          <p:nvPr/>
+        </p:nvSpPr>
+        <p:spPr>
+          <a:xfrm>
+            <a:off x="124051" y="102889"/>
+            <a:ext cx="11607874" cy="369332"/>
+          </a:xfrm>
+          <a:prstGeom prst="rect">
+            <a:avLst/>
+          </a:prstGeom>
+          <a:noFill/>
+        </p:spPr>
+        <p:txBody>
+          <a:bodyPr wrap="square">
+            <a:spAutoFit/>
+          </a:bodyPr>
+          <a:lstStyle/>
+          <a:p>
+            <a:pPr marL="342900" indent="-342900">
+              <a:buFont typeface="+mj-lt"/>
+              <a:buAutoNum type="arabicPeriod" startAt="4"/>
+            </a:pPr>
+            <a:r>
+              <a:rPr lang="en-GB" dirty="0"/>
+              <a:t>Remove the note and unused nozzle from 20VA001 and update elevation to EL. 400000</a:t>
+            </a:r>
+          </a:p>
+        </p:txBody>
+      </p:sp>
+      <p:graphicFrame>
+        <p:nvGraphicFramePr>
+          <p:cNvPr id="7" name="Table 7">
+            <a:extLst>
+              <a:ext uri="{FF2B5EF4-FFF2-40B4-BE49-F238E27FC236}">
+                <a16:creationId xmlns:a16="http://schemas.microsoft.com/office/drawing/2014/main" id="{122A675D-8A6B-1BF2-70BB-B5522B02FF65}"/>
+              </a:ext>
+            </a:extLst>
+          </p:cNvPr>
+          <p:cNvGraphicFramePr>
+            <a:graphicFrameLocks noGrp="1"/>
+          </p:cNvGraphicFramePr>
+          <p:nvPr/>
+        </p:nvGraphicFramePr>
+        <p:xfrm>
+          <a:off x="307975" y="1191319"/>
+          <a:ext cx="7807325" cy="5257106"/>
+        </p:xfrm>
+        <a:graphic>
+          <a:graphicData uri="http://schemas.openxmlformats.org/drawingml/2006/table">
+            <a:tbl>
+              <a:tblPr firstRow="1" bandRow="1">
+                <a:tableStyleId>{5C22544A-7EE6-4342-B048-85BDC9FD1C3A}</a:tableStyleId>
+              </a:tblPr>
+              <a:tblGrid>
+                <a:gridCol w="7807325">
+                  <a:extLst>
+                    <a:ext uri="{9D8B030D-6E8A-4147-A177-3AD203B41FA5}">
+                      <a16:colId xmlns:a16="http://schemas.microsoft.com/office/drawing/2014/main" val="3422904110"/>
+                    </a:ext>
+                  </a:extLst>
+                </a:gridCol>
+              </a:tblGrid>
+              <a:tr h="5257106">
+                <a:tc>
+                  <a:txBody>
+                    <a:bodyPr/>
+                    <a:lstStyle/>
+                    <a:p>
+                      <a:endParaRPr lang="en-GB" dirty="0"/>
+                    </a:p>
+                  </a:txBody>
+                  <a:tcPr>
+                    <a:lnL w="12700" cap="flat" cmpd="sng" algn="ctr">
+                      <a:solidFill>
+                        <a:schemeClr val="tx1"/>
+                      </a:solidFill>
+                      <a:prstDash val="solid"/>
+                      <a:round/>
+                      <a:headEnd type="none" w="med" len="med"/>
+                      <a:tailEnd type="none" w="med" len="med"/>
+                    </a:lnL>
+                    <a:lnR w="12700" cap="flat" cmpd="sng" algn="ctr">
+                      <a:solidFill>
+                        <a:schemeClr val="tx1"/>
+                      </a:solidFill>
+                      <a:prstDash val="solid"/>
+                      <a:round/>
+                      <a:headEnd type="none" w="med" len="med"/>
+                      <a:tailEnd type="none" w="med" len="med"/>
+                    </a:lnR>
+                    <a:lnT w="12700" cap="flat" cmpd="sng" algn="ctr">
+                      <a:solidFill>
+                        <a:schemeClr val="tx1"/>
+                      </a:solidFill>
+                      <a:prstDash val="solid"/>
+                      <a:round/>
+                      <a:headEnd type="none" w="med" len="med"/>
+                      <a:tailEnd type="none" w="med" len="med"/>
+                    </a:lnT>
+                    <a:lnB w="12700" cap="flat" cmpd="sng" algn="ctr">
+                      <a:solidFill>
+                        <a:schemeClr val="tx1"/>
+                      </a:solidFill>
+                      <a:prstDash val="solid"/>
+                      <a:round/>
+                      <a:headEnd type="none" w="med" len="med"/>
+                      <a:tailEnd type="none" w="med" len="med"/>
+                    </a:lnB>
+                    <a:noFill/>
+                  </a:tcPr>
+                </a:tc>
+                <a:extLst>
+                  <a:ext uri="{0D108BD9-81ED-4DB2-BD59-A6C34878D82A}">
+                    <a16:rowId xmlns:a16="http://schemas.microsoft.com/office/drawing/2014/main" val="1045134656"/>
+                  </a:ext>
+                </a:extLst>
+              </a:tr>
+            </a:tbl>
+          </a:graphicData>
+        </a:graphic>
+      </p:graphicFrame>
+      <p:pic>
+        <p:nvPicPr>
+          <p:cNvPr id="4" name="Picture 3">
+            <a:extLst>
+              <a:ext uri="{FF2B5EF4-FFF2-40B4-BE49-F238E27FC236}">
+                <a16:creationId xmlns:a16="http://schemas.microsoft.com/office/drawing/2014/main" id="{6B8FD617-FBDF-963D-47DA-9FEF1D90CCAE}"/>
+              </a:ext>
+            </a:extLst>
+          </p:cNvPr>
+          <p:cNvPicPr>
+            <a:picLocks noChangeAspect="1"/>
+          </p:cNvPicPr>
+          <p:nvPr/>
+        </p:nvPicPr>
+        <p:blipFill>
+          <a:blip r:embed="rId2"/>
+          <a:stretch>
+            <a:fillRect/>
+          </a:stretch>
+        </p:blipFill>
+        <p:spPr>
+          <a:xfrm>
+            <a:off x="734898" y="1814087"/>
+            <a:ext cx="6953477" cy="4243813"/>
+          </a:xfrm>
+          <a:prstGeom prst="rect">
+            <a:avLst/>
+          </a:prstGeom>
+        </p:spPr>
+      </p:pic>
+    </p:spTree>
+    <p:extLst>
+      <p:ext uri="{BB962C8B-B14F-4D97-AF65-F5344CB8AC3E}">
+        <p14:creationId xmlns:p14="http://schemas.microsoft.com/office/powerpoint/2010/main" val="3478772804"/>
+      </p:ext>
+    </p:extLst>
+  </p:cSld>
+  <p:clrMapOvr>
+    <a:masterClrMapping/>
+  </p:clrMapOvr>
+</p:sld>
+</file>
+
+<file path=ppt/slides/slide8.xml><?xml version="1.0" encoding="utf-8"?>
+<p:sld xmlns:a="http://schemas.openxmlformats.org/drawingml/2006/main" xmlns:r="http://schemas.openxmlformats.org/officeDocument/2006/relationships" xmlns:p="http://schemas.openxmlformats.org/presentationml/2006/main">
+  <p:cSld>
+    <p:spTree>
+      <p:nvGrpSpPr>
+        <p:cNvPr id="1" name=""/>
+        <p:cNvGrpSpPr/>
+        <p:nvPr/>
+      </p:nvGrpSpPr>
+      <p:grpSpPr>
+        <a:xfrm>
+          <a:off x="0" y="0"/>
+          <a:ext cx="0" cy="0"/>
+          <a:chOff x="0" y="0"/>
+          <a:chExt cx="0" cy="0"/>
+        </a:xfrm>
+      </p:grpSpPr>
+      <p:sp>
+        <p:nvSpPr>
+          <p:cNvPr id="3" name="TextBox 2">
+            <a:extLst>
+              <a:ext uri="{FF2B5EF4-FFF2-40B4-BE49-F238E27FC236}">
+                <a16:creationId xmlns:a16="http://schemas.microsoft.com/office/drawing/2014/main" id="{7F5AFCD7-CF64-A7F6-B02F-987454D53E76}"/>
+              </a:ext>
+            </a:extLst>
+          </p:cNvPr>
+          <p:cNvSpPr txBox="1"/>
+          <p:nvPr/>
+        </p:nvSpPr>
+        <p:spPr>
+          <a:xfrm>
+            <a:off x="124051" y="102889"/>
+            <a:ext cx="11607874" cy="646331"/>
+          </a:xfrm>
+          <a:prstGeom prst="rect">
+            <a:avLst/>
+          </a:prstGeom>
+          <a:noFill/>
+        </p:spPr>
+        <p:txBody>
+          <a:bodyPr wrap="square">
+            <a:spAutoFit/>
+          </a:bodyPr>
+          <a:lstStyle/>
+          <a:p>
+            <a:pPr marL="342900" indent="-342900">
+              <a:buFont typeface="+mj-lt"/>
+              <a:buAutoNum type="arabicPeriod" startAt="5"/>
+            </a:pPr>
+            <a:r>
+              <a:rPr lang="en-GB" dirty="0"/>
+              <a:t>Change the type of actuator for HV0001 to a PA006A actuator type</a:t>
+            </a:r>
+          </a:p>
+          <a:p>
+            <a:pPr marL="800100" lvl="1" indent="-342900">
+              <a:buFont typeface="Arial" panose="020B0604020202020204" pitchFamily="34" charset="0"/>
+              <a:buChar char="•"/>
+            </a:pPr>
+            <a:r>
+              <a:rPr lang="en-GB" dirty="0"/>
+              <a:t>Retain </a:t>
+            </a:r>
+            <a:r>
+              <a:rPr lang="en-GB" dirty="0" err="1"/>
+              <a:t>PersistentID</a:t>
+            </a:r>
+            <a:r>
+              <a:rPr lang="en-GB" dirty="0"/>
+              <a:t> of original actuator</a:t>
             </a:r>
           </a:p>
         </p:txBody>
@@ -6290,7 +7171,7 @@
           <p:cNvPr id="5" name="Picture 4">
             <a:extLst>
               <a:ext uri="{FF2B5EF4-FFF2-40B4-BE49-F238E27FC236}">
-                <a16:creationId xmlns:a16="http://schemas.microsoft.com/office/drawing/2014/main" id="{0597467A-5A94-A69B-1E9C-20020FA7DB8E}"/>
+                <a16:creationId xmlns:a16="http://schemas.microsoft.com/office/drawing/2014/main" id="{D50284D9-0402-5D3A-94C6-93E480634D37}"/>
               </a:ext>
             </a:extLst>
           </p:cNvPr>
@@ -6307,8 +7188,8 @@
         </p:blipFill>
         <p:spPr>
           <a:xfrm>
-            <a:off x="529476" y="1450110"/>
-            <a:ext cx="7364321" cy="4486989"/>
+            <a:off x="587355" y="1559852"/>
+            <a:ext cx="7404120" cy="4520039"/>
           </a:xfrm>
           <a:prstGeom prst="rect">
             <a:avLst/>
@@ -6318,7 +7199,7 @@
     </p:spTree>
     <p:extLst>
       <p:ext uri="{BB962C8B-B14F-4D97-AF65-F5344CB8AC3E}">
-        <p14:creationId xmlns:p14="http://schemas.microsoft.com/office/powerpoint/2010/main" val="1069569012"/>
+        <p14:creationId xmlns:p14="http://schemas.microsoft.com/office/powerpoint/2010/main" val="1232242120"/>
       </p:ext>
     </p:extLst>
   </p:cSld>
@@ -6328,7 +7209,7 @@
 </p:sld>
 </file>
 
-<file path=ppt/slides/slide6.xml><?xml version="1.0" encoding="utf-8"?>
+<file path=ppt/slides/slide9.xml><?xml version="1.0" encoding="utf-8"?>
 <p:sld xmlns:a="http://schemas.openxmlformats.org/drawingml/2006/main" xmlns:r="http://schemas.openxmlformats.org/officeDocument/2006/relationships" xmlns:p="http://schemas.openxmlformats.org/presentationml/2006/main">
   <p:cSld>
     <p:spTree>
@@ -6375,11 +7256,19 @@
           <a:p>
             <a:pPr marL="342900" indent="-342900">
               <a:buFont typeface="+mj-lt"/>
-              <a:buAutoNum type="arabicPeriod" startAt="3"/>
+              <a:buAutoNum type="arabicPeriod" startAt="6"/>
             </a:pPr>
             <a:r>
               <a:rPr lang="en-GB" dirty="0"/>
-              <a:t>Rename TI0003/TIC0003/TV0003 to TI0013/TIC0013/TV0013 and update associated loop.</a:t>
+              <a:t>Add heat tracing to </a:t>
+            </a:r>
+            <a:r>
+              <a:rPr lang="en-GB" dirty="0" err="1"/>
+              <a:t>PipingNetworkSegment</a:t>
+            </a:r>
+            <a:r>
+              <a:rPr lang="en-GB" dirty="0"/>
+              <a:t> D-20L A- PL-AS200-</a:t>
             </a:r>
           </a:p>
           <a:p>
@@ -6389,415 +7278,7 @@
             </a:pPr>
             <a:r>
               <a:rPr lang="en-GB" dirty="0"/>
-              <a:t>Retain the original </a:t>
-            </a:r>
-            <a:r>
-              <a:rPr lang="en-GB" dirty="0" err="1"/>
-              <a:t>PersistentID</a:t>
-            </a:r>
-            <a:r>
-              <a:rPr lang="en-GB" dirty="0"/>
-              <a:t> and change the name.</a:t>
-            </a:r>
-          </a:p>
-        </p:txBody>
-      </p:sp>
-      <p:graphicFrame>
-        <p:nvGraphicFramePr>
-          <p:cNvPr id="7" name="Table 7">
-            <a:extLst>
-              <a:ext uri="{FF2B5EF4-FFF2-40B4-BE49-F238E27FC236}">
-                <a16:creationId xmlns:a16="http://schemas.microsoft.com/office/drawing/2014/main" id="{122A675D-8A6B-1BF2-70BB-B5522B02FF65}"/>
-              </a:ext>
-            </a:extLst>
-          </p:cNvPr>
-          <p:cNvGraphicFramePr>
-            <a:graphicFrameLocks noGrp="1"/>
-          </p:cNvGraphicFramePr>
-          <p:nvPr/>
-        </p:nvGraphicFramePr>
-        <p:xfrm>
-          <a:off x="307975" y="1191319"/>
-          <a:ext cx="7807325" cy="5257106"/>
-        </p:xfrm>
-        <a:graphic>
-          <a:graphicData uri="http://schemas.openxmlformats.org/drawingml/2006/table">
-            <a:tbl>
-              <a:tblPr firstRow="1" bandRow="1">
-                <a:tableStyleId>{5C22544A-7EE6-4342-B048-85BDC9FD1C3A}</a:tableStyleId>
-              </a:tblPr>
-              <a:tblGrid>
-                <a:gridCol w="7807325">
-                  <a:extLst>
-                    <a:ext uri="{9D8B030D-6E8A-4147-A177-3AD203B41FA5}">
-                      <a16:colId xmlns:a16="http://schemas.microsoft.com/office/drawing/2014/main" val="3422904110"/>
-                    </a:ext>
-                  </a:extLst>
-                </a:gridCol>
-              </a:tblGrid>
-              <a:tr h="5257106">
-                <a:tc>
-                  <a:txBody>
-                    <a:bodyPr/>
-                    <a:lstStyle/>
-                    <a:p>
-                      <a:endParaRPr lang="en-GB" dirty="0"/>
-                    </a:p>
-                  </a:txBody>
-                  <a:tcPr>
-                    <a:lnL w="12700" cap="flat" cmpd="sng" algn="ctr">
-                      <a:solidFill>
-                        <a:schemeClr val="tx1"/>
-                      </a:solidFill>
-                      <a:prstDash val="solid"/>
-                      <a:round/>
-                      <a:headEnd type="none" w="med" len="med"/>
-                      <a:tailEnd type="none" w="med" len="med"/>
-                    </a:lnL>
-                    <a:lnR w="12700" cap="flat" cmpd="sng" algn="ctr">
-                      <a:solidFill>
-                        <a:schemeClr val="tx1"/>
-                      </a:solidFill>
-                      <a:prstDash val="solid"/>
-                      <a:round/>
-                      <a:headEnd type="none" w="med" len="med"/>
-                      <a:tailEnd type="none" w="med" len="med"/>
-                    </a:lnR>
-                    <a:lnT w="12700" cap="flat" cmpd="sng" algn="ctr">
-                      <a:solidFill>
-                        <a:schemeClr val="tx1"/>
-                      </a:solidFill>
-                      <a:prstDash val="solid"/>
-                      <a:round/>
-                      <a:headEnd type="none" w="med" len="med"/>
-                      <a:tailEnd type="none" w="med" len="med"/>
-                    </a:lnT>
-                    <a:lnB w="12700" cap="flat" cmpd="sng" algn="ctr">
-                      <a:solidFill>
-                        <a:schemeClr val="tx1"/>
-                      </a:solidFill>
-                      <a:prstDash val="solid"/>
-                      <a:round/>
-                      <a:headEnd type="none" w="med" len="med"/>
-                      <a:tailEnd type="none" w="med" len="med"/>
-                    </a:lnB>
-                    <a:noFill/>
-                  </a:tcPr>
-                </a:tc>
-                <a:extLst>
-                  <a:ext uri="{0D108BD9-81ED-4DB2-BD59-A6C34878D82A}">
-                    <a16:rowId xmlns:a16="http://schemas.microsoft.com/office/drawing/2014/main" val="1045134656"/>
-                  </a:ext>
-                </a:extLst>
-              </a:tr>
-            </a:tbl>
-          </a:graphicData>
-        </a:graphic>
-      </p:graphicFrame>
-      <p:pic>
-        <p:nvPicPr>
-          <p:cNvPr id="5" name="Picture 4">
-            <a:extLst>
-              <a:ext uri="{FF2B5EF4-FFF2-40B4-BE49-F238E27FC236}">
-                <a16:creationId xmlns:a16="http://schemas.microsoft.com/office/drawing/2014/main" id="{A34C257C-9CB2-BE58-F1B5-55EA9E0BA6E4}"/>
-              </a:ext>
-            </a:extLst>
-          </p:cNvPr>
-          <p:cNvPicPr>
-            <a:picLocks noChangeAspect="1"/>
-          </p:cNvPicPr>
-          <p:nvPr/>
-        </p:nvPicPr>
-        <p:blipFill>
-          <a:blip r:embed="rId2"/>
-          <a:stretch>
-            <a:fillRect/>
-          </a:stretch>
-        </p:blipFill>
-        <p:spPr>
-          <a:xfrm>
-            <a:off x="354047" y="1469490"/>
-            <a:ext cx="7715180" cy="4700763"/>
-          </a:xfrm>
-          <a:prstGeom prst="rect">
-            <a:avLst/>
-          </a:prstGeom>
-        </p:spPr>
-      </p:pic>
-    </p:spTree>
-    <p:extLst>
-      <p:ext uri="{BB962C8B-B14F-4D97-AF65-F5344CB8AC3E}">
-        <p14:creationId xmlns:p14="http://schemas.microsoft.com/office/powerpoint/2010/main" val="1461351059"/>
-      </p:ext>
-    </p:extLst>
-  </p:cSld>
-  <p:clrMapOvr>
-    <a:masterClrMapping/>
-  </p:clrMapOvr>
-</p:sld>
-</file>
-
-<file path=ppt/slides/slide7.xml><?xml version="1.0" encoding="utf-8"?>
-<p:sld xmlns:a="http://schemas.openxmlformats.org/drawingml/2006/main" xmlns:r="http://schemas.openxmlformats.org/officeDocument/2006/relationships" xmlns:p="http://schemas.openxmlformats.org/presentationml/2006/main">
-  <p:cSld>
-    <p:spTree>
-      <p:nvGrpSpPr>
-        <p:cNvPr id="1" name=""/>
-        <p:cNvGrpSpPr/>
-        <p:nvPr/>
-      </p:nvGrpSpPr>
-      <p:grpSpPr>
-        <a:xfrm>
-          <a:off x="0" y="0"/>
-          <a:ext cx="0" cy="0"/>
-          <a:chOff x="0" y="0"/>
-          <a:chExt cx="0" cy="0"/>
-        </a:xfrm>
-      </p:grpSpPr>
-      <p:sp>
-        <p:nvSpPr>
-          <p:cNvPr id="3" name="TextBox 2">
-            <a:extLst>
-              <a:ext uri="{FF2B5EF4-FFF2-40B4-BE49-F238E27FC236}">
-                <a16:creationId xmlns:a16="http://schemas.microsoft.com/office/drawing/2014/main" id="{7F5AFCD7-CF64-A7F6-B02F-987454D53E76}"/>
-              </a:ext>
-            </a:extLst>
-          </p:cNvPr>
-          <p:cNvSpPr txBox="1"/>
-          <p:nvPr/>
-        </p:nvSpPr>
-        <p:spPr>
-          <a:xfrm>
-            <a:off x="124051" y="102889"/>
-            <a:ext cx="11607874" cy="369332"/>
-          </a:xfrm>
-          <a:prstGeom prst="rect">
-            <a:avLst/>
-          </a:prstGeom>
-          <a:noFill/>
-        </p:spPr>
-        <p:txBody>
-          <a:bodyPr wrap="square">
-            <a:spAutoFit/>
-          </a:bodyPr>
-          <a:lstStyle/>
-          <a:p>
-            <a:pPr marL="342900" indent="-342900">
-              <a:buFont typeface="+mj-lt"/>
-              <a:buAutoNum type="arabicPeriod" startAt="4"/>
-            </a:pPr>
-            <a:r>
-              <a:rPr lang="en-GB" dirty="0"/>
-              <a:t>Remove the note and unused nozzle from 20VA001 and update elevation to EL. 400000</a:t>
-            </a:r>
-          </a:p>
-        </p:txBody>
-      </p:sp>
-      <p:graphicFrame>
-        <p:nvGraphicFramePr>
-          <p:cNvPr id="7" name="Table 7">
-            <a:extLst>
-              <a:ext uri="{FF2B5EF4-FFF2-40B4-BE49-F238E27FC236}">
-                <a16:creationId xmlns:a16="http://schemas.microsoft.com/office/drawing/2014/main" id="{122A675D-8A6B-1BF2-70BB-B5522B02FF65}"/>
-              </a:ext>
-            </a:extLst>
-          </p:cNvPr>
-          <p:cNvGraphicFramePr>
-            <a:graphicFrameLocks noGrp="1"/>
-          </p:cNvGraphicFramePr>
-          <p:nvPr/>
-        </p:nvGraphicFramePr>
-        <p:xfrm>
-          <a:off x="307975" y="1191319"/>
-          <a:ext cx="7807325" cy="5257106"/>
-        </p:xfrm>
-        <a:graphic>
-          <a:graphicData uri="http://schemas.openxmlformats.org/drawingml/2006/table">
-            <a:tbl>
-              <a:tblPr firstRow="1" bandRow="1">
-                <a:tableStyleId>{5C22544A-7EE6-4342-B048-85BDC9FD1C3A}</a:tableStyleId>
-              </a:tblPr>
-              <a:tblGrid>
-                <a:gridCol w="7807325">
-                  <a:extLst>
-                    <a:ext uri="{9D8B030D-6E8A-4147-A177-3AD203B41FA5}">
-                      <a16:colId xmlns:a16="http://schemas.microsoft.com/office/drawing/2014/main" val="3422904110"/>
-                    </a:ext>
-                  </a:extLst>
-                </a:gridCol>
-              </a:tblGrid>
-              <a:tr h="5257106">
-                <a:tc>
-                  <a:txBody>
-                    <a:bodyPr/>
-                    <a:lstStyle/>
-                    <a:p>
-                      <a:endParaRPr lang="en-GB" dirty="0"/>
-                    </a:p>
-                  </a:txBody>
-                  <a:tcPr>
-                    <a:lnL w="12700" cap="flat" cmpd="sng" algn="ctr">
-                      <a:solidFill>
-                        <a:schemeClr val="tx1"/>
-                      </a:solidFill>
-                      <a:prstDash val="solid"/>
-                      <a:round/>
-                      <a:headEnd type="none" w="med" len="med"/>
-                      <a:tailEnd type="none" w="med" len="med"/>
-                    </a:lnL>
-                    <a:lnR w="12700" cap="flat" cmpd="sng" algn="ctr">
-                      <a:solidFill>
-                        <a:schemeClr val="tx1"/>
-                      </a:solidFill>
-                      <a:prstDash val="solid"/>
-                      <a:round/>
-                      <a:headEnd type="none" w="med" len="med"/>
-                      <a:tailEnd type="none" w="med" len="med"/>
-                    </a:lnR>
-                    <a:lnT w="12700" cap="flat" cmpd="sng" algn="ctr">
-                      <a:solidFill>
-                        <a:schemeClr val="tx1"/>
-                      </a:solidFill>
-                      <a:prstDash val="solid"/>
-                      <a:round/>
-                      <a:headEnd type="none" w="med" len="med"/>
-                      <a:tailEnd type="none" w="med" len="med"/>
-                    </a:lnT>
-                    <a:lnB w="12700" cap="flat" cmpd="sng" algn="ctr">
-                      <a:solidFill>
-                        <a:schemeClr val="tx1"/>
-                      </a:solidFill>
-                      <a:prstDash val="solid"/>
-                      <a:round/>
-                      <a:headEnd type="none" w="med" len="med"/>
-                      <a:tailEnd type="none" w="med" len="med"/>
-                    </a:lnB>
-                    <a:noFill/>
-                  </a:tcPr>
-                </a:tc>
-                <a:extLst>
-                  <a:ext uri="{0D108BD9-81ED-4DB2-BD59-A6C34878D82A}">
-                    <a16:rowId xmlns:a16="http://schemas.microsoft.com/office/drawing/2014/main" val="1045134656"/>
-                  </a:ext>
-                </a:extLst>
-              </a:tr>
-            </a:tbl>
-          </a:graphicData>
-        </a:graphic>
-      </p:graphicFrame>
-      <p:pic>
-        <p:nvPicPr>
-          <p:cNvPr id="5" name="Picture 4">
-            <a:extLst>
-              <a:ext uri="{FF2B5EF4-FFF2-40B4-BE49-F238E27FC236}">
-                <a16:creationId xmlns:a16="http://schemas.microsoft.com/office/drawing/2014/main" id="{D4F8D10C-0A0A-A211-9EE2-413A7BE17408}"/>
-              </a:ext>
-            </a:extLst>
-          </p:cNvPr>
-          <p:cNvPicPr>
-            <a:picLocks noChangeAspect="1"/>
-          </p:cNvPicPr>
-          <p:nvPr/>
-        </p:nvPicPr>
-        <p:blipFill>
-          <a:blip r:embed="rId2"/>
-          <a:stretch>
-            <a:fillRect/>
-          </a:stretch>
-        </p:blipFill>
-        <p:spPr>
-          <a:xfrm>
-            <a:off x="395652" y="1440873"/>
-            <a:ext cx="7670003" cy="4679377"/>
-          </a:xfrm>
-          <a:prstGeom prst="rect">
-            <a:avLst/>
-          </a:prstGeom>
-        </p:spPr>
-      </p:pic>
-    </p:spTree>
-    <p:extLst>
-      <p:ext uri="{BB962C8B-B14F-4D97-AF65-F5344CB8AC3E}">
-        <p14:creationId xmlns:p14="http://schemas.microsoft.com/office/powerpoint/2010/main" val="3478772804"/>
-      </p:ext>
-    </p:extLst>
-  </p:cSld>
-  <p:clrMapOvr>
-    <a:masterClrMapping/>
-  </p:clrMapOvr>
-</p:sld>
-</file>
-
-<file path=ppt/slides/slide8.xml><?xml version="1.0" encoding="utf-8"?>
-<p:sld xmlns:a="http://schemas.openxmlformats.org/drawingml/2006/main" xmlns:r="http://schemas.openxmlformats.org/officeDocument/2006/relationships" xmlns:p="http://schemas.openxmlformats.org/presentationml/2006/main">
-  <p:cSld>
-    <p:spTree>
-      <p:nvGrpSpPr>
-        <p:cNvPr id="1" name=""/>
-        <p:cNvGrpSpPr/>
-        <p:nvPr/>
-      </p:nvGrpSpPr>
-      <p:grpSpPr>
-        <a:xfrm>
-          <a:off x="0" y="0"/>
-          <a:ext cx="0" cy="0"/>
-          <a:chOff x="0" y="0"/>
-          <a:chExt cx="0" cy="0"/>
-        </a:xfrm>
-      </p:grpSpPr>
-      <p:sp>
-        <p:nvSpPr>
-          <p:cNvPr id="3" name="TextBox 2">
-            <a:extLst>
-              <a:ext uri="{FF2B5EF4-FFF2-40B4-BE49-F238E27FC236}">
-                <a16:creationId xmlns:a16="http://schemas.microsoft.com/office/drawing/2014/main" id="{7F5AFCD7-CF64-A7F6-B02F-987454D53E76}"/>
-              </a:ext>
-            </a:extLst>
-          </p:cNvPr>
-          <p:cNvSpPr txBox="1"/>
-          <p:nvPr/>
-        </p:nvSpPr>
-        <p:spPr>
-          <a:xfrm>
-            <a:off x="124051" y="102889"/>
-            <a:ext cx="11607874" cy="646331"/>
-          </a:xfrm>
-          <a:prstGeom prst="rect">
-            <a:avLst/>
-          </a:prstGeom>
-          <a:noFill/>
-        </p:spPr>
-        <p:txBody>
-          <a:bodyPr wrap="square">
-            <a:spAutoFit/>
-          </a:bodyPr>
-          <a:lstStyle/>
-          <a:p>
-            <a:pPr marL="342900" indent="-342900">
-              <a:buFont typeface="+mj-lt"/>
-              <a:buAutoNum type="arabicPeriod" startAt="5"/>
-            </a:pPr>
-            <a:r>
-              <a:rPr lang="en-GB" dirty="0"/>
-              <a:t>Change the type of actuator for HV0001 to a PA006A actuator type</a:t>
-            </a:r>
-          </a:p>
-          <a:p>
-            <a:pPr marL="800100" lvl="1" indent="-342900">
-              <a:buFont typeface="Arial" panose="020B0604020202020204" pitchFamily="34" charset="0"/>
-              <a:buChar char="•"/>
-            </a:pPr>
-            <a:r>
-              <a:rPr lang="en-GB" dirty="0"/>
-              <a:t>Retain </a:t>
-            </a:r>
-            <a:r>
-              <a:rPr lang="en-GB" dirty="0" err="1"/>
-              <a:t>PersistentID</a:t>
-            </a:r>
-            <a:r>
-              <a:rPr lang="en-GB" dirty="0"/>
-              <a:t> of original actuator</a:t>
+              <a:t>Modify the heat trace attribute on the segment</a:t>
             </a:r>
           </a:p>
         </p:txBody>
@@ -6899,7 +7380,7 @@
           <p:cNvPr id="4" name="Picture 3">
             <a:extLst>
               <a:ext uri="{FF2B5EF4-FFF2-40B4-BE49-F238E27FC236}">
-                <a16:creationId xmlns:a16="http://schemas.microsoft.com/office/drawing/2014/main" id="{3B43E670-A5E8-B4DD-B351-55FEFBB80D1B}"/>
+                <a16:creationId xmlns:a16="http://schemas.microsoft.com/office/drawing/2014/main" id="{F20F0A5E-4944-40AA-1B35-0CD00244C6CC}"/>
               </a:ext>
             </a:extLst>
           </p:cNvPr>
@@ -6916,217 +7397,8 @@
         </p:blipFill>
         <p:spPr>
           <a:xfrm>
-            <a:off x="464652" y="1541389"/>
-            <a:ext cx="7432439" cy="4528492"/>
-          </a:xfrm>
-          <a:prstGeom prst="rect">
-            <a:avLst/>
-          </a:prstGeom>
-        </p:spPr>
-      </p:pic>
-    </p:spTree>
-    <p:extLst>
-      <p:ext uri="{BB962C8B-B14F-4D97-AF65-F5344CB8AC3E}">
-        <p14:creationId xmlns:p14="http://schemas.microsoft.com/office/powerpoint/2010/main" val="1232242120"/>
-      </p:ext>
-    </p:extLst>
-  </p:cSld>
-  <p:clrMapOvr>
-    <a:masterClrMapping/>
-  </p:clrMapOvr>
-</p:sld>
-</file>
-
-<file path=ppt/slides/slide9.xml><?xml version="1.0" encoding="utf-8"?>
-<p:sld xmlns:a="http://schemas.openxmlformats.org/drawingml/2006/main" xmlns:r="http://schemas.openxmlformats.org/officeDocument/2006/relationships" xmlns:p="http://schemas.openxmlformats.org/presentationml/2006/main">
-  <p:cSld>
-    <p:spTree>
-      <p:nvGrpSpPr>
-        <p:cNvPr id="1" name=""/>
-        <p:cNvGrpSpPr/>
-        <p:nvPr/>
-      </p:nvGrpSpPr>
-      <p:grpSpPr>
-        <a:xfrm>
-          <a:off x="0" y="0"/>
-          <a:ext cx="0" cy="0"/>
-          <a:chOff x="0" y="0"/>
-          <a:chExt cx="0" cy="0"/>
-        </a:xfrm>
-      </p:grpSpPr>
-      <p:sp>
-        <p:nvSpPr>
-          <p:cNvPr id="3" name="TextBox 2">
-            <a:extLst>
-              <a:ext uri="{FF2B5EF4-FFF2-40B4-BE49-F238E27FC236}">
-                <a16:creationId xmlns:a16="http://schemas.microsoft.com/office/drawing/2014/main" id="{7F5AFCD7-CF64-A7F6-B02F-987454D53E76}"/>
-              </a:ext>
-            </a:extLst>
-          </p:cNvPr>
-          <p:cNvSpPr txBox="1"/>
-          <p:nvPr/>
-        </p:nvSpPr>
-        <p:spPr>
-          <a:xfrm>
-            <a:off x="124051" y="102889"/>
-            <a:ext cx="11607874" cy="646331"/>
-          </a:xfrm>
-          <a:prstGeom prst="rect">
-            <a:avLst/>
-          </a:prstGeom>
-          <a:noFill/>
-        </p:spPr>
-        <p:txBody>
-          <a:bodyPr wrap="square">
-            <a:spAutoFit/>
-          </a:bodyPr>
-          <a:lstStyle/>
-          <a:p>
-            <a:pPr marL="342900" indent="-342900">
-              <a:buFont typeface="+mj-lt"/>
-              <a:buAutoNum type="arabicPeriod" startAt="6"/>
-            </a:pPr>
-            <a:r>
-              <a:rPr lang="en-GB" dirty="0"/>
-              <a:t>Add heat tracing to </a:t>
-            </a:r>
-            <a:r>
-              <a:rPr lang="en-GB" dirty="0" err="1"/>
-              <a:t>PipingNetworkSegment</a:t>
-            </a:r>
-            <a:r>
-              <a:rPr lang="en-GB" dirty="0"/>
-              <a:t> D-20L A- PL-AS200-</a:t>
-            </a:r>
-          </a:p>
-          <a:p>
-            <a:pPr marL="800100" lvl="1" indent="-342900">
-              <a:buFont typeface="Arial" panose="020B0604020202020204" pitchFamily="34" charset="0"/>
-              <a:buChar char="•"/>
-            </a:pPr>
-            <a:r>
-              <a:rPr lang="en-GB" dirty="0"/>
-              <a:t>Modify the heat trace attribute on the segment</a:t>
-            </a:r>
-          </a:p>
-        </p:txBody>
-      </p:sp>
-      <p:graphicFrame>
-        <p:nvGraphicFramePr>
-          <p:cNvPr id="7" name="Table 7">
-            <a:extLst>
-              <a:ext uri="{FF2B5EF4-FFF2-40B4-BE49-F238E27FC236}">
-                <a16:creationId xmlns:a16="http://schemas.microsoft.com/office/drawing/2014/main" id="{122A675D-8A6B-1BF2-70BB-B5522B02FF65}"/>
-              </a:ext>
-            </a:extLst>
-          </p:cNvPr>
-          <p:cNvGraphicFramePr>
-            <a:graphicFrameLocks noGrp="1"/>
-          </p:cNvGraphicFramePr>
-          <p:nvPr/>
-        </p:nvGraphicFramePr>
-        <p:xfrm>
-          <a:off x="307975" y="1191319"/>
-          <a:ext cx="7807325" cy="5257106"/>
-        </p:xfrm>
-        <a:graphic>
-          <a:graphicData uri="http://schemas.openxmlformats.org/drawingml/2006/table">
-            <a:tbl>
-              <a:tblPr firstRow="1" bandRow="1">
-                <a:tableStyleId>{5C22544A-7EE6-4342-B048-85BDC9FD1C3A}</a:tableStyleId>
-              </a:tblPr>
-              <a:tblGrid>
-                <a:gridCol w="7807325">
-                  <a:extLst>
-                    <a:ext uri="{9D8B030D-6E8A-4147-A177-3AD203B41FA5}">
-                      <a16:colId xmlns:a16="http://schemas.microsoft.com/office/drawing/2014/main" val="3422904110"/>
-                    </a:ext>
-                  </a:extLst>
-                </a:gridCol>
-              </a:tblGrid>
-              <a:tr h="5257106">
-                <a:tc>
-                  <a:txBody>
-                    <a:bodyPr/>
-                    <a:lstStyle/>
-                    <a:p>
-                      <a:endParaRPr lang="en-GB" dirty="0"/>
-                    </a:p>
-                  </a:txBody>
-                  <a:tcPr>
-                    <a:lnL w="12700" cap="flat" cmpd="sng" algn="ctr">
-                      <a:solidFill>
-                        <a:schemeClr val="tx1"/>
-                      </a:solidFill>
-                      <a:prstDash val="solid"/>
-                      <a:round/>
-                      <a:headEnd type="none" w="med" len="med"/>
-                      <a:tailEnd type="none" w="med" len="med"/>
-                    </a:lnL>
-                    <a:lnR w="12700" cap="flat" cmpd="sng" algn="ctr">
-                      <a:solidFill>
-                        <a:schemeClr val="tx1"/>
-                      </a:solidFill>
-                      <a:prstDash val="solid"/>
-                      <a:round/>
-                      <a:headEnd type="none" w="med" len="med"/>
-                      <a:tailEnd type="none" w="med" len="med"/>
-                    </a:lnR>
-                    <a:lnT w="12700" cap="flat" cmpd="sng" algn="ctr">
-                      <a:solidFill>
-                        <a:schemeClr val="tx1"/>
-                      </a:solidFill>
-                      <a:prstDash val="solid"/>
-                      <a:round/>
-                      <a:headEnd type="none" w="med" len="med"/>
-                      <a:tailEnd type="none" w="med" len="med"/>
-                    </a:lnT>
-                    <a:lnB w="12700" cap="flat" cmpd="sng" algn="ctr">
-                      <a:solidFill>
-                        <a:schemeClr val="tx1"/>
-                      </a:solidFill>
-                      <a:prstDash val="solid"/>
-                      <a:round/>
-                      <a:headEnd type="none" w="med" len="med"/>
-                      <a:tailEnd type="none" w="med" len="med"/>
-                    </a:lnB>
-                    <a:noFill/>
-                  </a:tcPr>
-                </a:tc>
-                <a:extLst>
-                  <a:ext uri="{0D108BD9-81ED-4DB2-BD59-A6C34878D82A}">
-                    <a16:rowId xmlns:a16="http://schemas.microsoft.com/office/drawing/2014/main" val="1045134656"/>
-                  </a:ext>
-                </a:extLst>
-              </a:tr>
-            </a:tbl>
-          </a:graphicData>
-        </a:graphic>
-      </p:graphicFrame>
-      <p:pic>
-        <p:nvPicPr>
-          <p:cNvPr id="5" name="Picture 4">
-            <a:extLst>
-              <a:ext uri="{FF2B5EF4-FFF2-40B4-BE49-F238E27FC236}">
-                <a16:creationId xmlns:a16="http://schemas.microsoft.com/office/drawing/2014/main" id="{D5647089-CEE8-A1E7-3A06-4AED218A8942}"/>
-              </a:ext>
-            </a:extLst>
-          </p:cNvPr>
-          <p:cNvPicPr>
-            <a:picLocks noChangeAspect="1"/>
-          </p:cNvPicPr>
-          <p:nvPr/>
-        </p:nvPicPr>
-        <p:blipFill>
-          <a:blip r:embed="rId2"/>
-          <a:stretch>
-            <a:fillRect/>
-          </a:stretch>
-        </p:blipFill>
-        <p:spPr>
-          <a:xfrm>
-            <a:off x="612603" y="1627026"/>
-            <a:ext cx="7198067" cy="4385692"/>
+            <a:off x="487843" y="1548159"/>
+            <a:ext cx="7447587" cy="4543425"/>
           </a:xfrm>
           <a:prstGeom prst="rect">
             <a:avLst/>

--- a/Blueprint/UseCases_PersistenID.pptx
+++ b/Blueprint/UseCases_PersistenID.pptx
@@ -994,7 +994,7 @@
           <a:p>
             <a:fld id="{29BFE5FB-EE99-4E69-B2F7-C156D52DE4BD}" type="datetimeFigureOut">
               <a:rPr lang="en-GB" smtClean="0"/>
-              <a:t>03/11/2025</a:t>
+              <a:t>04/11/2025</a:t>
             </a:fld>
             <a:endParaRPr lang="en-GB"/>
           </a:p>
@@ -1194,7 +1194,7 @@
           <a:p>
             <a:fld id="{29BFE5FB-EE99-4E69-B2F7-C156D52DE4BD}" type="datetimeFigureOut">
               <a:rPr lang="en-GB" smtClean="0"/>
-              <a:t>03/11/2025</a:t>
+              <a:t>04/11/2025</a:t>
             </a:fld>
             <a:endParaRPr lang="en-GB"/>
           </a:p>
@@ -1404,7 +1404,7 @@
           <a:p>
             <a:fld id="{29BFE5FB-EE99-4E69-B2F7-C156D52DE4BD}" type="datetimeFigureOut">
               <a:rPr lang="en-GB" smtClean="0"/>
-              <a:t>03/11/2025</a:t>
+              <a:t>04/11/2025</a:t>
             </a:fld>
             <a:endParaRPr lang="en-GB"/>
           </a:p>
@@ -1604,7 +1604,7 @@
           <a:p>
             <a:fld id="{29BFE5FB-EE99-4E69-B2F7-C156D52DE4BD}" type="datetimeFigureOut">
               <a:rPr lang="en-GB" smtClean="0"/>
-              <a:t>03/11/2025</a:t>
+              <a:t>04/11/2025</a:t>
             </a:fld>
             <a:endParaRPr lang="en-GB"/>
           </a:p>
@@ -1880,7 +1880,7 @@
           <a:p>
             <a:fld id="{29BFE5FB-EE99-4E69-B2F7-C156D52DE4BD}" type="datetimeFigureOut">
               <a:rPr lang="en-GB" smtClean="0"/>
-              <a:t>03/11/2025</a:t>
+              <a:t>04/11/2025</a:t>
             </a:fld>
             <a:endParaRPr lang="en-GB"/>
           </a:p>
@@ -2148,7 +2148,7 @@
           <a:p>
             <a:fld id="{29BFE5FB-EE99-4E69-B2F7-C156D52DE4BD}" type="datetimeFigureOut">
               <a:rPr lang="en-GB" smtClean="0"/>
-              <a:t>03/11/2025</a:t>
+              <a:t>04/11/2025</a:t>
             </a:fld>
             <a:endParaRPr lang="en-GB"/>
           </a:p>
@@ -2563,7 +2563,7 @@
           <a:p>
             <a:fld id="{29BFE5FB-EE99-4E69-B2F7-C156D52DE4BD}" type="datetimeFigureOut">
               <a:rPr lang="en-GB" smtClean="0"/>
-              <a:t>03/11/2025</a:t>
+              <a:t>04/11/2025</a:t>
             </a:fld>
             <a:endParaRPr lang="en-GB"/>
           </a:p>
@@ -2705,7 +2705,7 @@
           <a:p>
             <a:fld id="{29BFE5FB-EE99-4E69-B2F7-C156D52DE4BD}" type="datetimeFigureOut">
               <a:rPr lang="en-GB" smtClean="0"/>
-              <a:t>03/11/2025</a:t>
+              <a:t>04/11/2025</a:t>
             </a:fld>
             <a:endParaRPr lang="en-GB"/>
           </a:p>
@@ -2818,7 +2818,7 @@
           <a:p>
             <a:fld id="{29BFE5FB-EE99-4E69-B2F7-C156D52DE4BD}" type="datetimeFigureOut">
               <a:rPr lang="en-GB" smtClean="0"/>
-              <a:t>03/11/2025</a:t>
+              <a:t>04/11/2025</a:t>
             </a:fld>
             <a:endParaRPr lang="en-GB"/>
           </a:p>
@@ -3131,7 +3131,7 @@
           <a:p>
             <a:fld id="{29BFE5FB-EE99-4E69-B2F7-C156D52DE4BD}" type="datetimeFigureOut">
               <a:rPr lang="en-GB" smtClean="0"/>
-              <a:t>03/11/2025</a:t>
+              <a:t>04/11/2025</a:t>
             </a:fld>
             <a:endParaRPr lang="en-GB"/>
           </a:p>
@@ -3420,7 +3420,7 @@
           <a:p>
             <a:fld id="{29BFE5FB-EE99-4E69-B2F7-C156D52DE4BD}" type="datetimeFigureOut">
               <a:rPr lang="en-GB" smtClean="0"/>
-              <a:t>03/11/2025</a:t>
+              <a:t>04/11/2025</a:t>
             </a:fld>
             <a:endParaRPr lang="en-GB"/>
           </a:p>
@@ -3663,7 +3663,7 @@
           <a:p>
             <a:fld id="{29BFE5FB-EE99-4E69-B2F7-C156D52DE4BD}" type="datetimeFigureOut">
               <a:rPr lang="en-GB" smtClean="0"/>
-              <a:t>03/11/2025</a:t>
+              <a:t>04/11/2025</a:t>
             </a:fld>
             <a:endParaRPr lang="en-GB"/>
           </a:p>
@@ -5508,7 +5508,7 @@
         <p:spPr>
           <a:xfrm>
             <a:off x="8531794" y="1166068"/>
-            <a:ext cx="3416300" cy="646331"/>
+            <a:ext cx="3416300" cy="1200329"/>
           </a:xfrm>
           <a:prstGeom prst="rect">
             <a:avLst/>
@@ -5544,6 +5544,23 @@
             <a:r>
               <a:rPr lang="en-GB" dirty="0"/>
               <a:t> internal</a:t>
+            </a:r>
+          </a:p>
+          <a:p>
+            <a:pPr marL="342900" indent="-342900">
+              <a:buAutoNum type="arabicPeriod"/>
+            </a:pPr>
+            <a:r>
+              <a:rPr lang="en-GB" dirty="0"/>
+              <a:t>Change </a:t>
+            </a:r>
+            <a:r>
+              <a:rPr lang="en-GB" dirty="0" err="1"/>
+              <a:t>NormalPosition</a:t>
+            </a:r>
+            <a:r>
+              <a:rPr lang="en-GB" dirty="0"/>
+              <a:t> for valve D-VG20-0001 to ‘NC’</a:t>
             </a:r>
           </a:p>
         </p:txBody>
@@ -5760,7 +5777,7 @@
         <p:spPr>
           <a:xfrm>
             <a:off x="8531794" y="1166068"/>
-            <a:ext cx="3416300" cy="923330"/>
+            <a:ext cx="3416300" cy="1200329"/>
           </a:xfrm>
           <a:prstGeom prst="rect">
             <a:avLst/>
@@ -5797,7 +5814,7 @@
             </a:pPr>
             <a:r>
               <a:rPr lang="en-GB" dirty="0"/>
-              <a:t>Add signal line off page</a:t>
+              <a:t>Add NOA3 continuation drawing</a:t>
             </a:r>
           </a:p>
         </p:txBody>
@@ -5896,10 +5913,10 @@
       </p:graphicFrame>
       <p:pic>
         <p:nvPicPr>
-          <p:cNvPr id="9" name="Picture 8">
-            <a:extLst>
-              <a:ext uri="{FF2B5EF4-FFF2-40B4-BE49-F238E27FC236}">
-                <a16:creationId xmlns:a16="http://schemas.microsoft.com/office/drawing/2014/main" id="{ECBA5D5F-8F1F-AE29-B7E6-CCA012FAE2CC}"/>
+          <p:cNvPr id="5" name="Picture 4">
+            <a:extLst>
+              <a:ext uri="{FF2B5EF4-FFF2-40B4-BE49-F238E27FC236}">
+                <a16:creationId xmlns:a16="http://schemas.microsoft.com/office/drawing/2014/main" id="{77DC9B75-51FB-EBE1-8BD0-350315EA42E8}"/>
               </a:ext>
             </a:extLst>
           </p:cNvPr>
@@ -5916,8 +5933,8 @@
         </p:blipFill>
         <p:spPr>
           <a:xfrm>
-            <a:off x="387509" y="1490321"/>
-            <a:ext cx="7648255" cy="4659101"/>
+            <a:off x="652932" y="1627733"/>
+            <a:ext cx="7117410" cy="4340994"/>
           </a:xfrm>
           <a:prstGeom prst="rect">
             <a:avLst/>
@@ -5990,11 +6007,11 @@
           <a:p>
             <a:pPr marL="342900" indent="-342900">
               <a:buFont typeface="+mj-lt"/>
-              <a:buAutoNum type="arabicPeriod" startAt="11"/>
+              <a:buAutoNum type="arabicPeriod" startAt="10"/>
             </a:pPr>
             <a:r>
               <a:rPr lang="en-GB" dirty="0"/>
-              <a:t>Add driver for pump. Add </a:t>
+              <a:t>Add pump driver. Add </a:t>
             </a:r>
             <a:r>
               <a:rPr lang="en-GB" dirty="0" err="1"/>
@@ -6002,7 +6019,15 @@
             </a:r>
             <a:r>
               <a:rPr lang="en-GB" dirty="0"/>
-              <a:t> internal.</a:t>
+              <a:t> internal. Change </a:t>
+            </a:r>
+            <a:r>
+              <a:rPr lang="en-GB" dirty="0" err="1"/>
+              <a:t>NormalPosition</a:t>
+            </a:r>
+            <a:r>
+              <a:rPr lang="en-GB" dirty="0"/>
+              <a:t> for valve D-VG20-0001 to ‘NC’</a:t>
             </a:r>
           </a:p>
           <a:p>
@@ -6012,7 +6037,7 @@
             </a:pPr>
             <a:r>
               <a:rPr lang="en-GB" dirty="0"/>
-              <a:t>Add Mount-on level element (Remove N04) &amp; Add signal line off page</a:t>
+              <a:t>Add Mount-on level element (Remove N04) &amp; Add NOA3 continuation drawing</a:t>
             </a:r>
           </a:p>
           <a:p>

--- a/Blueprint/UseCases_PersistenID.pptx
+++ b/Blueprint/UseCases_PersistenID.pptx
@@ -20,6 +20,7 @@
     <p:sldId id="278" r:id="rId14"/>
     <p:sldId id="280" r:id="rId15"/>
     <p:sldId id="281" r:id="rId16"/>
+    <p:sldId id="282" r:id="rId17"/>
   </p:sldIdLst>
   <p:sldSz cx="12192000" cy="6858000"/>
   <p:notesSz cx="6858000" cy="9144000"/>
@@ -994,7 +995,7 @@
           <a:p>
             <a:fld id="{29BFE5FB-EE99-4E69-B2F7-C156D52DE4BD}" type="datetimeFigureOut">
               <a:rPr lang="en-GB" smtClean="0"/>
-              <a:t>04/11/2025</a:t>
+              <a:t>17/12/2025</a:t>
             </a:fld>
             <a:endParaRPr lang="en-GB"/>
           </a:p>
@@ -1194,7 +1195,7 @@
           <a:p>
             <a:fld id="{29BFE5FB-EE99-4E69-B2F7-C156D52DE4BD}" type="datetimeFigureOut">
               <a:rPr lang="en-GB" smtClean="0"/>
-              <a:t>04/11/2025</a:t>
+              <a:t>17/12/2025</a:t>
             </a:fld>
             <a:endParaRPr lang="en-GB"/>
           </a:p>
@@ -1404,7 +1405,7 @@
           <a:p>
             <a:fld id="{29BFE5FB-EE99-4E69-B2F7-C156D52DE4BD}" type="datetimeFigureOut">
               <a:rPr lang="en-GB" smtClean="0"/>
-              <a:t>04/11/2025</a:t>
+              <a:t>17/12/2025</a:t>
             </a:fld>
             <a:endParaRPr lang="en-GB"/>
           </a:p>
@@ -1604,7 +1605,7 @@
           <a:p>
             <a:fld id="{29BFE5FB-EE99-4E69-B2F7-C156D52DE4BD}" type="datetimeFigureOut">
               <a:rPr lang="en-GB" smtClean="0"/>
-              <a:t>04/11/2025</a:t>
+              <a:t>17/12/2025</a:t>
             </a:fld>
             <a:endParaRPr lang="en-GB"/>
           </a:p>
@@ -1880,7 +1881,7 @@
           <a:p>
             <a:fld id="{29BFE5FB-EE99-4E69-B2F7-C156D52DE4BD}" type="datetimeFigureOut">
               <a:rPr lang="en-GB" smtClean="0"/>
-              <a:t>04/11/2025</a:t>
+              <a:t>17/12/2025</a:t>
             </a:fld>
             <a:endParaRPr lang="en-GB"/>
           </a:p>
@@ -2148,7 +2149,7 @@
           <a:p>
             <a:fld id="{29BFE5FB-EE99-4E69-B2F7-C156D52DE4BD}" type="datetimeFigureOut">
               <a:rPr lang="en-GB" smtClean="0"/>
-              <a:t>04/11/2025</a:t>
+              <a:t>17/12/2025</a:t>
             </a:fld>
             <a:endParaRPr lang="en-GB"/>
           </a:p>
@@ -2563,7 +2564,7 @@
           <a:p>
             <a:fld id="{29BFE5FB-EE99-4E69-B2F7-C156D52DE4BD}" type="datetimeFigureOut">
               <a:rPr lang="en-GB" smtClean="0"/>
-              <a:t>04/11/2025</a:t>
+              <a:t>17/12/2025</a:t>
             </a:fld>
             <a:endParaRPr lang="en-GB"/>
           </a:p>
@@ -2705,7 +2706,7 @@
           <a:p>
             <a:fld id="{29BFE5FB-EE99-4E69-B2F7-C156D52DE4BD}" type="datetimeFigureOut">
               <a:rPr lang="en-GB" smtClean="0"/>
-              <a:t>04/11/2025</a:t>
+              <a:t>17/12/2025</a:t>
             </a:fld>
             <a:endParaRPr lang="en-GB"/>
           </a:p>
@@ -2818,7 +2819,7 @@
           <a:p>
             <a:fld id="{29BFE5FB-EE99-4E69-B2F7-C156D52DE4BD}" type="datetimeFigureOut">
               <a:rPr lang="en-GB" smtClean="0"/>
-              <a:t>04/11/2025</a:t>
+              <a:t>17/12/2025</a:t>
             </a:fld>
             <a:endParaRPr lang="en-GB"/>
           </a:p>
@@ -3131,7 +3132,7 @@
           <a:p>
             <a:fld id="{29BFE5FB-EE99-4E69-B2F7-C156D52DE4BD}" type="datetimeFigureOut">
               <a:rPr lang="en-GB" smtClean="0"/>
-              <a:t>04/11/2025</a:t>
+              <a:t>17/12/2025</a:t>
             </a:fld>
             <a:endParaRPr lang="en-GB"/>
           </a:p>
@@ -3420,7 +3421,7 @@
           <a:p>
             <a:fld id="{29BFE5FB-EE99-4E69-B2F7-C156D52DE4BD}" type="datetimeFigureOut">
               <a:rPr lang="en-GB" smtClean="0"/>
-              <a:t>04/11/2025</a:t>
+              <a:t>17/12/2025</a:t>
             </a:fld>
             <a:endParaRPr lang="en-GB"/>
           </a:p>
@@ -3663,7 +3664,7 @@
           <a:p>
             <a:fld id="{29BFE5FB-EE99-4E69-B2F7-C156D52DE4BD}" type="datetimeFigureOut">
               <a:rPr lang="en-GB" smtClean="0"/>
-              <a:t>04/11/2025</a:t>
+              <a:t>17/12/2025</a:t>
             </a:fld>
             <a:endParaRPr lang="en-GB"/>
           </a:p>
@@ -4600,15 +4601,20 @@
           <p:nvPr/>
         </p:nvPicPr>
         <p:blipFill>
-          <a:blip r:embed="rId2"/>
-          <a:stretch>
-            <a:fillRect/>
-          </a:stretch>
+          <a:blip r:embed="rId2">
+            <a:extLst>
+              <a:ext uri="{28A0092B-C50C-407E-A947-70E740481C1C}">
+                <a14:useLocalDpi xmlns:a14="http://schemas.microsoft.com/office/drawing/2010/main" val="0"/>
+              </a:ext>
+            </a:extLst>
+          </a:blip>
+          <a:srcRect/>
+          <a:stretch/>
         </p:blipFill>
         <p:spPr>
           <a:xfrm>
-            <a:off x="517687" y="1638299"/>
-            <a:ext cx="7236952" cy="4400551"/>
+            <a:off x="396664" y="1440873"/>
+            <a:ext cx="7605946" cy="4876800"/>
           </a:xfrm>
           <a:prstGeom prst="rect">
             <a:avLst/>
@@ -4822,7 +4828,7 @@
         <p:spPr>
           <a:xfrm>
             <a:off x="8448675" y="1204933"/>
-            <a:ext cx="3416300" cy="4801314"/>
+            <a:ext cx="3416300" cy="1754326"/>
           </a:xfrm>
           <a:prstGeom prst="rect">
             <a:avLst/>
@@ -4854,7 +4860,7 @@
             </a:pPr>
             <a:r>
               <a:rPr lang="en-GB" dirty="0"/>
-              <a:t>Top break: use 2 </a:t>
+              <a:t>Top break: use </a:t>
             </a:r>
             <a:r>
               <a:rPr lang="en-GB" dirty="0" err="1"/>
@@ -4862,37 +4868,19 @@
             </a:r>
             <a:r>
               <a:rPr lang="en-GB" dirty="0"/>
-              <a:t> class elements 1 for each break type. 2 separate symbols placed up on each other.</a:t>
-            </a:r>
-          </a:p>
-          <a:p>
-            <a:pPr marL="342900" indent="-342900">
-              <a:buAutoNum type="arabicPeriod"/>
-            </a:pPr>
+              <a:t> class elements and separate </a:t>
+            </a:r>
+            <a:r>
+              <a:rPr lang="en-GB" dirty="0" err="1"/>
+              <a:t>LogicalBreak</a:t>
+            </a:r>
             <a:r>
               <a:rPr lang="en-GB" dirty="0"/>
-              <a:t>Bottom break: use 1 </a:t>
-            </a:r>
-            <a:r>
-              <a:rPr lang="en-GB" dirty="0" err="1"/>
-              <a:t>PropertyBreak</a:t>
-            </a:r>
-            <a:r>
-              <a:rPr lang="en-GB" dirty="0"/>
-              <a:t> class element for both break types. 1 symbol used for the double break.</a:t>
-            </a:r>
-          </a:p>
-          <a:p>
-            <a:pPr marL="342900" indent="-342900">
-              <a:buAutoNum type="arabicPeriod"/>
-            </a:pPr>
+              <a:t> class elements for each break type.</a:t>
+            </a:r>
+          </a:p>
+          <a:p>
             <a:endParaRPr lang="en-GB" dirty="0"/>
-          </a:p>
-          <a:p>
-            <a:r>
-              <a:rPr lang="en-GB" dirty="0"/>
-              <a:t>In each case the BreakValue1 attribute will be used to transfer the text shown on the left-hand side of the break, BreakValue2 will transfer the text on the right-hand side.</a:t>
-            </a:r>
           </a:p>
         </p:txBody>
       </p:sp>
@@ -4911,15 +4899,20 @@
           <p:nvPr/>
         </p:nvPicPr>
         <p:blipFill>
-          <a:blip r:embed="rId2"/>
-          <a:stretch>
-            <a:fillRect/>
-          </a:stretch>
+          <a:blip r:embed="rId2">
+            <a:extLst>
+              <a:ext uri="{28A0092B-C50C-407E-A947-70E740481C1C}">
+                <a14:useLocalDpi xmlns:a14="http://schemas.microsoft.com/office/drawing/2010/main" val="0"/>
+              </a:ext>
+            </a:extLst>
+          </a:blip>
+          <a:srcRect/>
+          <a:stretch/>
         </p:blipFill>
         <p:spPr>
           <a:xfrm>
-            <a:off x="380605" y="1614062"/>
-            <a:ext cx="7662063" cy="4662913"/>
+            <a:off x="633803" y="1477818"/>
+            <a:ext cx="7364743" cy="4799157"/>
           </a:xfrm>
           <a:prstGeom prst="rect">
             <a:avLst/>
@@ -5102,15 +5095,20 @@
           <p:nvPr/>
         </p:nvPicPr>
         <p:blipFill>
-          <a:blip r:embed="rId2"/>
-          <a:stretch>
-            <a:fillRect/>
-          </a:stretch>
+          <a:blip r:embed="rId2">
+            <a:extLst>
+              <a:ext uri="{28A0092B-C50C-407E-A947-70E740481C1C}">
+                <a14:useLocalDpi xmlns:a14="http://schemas.microsoft.com/office/drawing/2010/main" val="0"/>
+              </a:ext>
+            </a:extLst>
+          </a:blip>
+          <a:srcRect/>
+          <a:stretch/>
         </p:blipFill>
         <p:spPr>
           <a:xfrm>
-            <a:off x="643284" y="1650340"/>
-            <a:ext cx="7136705" cy="4339063"/>
+            <a:off x="494112" y="1385455"/>
+            <a:ext cx="7433110" cy="4867563"/>
           </a:xfrm>
           <a:prstGeom prst="rect">
             <a:avLst/>
@@ -5395,15 +5393,20 @@
           <p:nvPr/>
         </p:nvPicPr>
         <p:blipFill>
-          <a:blip r:embed="rId2"/>
-          <a:stretch>
-            <a:fillRect/>
-          </a:stretch>
+          <a:blip r:embed="rId2">
+            <a:extLst>
+              <a:ext uri="{28A0092B-C50C-407E-A947-70E740481C1C}">
+                <a14:useLocalDpi xmlns:a14="http://schemas.microsoft.com/office/drawing/2010/main" val="0"/>
+              </a:ext>
+            </a:extLst>
+          </a:blip>
+          <a:srcRect/>
+          <a:stretch/>
         </p:blipFill>
         <p:spPr>
           <a:xfrm>
-            <a:off x="478482" y="1433646"/>
-            <a:ext cx="7414770" cy="4519479"/>
+            <a:off x="452582" y="1258301"/>
+            <a:ext cx="7544230" cy="4920825"/>
           </a:xfrm>
           <a:prstGeom prst="rect">
             <a:avLst/>
@@ -5672,15 +5675,20 @@
           <p:nvPr/>
         </p:nvPicPr>
         <p:blipFill>
-          <a:blip r:embed="rId2"/>
-          <a:stretch>
-            <a:fillRect/>
-          </a:stretch>
+          <a:blip r:embed="rId2">
+            <a:extLst>
+              <a:ext uri="{28A0092B-C50C-407E-A947-70E740481C1C}">
+                <a14:useLocalDpi xmlns:a14="http://schemas.microsoft.com/office/drawing/2010/main" val="0"/>
+              </a:ext>
+            </a:extLst>
+          </a:blip>
+          <a:srcRect/>
+          <a:stretch/>
         </p:blipFill>
         <p:spPr>
           <a:xfrm>
-            <a:off x="628216" y="1660019"/>
-            <a:ext cx="7187497" cy="4384373"/>
+            <a:off x="429287" y="1422401"/>
+            <a:ext cx="7496846" cy="4802908"/>
           </a:xfrm>
           <a:prstGeom prst="rect">
             <a:avLst/>
@@ -5926,15 +5934,20 @@
           <p:nvPr/>
         </p:nvPicPr>
         <p:blipFill>
-          <a:blip r:embed="rId2"/>
-          <a:stretch>
-            <a:fillRect/>
-          </a:stretch>
+          <a:blip r:embed="rId2">
+            <a:extLst>
+              <a:ext uri="{28A0092B-C50C-407E-A947-70E740481C1C}">
+                <a14:useLocalDpi xmlns:a14="http://schemas.microsoft.com/office/drawing/2010/main" val="0"/>
+              </a:ext>
+            </a:extLst>
+          </a:blip>
+          <a:srcRect/>
+          <a:stretch/>
         </p:blipFill>
         <p:spPr>
           <a:xfrm>
-            <a:off x="652932" y="1627733"/>
-            <a:ext cx="7117410" cy="4340994"/>
+            <a:off x="369111" y="1394691"/>
+            <a:ext cx="7545491" cy="4719782"/>
           </a:xfrm>
           <a:prstGeom prst="rect">
             <a:avLst/>
@@ -5945,6 +5958,270 @@
     <p:extLst>
       <p:ext uri="{BB962C8B-B14F-4D97-AF65-F5344CB8AC3E}">
         <p14:creationId xmlns:p14="http://schemas.microsoft.com/office/powerpoint/2010/main" val="2221858855"/>
+      </p:ext>
+    </p:extLst>
+  </p:cSld>
+  <p:clrMapOvr>
+    <a:masterClrMapping/>
+  </p:clrMapOvr>
+</p:sld>
+</file>
+
+<file path=ppt/slides/slide16.xml><?xml version="1.0" encoding="utf-8"?>
+<p:sld xmlns:a="http://schemas.openxmlformats.org/drawingml/2006/main" xmlns:r="http://schemas.openxmlformats.org/officeDocument/2006/relationships" xmlns:p="http://schemas.openxmlformats.org/presentationml/2006/main">
+  <p:cSld>
+    <p:spTree>
+      <p:nvGrpSpPr>
+        <p:cNvPr id="1" name="">
+          <a:extLst>
+            <a:ext uri="{FF2B5EF4-FFF2-40B4-BE49-F238E27FC236}">
+              <a16:creationId xmlns:a16="http://schemas.microsoft.com/office/drawing/2014/main" id="{8CF0B7A1-9B73-AAAF-EB3B-91232CC58FFD}"/>
+            </a:ext>
+          </a:extLst>
+        </p:cNvPr>
+        <p:cNvGrpSpPr/>
+        <p:nvPr/>
+      </p:nvGrpSpPr>
+      <p:grpSpPr>
+        <a:xfrm>
+          <a:off x="0" y="0"/>
+          <a:ext cx="0" cy="0"/>
+          <a:chOff x="0" y="0"/>
+          <a:chExt cx="0" cy="0"/>
+        </a:xfrm>
+      </p:grpSpPr>
+      <p:sp>
+        <p:nvSpPr>
+          <p:cNvPr id="3" name="TextBox 2">
+            <a:extLst>
+              <a:ext uri="{FF2B5EF4-FFF2-40B4-BE49-F238E27FC236}">
+                <a16:creationId xmlns:a16="http://schemas.microsoft.com/office/drawing/2014/main" id="{478D56CB-9378-0514-46C5-9F19A98F0B5B}"/>
+              </a:ext>
+            </a:extLst>
+          </p:cNvPr>
+          <p:cNvSpPr txBox="1"/>
+          <p:nvPr/>
+        </p:nvSpPr>
+        <p:spPr>
+          <a:xfrm>
+            <a:off x="124051" y="102889"/>
+            <a:ext cx="11607874" cy="369332"/>
+          </a:xfrm>
+          <a:prstGeom prst="rect">
+            <a:avLst/>
+          </a:prstGeom>
+          <a:noFill/>
+        </p:spPr>
+        <p:txBody>
+          <a:bodyPr wrap="square">
+            <a:spAutoFit/>
+          </a:bodyPr>
+          <a:lstStyle/>
+          <a:p>
+            <a:pPr marL="342900" indent="-342900">
+              <a:buFont typeface="+mj-lt"/>
+              <a:buAutoNum type="arabicPeriod" startAt="13"/>
+            </a:pPr>
+            <a:r>
+              <a:rPr lang="en-GB" dirty="0"/>
+              <a:t>Add </a:t>
+            </a:r>
+            <a:r>
+              <a:rPr lang="en-GB" dirty="0" err="1"/>
+              <a:t>CustomEquipmentPackage</a:t>
+            </a:r>
+            <a:endParaRPr lang="en-GB" dirty="0"/>
+          </a:p>
+        </p:txBody>
+      </p:sp>
+      <p:sp>
+        <p:nvSpPr>
+          <p:cNvPr id="6" name="TextBox 5">
+            <a:extLst>
+              <a:ext uri="{FF2B5EF4-FFF2-40B4-BE49-F238E27FC236}">
+                <a16:creationId xmlns:a16="http://schemas.microsoft.com/office/drawing/2014/main" id="{8D72DF82-DB79-73F7-E853-B796368B5685}"/>
+              </a:ext>
+            </a:extLst>
+          </p:cNvPr>
+          <p:cNvSpPr txBox="1"/>
+          <p:nvPr/>
+        </p:nvSpPr>
+        <p:spPr>
+          <a:xfrm>
+            <a:off x="8531794" y="1166068"/>
+            <a:ext cx="3416300" cy="923330"/>
+          </a:xfrm>
+          <a:prstGeom prst="rect">
+            <a:avLst/>
+          </a:prstGeom>
+          <a:noFill/>
+        </p:spPr>
+        <p:txBody>
+          <a:bodyPr wrap="square" rtlCol="0">
+            <a:spAutoFit/>
+          </a:bodyPr>
+          <a:lstStyle/>
+          <a:p>
+            <a:pPr marL="342900" indent="-342900">
+              <a:buAutoNum type="arabicPeriod"/>
+            </a:pPr>
+            <a:r>
+              <a:rPr lang="en-GB" dirty="0"/>
+              <a:t>Add </a:t>
+            </a:r>
+            <a:r>
+              <a:rPr lang="en-GB" dirty="0" err="1"/>
+              <a:t>CustomEquipmentPackage</a:t>
+            </a:r>
+            <a:endParaRPr lang="en-GB" dirty="0"/>
+          </a:p>
+          <a:p>
+            <a:pPr marL="342900" indent="-342900">
+              <a:buAutoNum type="arabicPeriod"/>
+            </a:pPr>
+            <a:r>
+              <a:rPr lang="en-GB" dirty="0"/>
+              <a:t>Add </a:t>
+            </a:r>
+            <a:r>
+              <a:rPr lang="en-GB" dirty="0" err="1"/>
+              <a:t>MechanicalJoint</a:t>
+            </a:r>
+            <a:endParaRPr lang="en-GB" dirty="0"/>
+          </a:p>
+        </p:txBody>
+      </p:sp>
+      <p:graphicFrame>
+        <p:nvGraphicFramePr>
+          <p:cNvPr id="2" name="Table 7">
+            <a:extLst>
+              <a:ext uri="{FF2B5EF4-FFF2-40B4-BE49-F238E27FC236}">
+                <a16:creationId xmlns:a16="http://schemas.microsoft.com/office/drawing/2014/main" id="{81206D65-D92C-1C1D-2AD6-7ED128C39235}"/>
+              </a:ext>
+            </a:extLst>
+          </p:cNvPr>
+          <p:cNvGraphicFramePr>
+            <a:graphicFrameLocks noGrp="1"/>
+          </p:cNvGraphicFramePr>
+          <p:nvPr/>
+        </p:nvGraphicFramePr>
+        <p:xfrm>
+          <a:off x="307975" y="1191319"/>
+          <a:ext cx="7807325" cy="5257106"/>
+        </p:xfrm>
+        <a:graphic>
+          <a:graphicData uri="http://schemas.openxmlformats.org/drawingml/2006/table">
+            <a:tbl>
+              <a:tblPr firstRow="1" bandRow="1">
+                <a:tableStyleId>{5C22544A-7EE6-4342-B048-85BDC9FD1C3A}</a:tableStyleId>
+              </a:tblPr>
+              <a:tblGrid>
+                <a:gridCol w="7807325">
+                  <a:extLst>
+                    <a:ext uri="{9D8B030D-6E8A-4147-A177-3AD203B41FA5}">
+                      <a16:colId xmlns:a16="http://schemas.microsoft.com/office/drawing/2014/main" val="3422904110"/>
+                    </a:ext>
+                  </a:extLst>
+                </a:gridCol>
+              </a:tblGrid>
+              <a:tr h="5257106">
+                <a:tc>
+                  <a:txBody>
+                    <a:bodyPr/>
+                    <a:lstStyle/>
+                    <a:p>
+                      <a:endParaRPr lang="en-GB" dirty="0"/>
+                    </a:p>
+                  </a:txBody>
+                  <a:tcPr>
+                    <a:lnL w="12700" cap="flat" cmpd="sng" algn="ctr">
+                      <a:solidFill>
+                        <a:schemeClr val="tx1"/>
+                      </a:solidFill>
+                      <a:prstDash val="solid"/>
+                      <a:round/>
+                      <a:headEnd type="none" w="med" len="med"/>
+                      <a:tailEnd type="none" w="med" len="med"/>
+                    </a:lnL>
+                    <a:lnR w="12700" cap="flat" cmpd="sng" algn="ctr">
+                      <a:solidFill>
+                        <a:schemeClr val="tx1"/>
+                      </a:solidFill>
+                      <a:prstDash val="solid"/>
+                      <a:round/>
+                      <a:headEnd type="none" w="med" len="med"/>
+                      <a:tailEnd type="none" w="med" len="med"/>
+                    </a:lnR>
+                    <a:lnT w="12700" cap="flat" cmpd="sng" algn="ctr">
+                      <a:solidFill>
+                        <a:schemeClr val="tx1"/>
+                      </a:solidFill>
+                      <a:prstDash val="solid"/>
+                      <a:round/>
+                      <a:headEnd type="none" w="med" len="med"/>
+                      <a:tailEnd type="none" w="med" len="med"/>
+                    </a:lnT>
+                    <a:lnB w="12700" cap="flat" cmpd="sng" algn="ctr">
+                      <a:solidFill>
+                        <a:schemeClr val="tx1"/>
+                      </a:solidFill>
+                      <a:prstDash val="solid"/>
+                      <a:round/>
+                      <a:headEnd type="none" w="med" len="med"/>
+                      <a:tailEnd type="none" w="med" len="med"/>
+                    </a:lnB>
+                    <a:noFill/>
+                  </a:tcPr>
+                </a:tc>
+                <a:extLst>
+                  <a:ext uri="{0D108BD9-81ED-4DB2-BD59-A6C34878D82A}">
+                    <a16:rowId xmlns:a16="http://schemas.microsoft.com/office/drawing/2014/main" val="1045134656"/>
+                  </a:ext>
+                </a:extLst>
+              </a:tr>
+            </a:tbl>
+          </a:graphicData>
+        </a:graphic>
+      </p:graphicFrame>
+      <p:pic>
+        <p:nvPicPr>
+          <p:cNvPr id="5" name="Picture 4">
+            <a:extLst>
+              <a:ext uri="{FF2B5EF4-FFF2-40B4-BE49-F238E27FC236}">
+                <a16:creationId xmlns:a16="http://schemas.microsoft.com/office/drawing/2014/main" id="{CE45260C-C02D-6FB3-0EF5-B400EA7FEDFA}"/>
+              </a:ext>
+            </a:extLst>
+          </p:cNvPr>
+          <p:cNvPicPr>
+            <a:picLocks noChangeAspect="1"/>
+          </p:cNvPicPr>
+          <p:nvPr/>
+        </p:nvPicPr>
+        <p:blipFill>
+          <a:blip r:embed="rId2">
+            <a:extLst>
+              <a:ext uri="{28A0092B-C50C-407E-A947-70E740481C1C}">
+                <a14:useLocalDpi xmlns:a14="http://schemas.microsoft.com/office/drawing/2010/main" val="0"/>
+              </a:ext>
+            </a:extLst>
+          </a:blip>
+          <a:srcRect/>
+          <a:stretch/>
+        </p:blipFill>
+        <p:spPr>
+          <a:xfrm>
+            <a:off x="432918" y="1394690"/>
+            <a:ext cx="7563037" cy="4812145"/>
+          </a:xfrm>
+          <a:prstGeom prst="rect">
+            <a:avLst/>
+          </a:prstGeom>
+        </p:spPr>
+      </p:pic>
+    </p:spTree>
+    <p:extLst>
+      <p:ext uri="{BB962C8B-B14F-4D97-AF65-F5344CB8AC3E}">
+        <p14:creationId xmlns:p14="http://schemas.microsoft.com/office/powerpoint/2010/main" val="1602575711"/>
       </p:ext>
     </p:extLst>
   </p:cSld>
@@ -5992,7 +6269,7 @@
         <p:spPr>
           <a:xfrm>
             <a:off x="419100" y="740122"/>
-            <a:ext cx="11216639" cy="1754326"/>
+            <a:ext cx="11216639" cy="2308324"/>
           </a:xfrm>
           <a:prstGeom prst="rect">
             <a:avLst/>
@@ -6007,7 +6284,7 @@
           <a:p>
             <a:pPr marL="342900" indent="-342900">
               <a:buFont typeface="+mj-lt"/>
-              <a:buAutoNum type="arabicPeriod" startAt="10"/>
+              <a:buAutoNum type="arabicPeriod" startAt="11"/>
             </a:pPr>
             <a:r>
               <a:rPr lang="en-GB" dirty="0"/>
@@ -6039,6 +6316,36 @@
               <a:rPr lang="en-GB" dirty="0"/>
               <a:t>Add Mount-on level element (Remove N04) &amp; Add NOA3 continuation drawing</a:t>
             </a:r>
+          </a:p>
+          <a:p>
+            <a:pPr marL="342900" indent="-342900">
+              <a:buFont typeface="+mj-lt"/>
+              <a:buAutoNum type="arabicPeriod" startAt="13"/>
+            </a:pPr>
+            <a:r>
+              <a:rPr lang="en-GB" dirty="0"/>
+              <a:t>Add </a:t>
+            </a:r>
+            <a:r>
+              <a:rPr lang="en-GB" dirty="0" err="1"/>
+              <a:t>CustomEquipmentPackage</a:t>
+            </a:r>
+            <a:r>
+              <a:rPr lang="en-GB" dirty="0"/>
+              <a:t> and add </a:t>
+            </a:r>
+            <a:r>
+              <a:rPr lang="en-GB" dirty="0" err="1"/>
+              <a:t>MechanicalJoint</a:t>
+            </a:r>
+            <a:endParaRPr lang="en-GB" dirty="0"/>
+          </a:p>
+          <a:p>
+            <a:pPr marL="342900" indent="-342900">
+              <a:buFont typeface="+mj-lt"/>
+              <a:buAutoNum type="arabicPeriod" startAt="11"/>
+            </a:pPr>
+            <a:endParaRPr lang="en-GB" dirty="0"/>
           </a:p>
           <a:p>
             <a:pPr marL="342900" indent="-342900">
@@ -6390,15 +6697,20 @@
           <p:nvPr/>
         </p:nvPicPr>
         <p:blipFill>
-          <a:blip r:embed="rId2"/>
-          <a:stretch>
-            <a:fillRect/>
-          </a:stretch>
+          <a:blip r:embed="rId2">
+            <a:extLst>
+              <a:ext uri="{28A0092B-C50C-407E-A947-70E740481C1C}">
+                <a14:useLocalDpi xmlns:a14="http://schemas.microsoft.com/office/drawing/2010/main" val="0"/>
+              </a:ext>
+            </a:extLst>
+          </a:blip>
+          <a:srcRect/>
+          <a:stretch/>
         </p:blipFill>
         <p:spPr>
           <a:xfrm>
-            <a:off x="792528" y="1792490"/>
-            <a:ext cx="6654881" cy="4054764"/>
+            <a:off x="624640" y="1515400"/>
+            <a:ext cx="7136370" cy="4562128"/>
           </a:xfrm>
           <a:prstGeom prst="rect">
             <a:avLst/>
@@ -6597,15 +6909,20 @@
           <p:nvPr/>
         </p:nvPicPr>
         <p:blipFill>
-          <a:blip r:embed="rId2"/>
-          <a:stretch>
-            <a:fillRect/>
-          </a:stretch>
+          <a:blip r:embed="rId2">
+            <a:extLst>
+              <a:ext uri="{28A0092B-C50C-407E-A947-70E740481C1C}">
+                <a14:useLocalDpi xmlns:a14="http://schemas.microsoft.com/office/drawing/2010/main" val="0"/>
+              </a:ext>
+            </a:extLst>
+          </a:blip>
+          <a:srcRect/>
+          <a:stretch/>
         </p:blipFill>
         <p:spPr>
           <a:xfrm>
-            <a:off x="487426" y="1589297"/>
-            <a:ext cx="7332599" cy="4484920"/>
+            <a:off x="418425" y="1533879"/>
+            <a:ext cx="7586423" cy="4737612"/>
           </a:xfrm>
           <a:prstGeom prst="rect">
             <a:avLst/>
@@ -6806,15 +7123,20 @@
           <p:nvPr/>
         </p:nvPicPr>
         <p:blipFill>
-          <a:blip r:embed="rId2"/>
-          <a:stretch>
-            <a:fillRect/>
-          </a:stretch>
+          <a:blip r:embed="rId2">
+            <a:extLst>
+              <a:ext uri="{28A0092B-C50C-407E-A947-70E740481C1C}">
+                <a14:useLocalDpi xmlns:a14="http://schemas.microsoft.com/office/drawing/2010/main" val="0"/>
+              </a:ext>
+            </a:extLst>
+          </a:blip>
+          <a:srcRect/>
+          <a:stretch/>
         </p:blipFill>
         <p:spPr>
           <a:xfrm>
-            <a:off x="415734" y="1390650"/>
-            <a:ext cx="7591805" cy="4629150"/>
+            <a:off x="500009" y="1390650"/>
+            <a:ext cx="7423254" cy="4629150"/>
           </a:xfrm>
           <a:prstGeom prst="rect">
             <a:avLst/>
@@ -6997,15 +7319,20 @@
           <p:nvPr/>
         </p:nvPicPr>
         <p:blipFill>
-          <a:blip r:embed="rId2"/>
-          <a:stretch>
-            <a:fillRect/>
-          </a:stretch>
+          <a:blip r:embed="rId2">
+            <a:extLst>
+              <a:ext uri="{28A0092B-C50C-407E-A947-70E740481C1C}">
+                <a14:useLocalDpi xmlns:a14="http://schemas.microsoft.com/office/drawing/2010/main" val="0"/>
+              </a:ext>
+            </a:extLst>
+          </a:blip>
+          <a:srcRect/>
+          <a:stretch/>
         </p:blipFill>
         <p:spPr>
           <a:xfrm>
-            <a:off x="734898" y="1814087"/>
-            <a:ext cx="6953477" cy="4243813"/>
+            <a:off x="394442" y="1394691"/>
+            <a:ext cx="7574237" cy="4812145"/>
           </a:xfrm>
           <a:prstGeom prst="rect">
             <a:avLst/>
@@ -7206,15 +7533,20 @@
           <p:nvPr/>
         </p:nvPicPr>
         <p:blipFill>
-          <a:blip r:embed="rId2"/>
-          <a:stretch>
-            <a:fillRect/>
-          </a:stretch>
+          <a:blip r:embed="rId2">
+            <a:extLst>
+              <a:ext uri="{28A0092B-C50C-407E-A947-70E740481C1C}">
+                <a14:useLocalDpi xmlns:a14="http://schemas.microsoft.com/office/drawing/2010/main" val="0"/>
+              </a:ext>
+            </a:extLst>
+          </a:blip>
+          <a:srcRect/>
+          <a:stretch/>
         </p:blipFill>
         <p:spPr>
           <a:xfrm>
-            <a:off x="587355" y="1559852"/>
-            <a:ext cx="7404120" cy="4520039"/>
+            <a:off x="415637" y="1315612"/>
+            <a:ext cx="7551826" cy="4881988"/>
           </a:xfrm>
           <a:prstGeom prst="rect">
             <a:avLst/>
@@ -7415,15 +7747,20 @@
           <p:nvPr/>
         </p:nvPicPr>
         <p:blipFill>
-          <a:blip r:embed="rId2"/>
-          <a:stretch>
-            <a:fillRect/>
-          </a:stretch>
+          <a:blip r:embed="rId2">
+            <a:extLst>
+              <a:ext uri="{28A0092B-C50C-407E-A947-70E740481C1C}">
+                <a14:useLocalDpi xmlns:a14="http://schemas.microsoft.com/office/drawing/2010/main" val="0"/>
+              </a:ext>
+            </a:extLst>
+          </a:blip>
+          <a:srcRect/>
+          <a:stretch/>
         </p:blipFill>
         <p:spPr>
           <a:xfrm>
-            <a:off x="487843" y="1548159"/>
-            <a:ext cx="7447587" cy="4543425"/>
+            <a:off x="438185" y="1440873"/>
+            <a:ext cx="7515587" cy="4738254"/>
           </a:xfrm>
           <a:prstGeom prst="rect">
             <a:avLst/>
